--- a/docs/doc/kosmosV5/SchemasDivers.pptx
+++ b/docs/doc/kosmosV5/SchemasDivers.pptx
@@ -9,6 +9,7 @@
     <p:sldId id="258" r:id="rId3"/>
     <p:sldId id="260" r:id="rId4"/>
     <p:sldId id="259" r:id="rId5"/>
+    <p:sldId id="261" r:id="rId6"/>
   </p:sldIdLst>
   <p:sldSz cx="12192000" cy="6858000"/>
   <p:notesSz cx="6858000" cy="9144000"/>
@@ -262,7 +263,7 @@
           <a:p>
             <a:fld id="{85167808-081D-4196-B994-014D4460AAAC}" type="datetimeFigureOut">
               <a:rPr lang="fr-FR" smtClean="0"/>
-              <a:t>09/06/2026</a:t>
+              <a:t>27/07/2026</a:t>
             </a:fld>
             <a:endParaRPr lang="fr-FR"/>
           </a:p>
@@ -460,7 +461,7 @@
           <a:p>
             <a:fld id="{85167808-081D-4196-B994-014D4460AAAC}" type="datetimeFigureOut">
               <a:rPr lang="fr-FR" smtClean="0"/>
-              <a:t>09/06/2026</a:t>
+              <a:t>27/07/2026</a:t>
             </a:fld>
             <a:endParaRPr lang="fr-FR"/>
           </a:p>
@@ -668,7 +669,7 @@
           <a:p>
             <a:fld id="{85167808-081D-4196-B994-014D4460AAAC}" type="datetimeFigureOut">
               <a:rPr lang="fr-FR" smtClean="0"/>
-              <a:t>09/06/2026</a:t>
+              <a:t>27/07/2026</a:t>
             </a:fld>
             <a:endParaRPr lang="fr-FR"/>
           </a:p>
@@ -866,7 +867,7 @@
           <a:p>
             <a:fld id="{85167808-081D-4196-B994-014D4460AAAC}" type="datetimeFigureOut">
               <a:rPr lang="fr-FR" smtClean="0"/>
-              <a:t>09/06/2026</a:t>
+              <a:t>27/07/2026</a:t>
             </a:fld>
             <a:endParaRPr lang="fr-FR"/>
           </a:p>
@@ -1141,7 +1142,7 @@
           <a:p>
             <a:fld id="{85167808-081D-4196-B994-014D4460AAAC}" type="datetimeFigureOut">
               <a:rPr lang="fr-FR" smtClean="0"/>
-              <a:t>09/06/2026</a:t>
+              <a:t>27/07/2026</a:t>
             </a:fld>
             <a:endParaRPr lang="fr-FR"/>
           </a:p>
@@ -1406,7 +1407,7 @@
           <a:p>
             <a:fld id="{85167808-081D-4196-B994-014D4460AAAC}" type="datetimeFigureOut">
               <a:rPr lang="fr-FR" smtClean="0"/>
-              <a:t>09/06/2026</a:t>
+              <a:t>27/07/2026</a:t>
             </a:fld>
             <a:endParaRPr lang="fr-FR"/>
           </a:p>
@@ -1818,7 +1819,7 @@
           <a:p>
             <a:fld id="{85167808-081D-4196-B994-014D4460AAAC}" type="datetimeFigureOut">
               <a:rPr lang="fr-FR" smtClean="0"/>
-              <a:t>09/06/2026</a:t>
+              <a:t>27/07/2026</a:t>
             </a:fld>
             <a:endParaRPr lang="fr-FR"/>
           </a:p>
@@ -1959,7 +1960,7 @@
           <a:p>
             <a:fld id="{85167808-081D-4196-B994-014D4460AAAC}" type="datetimeFigureOut">
               <a:rPr lang="fr-FR" smtClean="0"/>
-              <a:t>09/06/2026</a:t>
+              <a:t>27/07/2026</a:t>
             </a:fld>
             <a:endParaRPr lang="fr-FR"/>
           </a:p>
@@ -2072,7 +2073,7 @@
           <a:p>
             <a:fld id="{85167808-081D-4196-B994-014D4460AAAC}" type="datetimeFigureOut">
               <a:rPr lang="fr-FR" smtClean="0"/>
-              <a:t>09/06/2026</a:t>
+              <a:t>27/07/2026</a:t>
             </a:fld>
             <a:endParaRPr lang="fr-FR"/>
           </a:p>
@@ -2383,7 +2384,7 @@
           <a:p>
             <a:fld id="{85167808-081D-4196-B994-014D4460AAAC}" type="datetimeFigureOut">
               <a:rPr lang="fr-FR" smtClean="0"/>
-              <a:t>09/06/2026</a:t>
+              <a:t>27/07/2026</a:t>
             </a:fld>
             <a:endParaRPr lang="fr-FR"/>
           </a:p>
@@ -2671,7 +2672,7 @@
           <a:p>
             <a:fld id="{85167808-081D-4196-B994-014D4460AAAC}" type="datetimeFigureOut">
               <a:rPr lang="fr-FR" smtClean="0"/>
-              <a:t>09/06/2026</a:t>
+              <a:t>27/07/2026</a:t>
             </a:fld>
             <a:endParaRPr lang="fr-FR"/>
           </a:p>
@@ -2912,7 +2913,7 @@
           <a:p>
             <a:fld id="{85167808-081D-4196-B994-014D4460AAAC}" type="datetimeFigureOut">
               <a:rPr lang="fr-FR" smtClean="0"/>
-              <a:t>09/06/2026</a:t>
+              <a:t>27/07/2026</a:t>
             </a:fld>
             <a:endParaRPr lang="fr-FR"/>
           </a:p>
@@ -8901,6 +8902,2286 @@
 </p:sld>
 </file>
 
+<file path=ppt/slides/slide5.xml><?xml version="1.0" encoding="utf-8"?>
+<p:sld xmlns:a="http://schemas.openxmlformats.org/drawingml/2006/main" xmlns:r="http://schemas.openxmlformats.org/officeDocument/2006/relationships" xmlns:p="http://schemas.openxmlformats.org/presentationml/2006/main">
+  <p:cSld>
+    <p:spTree>
+      <p:nvGrpSpPr>
+        <p:cNvPr id="1" name=""/>
+        <p:cNvGrpSpPr/>
+        <p:nvPr/>
+      </p:nvGrpSpPr>
+      <p:grpSpPr>
+        <a:xfrm>
+          <a:off x="0" y="0"/>
+          <a:ext cx="0" cy="0"/>
+          <a:chOff x="0" y="0"/>
+          <a:chExt cx="0" cy="0"/>
+        </a:xfrm>
+      </p:grpSpPr>
+      <p:grpSp>
+        <p:nvGrpSpPr>
+          <p:cNvPr id="105" name="Groupe 104">
+            <a:extLst>
+              <a:ext uri="{FF2B5EF4-FFF2-40B4-BE49-F238E27FC236}">
+                <a16:creationId xmlns:a16="http://schemas.microsoft.com/office/drawing/2014/main" id="{72CF4ED9-9C05-4EAD-9864-8430175C567A}"/>
+              </a:ext>
+            </a:extLst>
+          </p:cNvPr>
+          <p:cNvGrpSpPr/>
+          <p:nvPr/>
+        </p:nvGrpSpPr>
+        <p:grpSpPr>
+          <a:xfrm>
+            <a:off x="2455278" y="64545"/>
+            <a:ext cx="5571966" cy="6496772"/>
+            <a:chOff x="2455278" y="64545"/>
+            <a:chExt cx="5571966" cy="6496772"/>
+          </a:xfrm>
+        </p:grpSpPr>
+        <p:sp>
+          <p:nvSpPr>
+            <p:cNvPr id="98" name="Forme libre : forme 97">
+              <a:extLst>
+                <a:ext uri="{FF2B5EF4-FFF2-40B4-BE49-F238E27FC236}">
+                  <a16:creationId xmlns:a16="http://schemas.microsoft.com/office/drawing/2014/main" id="{F43CA64C-4D21-4930-903C-FDB8D8F24F5E}"/>
+                </a:ext>
+              </a:extLst>
+            </p:cNvPr>
+            <p:cNvSpPr/>
+            <p:nvPr/>
+          </p:nvSpPr>
+          <p:spPr>
+            <a:xfrm>
+              <a:off x="4762500" y="249555"/>
+              <a:ext cx="24765" cy="53340"/>
+            </a:xfrm>
+            <a:custGeom>
+              <a:avLst/>
+              <a:gdLst>
+                <a:gd name="connsiteX0" fmla="*/ 0 w 24765"/>
+                <a:gd name="connsiteY0" fmla="*/ 0 h 53340"/>
+                <a:gd name="connsiteX1" fmla="*/ 24765 w 24765"/>
+                <a:gd name="connsiteY1" fmla="*/ 53340 h 53340"/>
+              </a:gdLst>
+              <a:ahLst/>
+              <a:cxnLst>
+                <a:cxn ang="0">
+                  <a:pos x="connsiteX0" y="connsiteY0"/>
+                </a:cxn>
+                <a:cxn ang="0">
+                  <a:pos x="connsiteX1" y="connsiteY1"/>
+                </a:cxn>
+              </a:cxnLst>
+              <a:rect l="l" t="t" r="r" b="b"/>
+              <a:pathLst>
+                <a:path w="24765" h="53340">
+                  <a:moveTo>
+                    <a:pt x="0" y="0"/>
+                  </a:moveTo>
+                  <a:lnTo>
+                    <a:pt x="24765" y="53340"/>
+                  </a:lnTo>
+                </a:path>
+              </a:pathLst>
+            </a:custGeom>
+            <a:ln/>
+          </p:spPr>
+          <p:style>
+            <a:lnRef idx="1">
+              <a:schemeClr val="accent6"/>
+            </a:lnRef>
+            <a:fillRef idx="0">
+              <a:schemeClr val="accent6"/>
+            </a:fillRef>
+            <a:effectRef idx="0">
+              <a:schemeClr val="accent6"/>
+            </a:effectRef>
+            <a:fontRef idx="minor">
+              <a:schemeClr val="tx1"/>
+            </a:fontRef>
+          </p:style>
+          <p:txBody>
+            <a:bodyPr rtlCol="0" anchor="ctr"/>
+            <a:lstStyle/>
+            <a:p>
+              <a:pPr algn="ctr"/>
+              <a:endParaRPr lang="fr-FR"/>
+            </a:p>
+          </p:txBody>
+        </p:sp>
+        <p:pic>
+          <p:nvPicPr>
+            <p:cNvPr id="4" name="Image 3">
+              <a:extLst>
+                <a:ext uri="{FF2B5EF4-FFF2-40B4-BE49-F238E27FC236}">
+                  <a16:creationId xmlns:a16="http://schemas.microsoft.com/office/drawing/2014/main" id="{D000E3AB-18B0-42D5-B294-99F623DA6CC1}"/>
+                </a:ext>
+              </a:extLst>
+            </p:cNvPr>
+            <p:cNvPicPr>
+              <a:picLocks noChangeAspect="1"/>
+            </p:cNvPicPr>
+            <p:nvPr/>
+          </p:nvPicPr>
+          <p:blipFill>
+            <a:blip r:embed="rId2">
+              <a:extLst>
+                <a:ext uri="{BEBA8EAE-BF5A-486C-A8C5-ECC9F3942E4B}">
+                  <a14:imgProps xmlns:a14="http://schemas.microsoft.com/office/drawing/2010/main">
+                    <a14:imgLayer r:embed="rId3">
+                      <a14:imgEffect>
+                        <a14:backgroundRemoval t="7917" b="92917" l="10000" r="90000">
+                          <a14:foregroundMark x1="50417" y1="8333" x2="50417" y2="8333"/>
+                          <a14:foregroundMark x1="52500" y1="92917" x2="52500" y2="92917"/>
+                        </a14:backgroundRemoval>
+                      </a14:imgEffect>
+                    </a14:imgLayer>
+                  </a14:imgProps>
+                </a:ext>
+              </a:extLst>
+            </a:blip>
+            <a:stretch>
+              <a:fillRect/>
+            </a:stretch>
+          </p:blipFill>
+          <p:spPr>
+            <a:xfrm>
+              <a:off x="3968236" y="172990"/>
+              <a:ext cx="1324583" cy="1324583"/>
+            </a:xfrm>
+            <a:prstGeom prst="rect">
+              <a:avLst/>
+            </a:prstGeom>
+          </p:spPr>
+        </p:pic>
+        <p:pic>
+          <p:nvPicPr>
+            <p:cNvPr id="14" name="Image 13">
+              <a:extLst>
+                <a:ext uri="{FF2B5EF4-FFF2-40B4-BE49-F238E27FC236}">
+                  <a16:creationId xmlns:a16="http://schemas.microsoft.com/office/drawing/2014/main" id="{F64C3445-1BC6-438C-87E5-F930F1968F32}"/>
+                </a:ext>
+              </a:extLst>
+            </p:cNvPr>
+            <p:cNvPicPr>
+              <a:picLocks noChangeAspect="1"/>
+            </p:cNvPicPr>
+            <p:nvPr/>
+          </p:nvPicPr>
+          <p:blipFill rotWithShape="1">
+            <a:blip r:embed="rId4">
+              <a:clrChange>
+                <a:clrFrom>
+                  <a:srgbClr val="FFFFFF"/>
+                </a:clrFrom>
+                <a:clrTo>
+                  <a:srgbClr val="FFFFFF">
+                    <a:alpha val="0"/>
+                  </a:srgbClr>
+                </a:clrTo>
+              </a:clrChange>
+            </a:blip>
+            <a:srcRect l="9933" t="25797" r="4193" b="31320"/>
+            <a:stretch/>
+          </p:blipFill>
+          <p:spPr>
+            <a:xfrm rot="5781347">
+              <a:off x="4380291" y="1586375"/>
+              <a:ext cx="500470" cy="249919"/>
+            </a:xfrm>
+            <a:prstGeom prst="rect">
+              <a:avLst/>
+            </a:prstGeom>
+          </p:spPr>
+        </p:pic>
+        <p:cxnSp>
+          <p:nvCxnSpPr>
+            <p:cNvPr id="22" name="Connecteur droit 21">
+              <a:extLst>
+                <a:ext uri="{FF2B5EF4-FFF2-40B4-BE49-F238E27FC236}">
+                  <a16:creationId xmlns:a16="http://schemas.microsoft.com/office/drawing/2014/main" id="{20EB9C18-A89D-4BBA-A92B-6DCD3F7E9741}"/>
+                </a:ext>
+              </a:extLst>
+            </p:cNvPr>
+            <p:cNvCxnSpPr>
+              <a:cxnSpLocks/>
+              <a:stCxn id="27" idx="0"/>
+              <a:endCxn id="25" idx="0"/>
+            </p:cNvCxnSpPr>
+            <p:nvPr/>
+          </p:nvCxnSpPr>
+          <p:spPr>
+            <a:xfrm>
+              <a:off x="4576724" y="2627975"/>
+              <a:ext cx="5722" cy="1872409"/>
+            </a:xfrm>
+            <a:prstGeom prst="line">
+              <a:avLst/>
+            </a:prstGeom>
+            <a:ln w="28575">
+              <a:solidFill>
+                <a:srgbClr val="00B050"/>
+              </a:solidFill>
+            </a:ln>
+          </p:spPr>
+          <p:style>
+            <a:lnRef idx="1">
+              <a:schemeClr val="accent1"/>
+            </a:lnRef>
+            <a:fillRef idx="0">
+              <a:schemeClr val="accent1"/>
+            </a:fillRef>
+            <a:effectRef idx="0">
+              <a:schemeClr val="accent1"/>
+            </a:effectRef>
+            <a:fontRef idx="minor">
+              <a:schemeClr val="tx1"/>
+            </a:fontRef>
+          </p:style>
+        </p:cxnSp>
+        <p:sp>
+          <p:nvSpPr>
+            <p:cNvPr id="23" name="Forme libre : forme 22">
+              <a:extLst>
+                <a:ext uri="{FF2B5EF4-FFF2-40B4-BE49-F238E27FC236}">
+                  <a16:creationId xmlns:a16="http://schemas.microsoft.com/office/drawing/2014/main" id="{5699FD81-4F87-4B47-80B4-C9DDEB50A9AF}"/>
+                </a:ext>
+              </a:extLst>
+            </p:cNvPr>
+            <p:cNvSpPr/>
+            <p:nvPr/>
+          </p:nvSpPr>
+          <p:spPr>
+            <a:xfrm>
+              <a:off x="4539480" y="5163528"/>
+              <a:ext cx="128963" cy="323088"/>
+            </a:xfrm>
+            <a:custGeom>
+              <a:avLst/>
+              <a:gdLst>
+                <a:gd name="connsiteX0" fmla="*/ 42966 w 128963"/>
+                <a:gd name="connsiteY0" fmla="*/ 0 h 323088"/>
+                <a:gd name="connsiteX1" fmla="*/ 91734 w 128963"/>
+                <a:gd name="connsiteY1" fmla="*/ 182880 h 323088"/>
+                <a:gd name="connsiteX2" fmla="*/ 294 w 128963"/>
+                <a:gd name="connsiteY2" fmla="*/ 140208 h 323088"/>
+                <a:gd name="connsiteX3" fmla="*/ 128310 w 128963"/>
+                <a:gd name="connsiteY3" fmla="*/ 97536 h 323088"/>
+                <a:gd name="connsiteX4" fmla="*/ 49062 w 128963"/>
+                <a:gd name="connsiteY4" fmla="*/ 164592 h 323088"/>
+                <a:gd name="connsiteX5" fmla="*/ 24678 w 128963"/>
+                <a:gd name="connsiteY5" fmla="*/ 323088 h 323088"/>
+              </a:gdLst>
+              <a:ahLst/>
+              <a:cxnLst>
+                <a:cxn ang="0">
+                  <a:pos x="connsiteX0" y="connsiteY0"/>
+                </a:cxn>
+                <a:cxn ang="0">
+                  <a:pos x="connsiteX1" y="connsiteY1"/>
+                </a:cxn>
+                <a:cxn ang="0">
+                  <a:pos x="connsiteX2" y="connsiteY2"/>
+                </a:cxn>
+                <a:cxn ang="0">
+                  <a:pos x="connsiteX3" y="connsiteY3"/>
+                </a:cxn>
+                <a:cxn ang="0">
+                  <a:pos x="connsiteX4" y="connsiteY4"/>
+                </a:cxn>
+                <a:cxn ang="0">
+                  <a:pos x="connsiteX5" y="connsiteY5"/>
+                </a:cxn>
+              </a:cxnLst>
+              <a:rect l="l" t="t" r="r" b="b"/>
+              <a:pathLst>
+                <a:path w="128963" h="323088">
+                  <a:moveTo>
+                    <a:pt x="42966" y="0"/>
+                  </a:moveTo>
+                  <a:cubicBezTo>
+                    <a:pt x="70906" y="79756"/>
+                    <a:pt x="98846" y="159512"/>
+                    <a:pt x="91734" y="182880"/>
+                  </a:cubicBezTo>
+                  <a:cubicBezTo>
+                    <a:pt x="84622" y="206248"/>
+                    <a:pt x="-5802" y="154432"/>
+                    <a:pt x="294" y="140208"/>
+                  </a:cubicBezTo>
+                  <a:cubicBezTo>
+                    <a:pt x="6390" y="125984"/>
+                    <a:pt x="120182" y="93472"/>
+                    <a:pt x="128310" y="97536"/>
+                  </a:cubicBezTo>
+                  <a:cubicBezTo>
+                    <a:pt x="136438" y="101600"/>
+                    <a:pt x="66334" y="127000"/>
+                    <a:pt x="49062" y="164592"/>
+                  </a:cubicBezTo>
+                  <a:cubicBezTo>
+                    <a:pt x="31790" y="202184"/>
+                    <a:pt x="28234" y="262636"/>
+                    <a:pt x="24678" y="323088"/>
+                  </a:cubicBezTo>
+                </a:path>
+              </a:pathLst>
+            </a:custGeom>
+            <a:noFill/>
+            <a:ln w="28575">
+              <a:solidFill>
+                <a:srgbClr val="00B050"/>
+              </a:solidFill>
+            </a:ln>
+          </p:spPr>
+          <p:style>
+            <a:lnRef idx="2">
+              <a:schemeClr val="accent1">
+                <a:shade val="50000"/>
+              </a:schemeClr>
+            </a:lnRef>
+            <a:fillRef idx="1">
+              <a:schemeClr val="accent1"/>
+            </a:fillRef>
+            <a:effectRef idx="0">
+              <a:schemeClr val="accent1"/>
+            </a:effectRef>
+            <a:fontRef idx="minor">
+              <a:schemeClr val="lt1"/>
+            </a:fontRef>
+          </p:style>
+          <p:txBody>
+            <a:bodyPr rtlCol="0" anchor="ctr"/>
+            <a:lstStyle/>
+            <a:p>
+              <a:pPr algn="ctr"/>
+              <a:endParaRPr lang="fr-FR"/>
+            </a:p>
+          </p:txBody>
+        </p:sp>
+        <p:sp>
+          <p:nvSpPr>
+            <p:cNvPr id="25" name="Forme libre : forme 24">
+              <a:extLst>
+                <a:ext uri="{FF2B5EF4-FFF2-40B4-BE49-F238E27FC236}">
+                  <a16:creationId xmlns:a16="http://schemas.microsoft.com/office/drawing/2014/main" id="{1B7C243E-3E27-4FD7-AC8D-A4F4BE7A70D9}"/>
+                </a:ext>
+              </a:extLst>
+            </p:cNvPr>
+            <p:cNvSpPr/>
+            <p:nvPr/>
+          </p:nvSpPr>
+          <p:spPr>
+            <a:xfrm>
+              <a:off x="4539480" y="4500384"/>
+              <a:ext cx="128963" cy="323088"/>
+            </a:xfrm>
+            <a:custGeom>
+              <a:avLst/>
+              <a:gdLst>
+                <a:gd name="connsiteX0" fmla="*/ 42966 w 128963"/>
+                <a:gd name="connsiteY0" fmla="*/ 0 h 323088"/>
+                <a:gd name="connsiteX1" fmla="*/ 91734 w 128963"/>
+                <a:gd name="connsiteY1" fmla="*/ 182880 h 323088"/>
+                <a:gd name="connsiteX2" fmla="*/ 294 w 128963"/>
+                <a:gd name="connsiteY2" fmla="*/ 140208 h 323088"/>
+                <a:gd name="connsiteX3" fmla="*/ 128310 w 128963"/>
+                <a:gd name="connsiteY3" fmla="*/ 97536 h 323088"/>
+                <a:gd name="connsiteX4" fmla="*/ 49062 w 128963"/>
+                <a:gd name="connsiteY4" fmla="*/ 164592 h 323088"/>
+                <a:gd name="connsiteX5" fmla="*/ 24678 w 128963"/>
+                <a:gd name="connsiteY5" fmla="*/ 323088 h 323088"/>
+              </a:gdLst>
+              <a:ahLst/>
+              <a:cxnLst>
+                <a:cxn ang="0">
+                  <a:pos x="connsiteX0" y="connsiteY0"/>
+                </a:cxn>
+                <a:cxn ang="0">
+                  <a:pos x="connsiteX1" y="connsiteY1"/>
+                </a:cxn>
+                <a:cxn ang="0">
+                  <a:pos x="connsiteX2" y="connsiteY2"/>
+                </a:cxn>
+                <a:cxn ang="0">
+                  <a:pos x="connsiteX3" y="connsiteY3"/>
+                </a:cxn>
+                <a:cxn ang="0">
+                  <a:pos x="connsiteX4" y="connsiteY4"/>
+                </a:cxn>
+                <a:cxn ang="0">
+                  <a:pos x="connsiteX5" y="connsiteY5"/>
+                </a:cxn>
+              </a:cxnLst>
+              <a:rect l="l" t="t" r="r" b="b"/>
+              <a:pathLst>
+                <a:path w="128963" h="323088">
+                  <a:moveTo>
+                    <a:pt x="42966" y="0"/>
+                  </a:moveTo>
+                  <a:cubicBezTo>
+                    <a:pt x="70906" y="79756"/>
+                    <a:pt x="98846" y="159512"/>
+                    <a:pt x="91734" y="182880"/>
+                  </a:cubicBezTo>
+                  <a:cubicBezTo>
+                    <a:pt x="84622" y="206248"/>
+                    <a:pt x="-5802" y="154432"/>
+                    <a:pt x="294" y="140208"/>
+                  </a:cubicBezTo>
+                  <a:cubicBezTo>
+                    <a:pt x="6390" y="125984"/>
+                    <a:pt x="120182" y="93472"/>
+                    <a:pt x="128310" y="97536"/>
+                  </a:cubicBezTo>
+                  <a:cubicBezTo>
+                    <a:pt x="136438" y="101600"/>
+                    <a:pt x="66334" y="127000"/>
+                    <a:pt x="49062" y="164592"/>
+                  </a:cubicBezTo>
+                  <a:cubicBezTo>
+                    <a:pt x="31790" y="202184"/>
+                    <a:pt x="28234" y="262636"/>
+                    <a:pt x="24678" y="323088"/>
+                  </a:cubicBezTo>
+                </a:path>
+              </a:pathLst>
+            </a:custGeom>
+            <a:noFill/>
+            <a:ln w="28575">
+              <a:solidFill>
+                <a:srgbClr val="00B050"/>
+              </a:solidFill>
+            </a:ln>
+          </p:spPr>
+          <p:style>
+            <a:lnRef idx="2">
+              <a:schemeClr val="accent1">
+                <a:shade val="50000"/>
+              </a:schemeClr>
+            </a:lnRef>
+            <a:fillRef idx="1">
+              <a:schemeClr val="accent1"/>
+            </a:fillRef>
+            <a:effectRef idx="0">
+              <a:schemeClr val="accent1"/>
+            </a:effectRef>
+            <a:fontRef idx="minor">
+              <a:schemeClr val="lt1"/>
+            </a:fontRef>
+          </p:style>
+          <p:txBody>
+            <a:bodyPr rtlCol="0" anchor="ctr"/>
+            <a:lstStyle/>
+            <a:p>
+              <a:pPr algn="ctr"/>
+              <a:endParaRPr lang="fr-FR"/>
+            </a:p>
+          </p:txBody>
+        </p:sp>
+        <p:pic>
+          <p:nvPicPr>
+            <p:cNvPr id="8" name="Image 7">
+              <a:extLst>
+                <a:ext uri="{FF2B5EF4-FFF2-40B4-BE49-F238E27FC236}">
+                  <a16:creationId xmlns:a16="http://schemas.microsoft.com/office/drawing/2014/main" id="{219AC075-1CBE-40C5-9272-21944C0D97E8}"/>
+                </a:ext>
+              </a:extLst>
+            </p:cNvPr>
+            <p:cNvPicPr>
+              <a:picLocks noChangeAspect="1"/>
+            </p:cNvPicPr>
+            <p:nvPr/>
+          </p:nvPicPr>
+          <p:blipFill>
+            <a:blip r:embed="rId5"/>
+            <a:stretch>
+              <a:fillRect/>
+            </a:stretch>
+          </p:blipFill>
+          <p:spPr>
+            <a:xfrm>
+              <a:off x="4388494" y="4722888"/>
+              <a:ext cx="370342" cy="508682"/>
+            </a:xfrm>
+            <a:prstGeom prst="rect">
+              <a:avLst/>
+            </a:prstGeom>
+          </p:spPr>
+        </p:pic>
+        <p:sp>
+          <p:nvSpPr>
+            <p:cNvPr id="27" name="Forme libre : forme 26">
+              <a:extLst>
+                <a:ext uri="{FF2B5EF4-FFF2-40B4-BE49-F238E27FC236}">
+                  <a16:creationId xmlns:a16="http://schemas.microsoft.com/office/drawing/2014/main" id="{034D63AC-6590-47FC-8DDD-009C05353A84}"/>
+                </a:ext>
+              </a:extLst>
+            </p:cNvPr>
+            <p:cNvSpPr/>
+            <p:nvPr/>
+          </p:nvSpPr>
+          <p:spPr>
+            <a:xfrm rot="10800000">
+              <a:off x="4503550" y="2134078"/>
+              <a:ext cx="152422" cy="493897"/>
+            </a:xfrm>
+            <a:custGeom>
+              <a:avLst/>
+              <a:gdLst>
+                <a:gd name="connsiteX0" fmla="*/ 79248 w 152422"/>
+                <a:gd name="connsiteY0" fmla="*/ 0 h 493897"/>
+                <a:gd name="connsiteX1" fmla="*/ 79248 w 152422"/>
+                <a:gd name="connsiteY1" fmla="*/ 146304 h 493897"/>
+                <a:gd name="connsiteX2" fmla="*/ 0 w 152422"/>
+                <a:gd name="connsiteY2" fmla="*/ 341376 h 493897"/>
+                <a:gd name="connsiteX3" fmla="*/ 79248 w 152422"/>
+                <a:gd name="connsiteY3" fmla="*/ 493776 h 493897"/>
+                <a:gd name="connsiteX4" fmla="*/ 152400 w 152422"/>
+                <a:gd name="connsiteY4" fmla="*/ 316992 h 493897"/>
+                <a:gd name="connsiteX5" fmla="*/ 85344 w 152422"/>
+                <a:gd name="connsiteY5" fmla="*/ 109728 h 493897"/>
+              </a:gdLst>
+              <a:ahLst/>
+              <a:cxnLst>
+                <a:cxn ang="0">
+                  <a:pos x="connsiteX0" y="connsiteY0"/>
+                </a:cxn>
+                <a:cxn ang="0">
+                  <a:pos x="connsiteX1" y="connsiteY1"/>
+                </a:cxn>
+                <a:cxn ang="0">
+                  <a:pos x="connsiteX2" y="connsiteY2"/>
+                </a:cxn>
+                <a:cxn ang="0">
+                  <a:pos x="connsiteX3" y="connsiteY3"/>
+                </a:cxn>
+                <a:cxn ang="0">
+                  <a:pos x="connsiteX4" y="connsiteY4"/>
+                </a:cxn>
+                <a:cxn ang="0">
+                  <a:pos x="connsiteX5" y="connsiteY5"/>
+                </a:cxn>
+              </a:cxnLst>
+              <a:rect l="l" t="t" r="r" b="b"/>
+              <a:pathLst>
+                <a:path w="152422" h="493897">
+                  <a:moveTo>
+                    <a:pt x="79248" y="0"/>
+                  </a:moveTo>
+                  <a:cubicBezTo>
+                    <a:pt x="85852" y="44704"/>
+                    <a:pt x="92456" y="89408"/>
+                    <a:pt x="79248" y="146304"/>
+                  </a:cubicBezTo>
+                  <a:cubicBezTo>
+                    <a:pt x="66040" y="203200"/>
+                    <a:pt x="0" y="283464"/>
+                    <a:pt x="0" y="341376"/>
+                  </a:cubicBezTo>
+                  <a:cubicBezTo>
+                    <a:pt x="0" y="399288"/>
+                    <a:pt x="53848" y="497840"/>
+                    <a:pt x="79248" y="493776"/>
+                  </a:cubicBezTo>
+                  <a:cubicBezTo>
+                    <a:pt x="104648" y="489712"/>
+                    <a:pt x="151384" y="381000"/>
+                    <a:pt x="152400" y="316992"/>
+                  </a:cubicBezTo>
+                  <a:cubicBezTo>
+                    <a:pt x="153416" y="252984"/>
+                    <a:pt x="119380" y="181356"/>
+                    <a:pt x="85344" y="109728"/>
+                  </a:cubicBezTo>
+                </a:path>
+              </a:pathLst>
+            </a:custGeom>
+            <a:noFill/>
+            <a:ln w="28575">
+              <a:solidFill>
+                <a:srgbClr val="00B050"/>
+              </a:solidFill>
+            </a:ln>
+          </p:spPr>
+          <p:style>
+            <a:lnRef idx="2">
+              <a:schemeClr val="accent1">
+                <a:shade val="50000"/>
+              </a:schemeClr>
+            </a:lnRef>
+            <a:fillRef idx="1">
+              <a:schemeClr val="accent1"/>
+            </a:fillRef>
+            <a:effectRef idx="0">
+              <a:schemeClr val="accent1"/>
+            </a:effectRef>
+            <a:fontRef idx="minor">
+              <a:schemeClr val="lt1"/>
+            </a:fontRef>
+          </p:style>
+          <p:txBody>
+            <a:bodyPr rtlCol="0" anchor="ctr"/>
+            <a:lstStyle/>
+            <a:p>
+              <a:pPr algn="ctr"/>
+              <a:endParaRPr lang="fr-FR"/>
+            </a:p>
+          </p:txBody>
+        </p:sp>
+        <p:grpSp>
+          <p:nvGrpSpPr>
+            <p:cNvPr id="33" name="Groupe 32">
+              <a:extLst>
+                <a:ext uri="{FF2B5EF4-FFF2-40B4-BE49-F238E27FC236}">
+                  <a16:creationId xmlns:a16="http://schemas.microsoft.com/office/drawing/2014/main" id="{85DF0DFF-7039-4CF7-90BF-BA4E270F70BE}"/>
+                </a:ext>
+              </a:extLst>
+            </p:cNvPr>
+            <p:cNvGrpSpPr/>
+            <p:nvPr/>
+          </p:nvGrpSpPr>
+          <p:grpSpPr>
+            <a:xfrm>
+              <a:off x="4411877" y="5490122"/>
+              <a:ext cx="303973" cy="991468"/>
+              <a:chOff x="1842413" y="5604422"/>
+              <a:chExt cx="303973" cy="991468"/>
+            </a:xfrm>
+          </p:grpSpPr>
+          <p:pic>
+            <p:nvPicPr>
+              <p:cNvPr id="16" name="Image 15">
+                <a:extLst>
+                  <a:ext uri="{FF2B5EF4-FFF2-40B4-BE49-F238E27FC236}">
+                    <a16:creationId xmlns:a16="http://schemas.microsoft.com/office/drawing/2014/main" id="{620EDEC6-90FA-48B9-B65E-D60F96F13639}"/>
+                  </a:ext>
+                </a:extLst>
+              </p:cNvPr>
+              <p:cNvPicPr>
+                <a:picLocks noChangeAspect="1"/>
+              </p:cNvPicPr>
+              <p:nvPr/>
+            </p:nvPicPr>
+            <p:blipFill rotWithShape="1">
+              <a:blip r:embed="rId6"/>
+              <a:srcRect l="30907" t="12683" r="31810" b="15454"/>
+              <a:stretch/>
+            </p:blipFill>
+            <p:spPr>
+              <a:xfrm>
+                <a:off x="1842413" y="6008955"/>
+                <a:ext cx="303973" cy="586935"/>
+              </a:xfrm>
+              <a:prstGeom prst="rect">
+                <a:avLst/>
+              </a:prstGeom>
+            </p:spPr>
+          </p:pic>
+          <p:cxnSp>
+            <p:nvCxnSpPr>
+              <p:cNvPr id="24" name="Connecteur droit 23">
+                <a:extLst>
+                  <a:ext uri="{FF2B5EF4-FFF2-40B4-BE49-F238E27FC236}">
+                    <a16:creationId xmlns:a16="http://schemas.microsoft.com/office/drawing/2014/main" id="{F3333B45-6BC4-4B21-9225-F5D95FD97A21}"/>
+                  </a:ext>
+                </a:extLst>
+              </p:cNvPr>
+              <p:cNvCxnSpPr>
+                <a:cxnSpLocks/>
+                <a:stCxn id="31" idx="0"/>
+              </p:cNvCxnSpPr>
+              <p:nvPr/>
+            </p:nvCxnSpPr>
+            <p:spPr>
+              <a:xfrm flipH="1">
+                <a:off x="1991715" y="5604422"/>
+                <a:ext cx="2852" cy="144106"/>
+              </a:xfrm>
+              <a:prstGeom prst="line">
+                <a:avLst/>
+              </a:prstGeom>
+              <a:ln w="28575">
+                <a:solidFill>
+                  <a:srgbClr val="00B050"/>
+                </a:solidFill>
+              </a:ln>
+            </p:spPr>
+            <p:style>
+              <a:lnRef idx="1">
+                <a:schemeClr val="accent1"/>
+              </a:lnRef>
+              <a:fillRef idx="0">
+                <a:schemeClr val="accent1"/>
+              </a:fillRef>
+              <a:effectRef idx="0">
+                <a:schemeClr val="accent1"/>
+              </a:effectRef>
+              <a:fontRef idx="minor">
+                <a:schemeClr val="tx1"/>
+              </a:fontRef>
+            </p:style>
+          </p:cxnSp>
+          <p:sp>
+            <p:nvSpPr>
+              <p:cNvPr id="31" name="Forme libre : forme 30">
+                <a:extLst>
+                  <a:ext uri="{FF2B5EF4-FFF2-40B4-BE49-F238E27FC236}">
+                    <a16:creationId xmlns:a16="http://schemas.microsoft.com/office/drawing/2014/main" id="{4B6E6F6A-419B-4FF0-A6B5-E78098253660}"/>
+                  </a:ext>
+                </a:extLst>
+              </p:cNvPr>
+              <p:cNvSpPr/>
+              <p:nvPr/>
+            </p:nvSpPr>
+            <p:spPr>
+              <a:xfrm>
+                <a:off x="1909169" y="5604422"/>
+                <a:ext cx="85398" cy="542544"/>
+              </a:xfrm>
+              <a:custGeom>
+                <a:avLst/>
+                <a:gdLst>
+                  <a:gd name="connsiteX0" fmla="*/ 85398 w 85398"/>
+                  <a:gd name="connsiteY0" fmla="*/ 0 h 542544"/>
+                  <a:gd name="connsiteX1" fmla="*/ 67110 w 85398"/>
+                  <a:gd name="connsiteY1" fmla="*/ 176784 h 542544"/>
+                  <a:gd name="connsiteX2" fmla="*/ 54 w 85398"/>
+                  <a:gd name="connsiteY2" fmla="*/ 384048 h 542544"/>
+                  <a:gd name="connsiteX3" fmla="*/ 79302 w 85398"/>
+                  <a:gd name="connsiteY3" fmla="*/ 542544 h 542544"/>
+                </a:gdLst>
+                <a:ahLst/>
+                <a:cxnLst>
+                  <a:cxn ang="0">
+                    <a:pos x="connsiteX0" y="connsiteY0"/>
+                  </a:cxn>
+                  <a:cxn ang="0">
+                    <a:pos x="connsiteX1" y="connsiteY1"/>
+                  </a:cxn>
+                  <a:cxn ang="0">
+                    <a:pos x="connsiteX2" y="connsiteY2"/>
+                  </a:cxn>
+                  <a:cxn ang="0">
+                    <a:pos x="connsiteX3" y="connsiteY3"/>
+                  </a:cxn>
+                </a:cxnLst>
+                <a:rect l="l" t="t" r="r" b="b"/>
+                <a:pathLst>
+                  <a:path w="85398" h="542544">
+                    <a:moveTo>
+                      <a:pt x="85398" y="0"/>
+                    </a:moveTo>
+                    <a:cubicBezTo>
+                      <a:pt x="83366" y="56388"/>
+                      <a:pt x="81334" y="112776"/>
+                      <a:pt x="67110" y="176784"/>
+                    </a:cubicBezTo>
+                    <a:cubicBezTo>
+                      <a:pt x="52886" y="240792"/>
+                      <a:pt x="-1978" y="323088"/>
+                      <a:pt x="54" y="384048"/>
+                    </a:cubicBezTo>
+                    <a:cubicBezTo>
+                      <a:pt x="2086" y="445008"/>
+                      <a:pt x="40694" y="493776"/>
+                      <a:pt x="79302" y="542544"/>
+                    </a:cubicBezTo>
+                  </a:path>
+                </a:pathLst>
+              </a:custGeom>
+              <a:noFill/>
+              <a:ln w="28575">
+                <a:solidFill>
+                  <a:srgbClr val="00B050"/>
+                </a:solidFill>
+              </a:ln>
+            </p:spPr>
+            <p:style>
+              <a:lnRef idx="2">
+                <a:schemeClr val="accent1">
+                  <a:shade val="50000"/>
+                </a:schemeClr>
+              </a:lnRef>
+              <a:fillRef idx="1">
+                <a:schemeClr val="accent1"/>
+              </a:fillRef>
+              <a:effectRef idx="0">
+                <a:schemeClr val="accent1"/>
+              </a:effectRef>
+              <a:fontRef idx="minor">
+                <a:schemeClr val="lt1"/>
+              </a:fontRef>
+            </p:style>
+            <p:txBody>
+              <a:bodyPr rtlCol="0" anchor="ctr"/>
+              <a:lstStyle/>
+              <a:p>
+                <a:pPr algn="ctr"/>
+                <a:endParaRPr lang="fr-FR" dirty="0">
+                  <a:solidFill>
+                    <a:srgbClr val="00B050"/>
+                  </a:solidFill>
+                </a:endParaRPr>
+              </a:p>
+            </p:txBody>
+          </p:sp>
+          <p:sp>
+            <p:nvSpPr>
+              <p:cNvPr id="32" name="Forme libre : forme 31">
+                <a:extLst>
+                  <a:ext uri="{FF2B5EF4-FFF2-40B4-BE49-F238E27FC236}">
+                    <a16:creationId xmlns:a16="http://schemas.microsoft.com/office/drawing/2014/main" id="{D9FCDA8C-483D-460B-B425-2E4148B4E029}"/>
+                  </a:ext>
+                </a:extLst>
+              </p:cNvPr>
+              <p:cNvSpPr/>
+              <p:nvPr/>
+            </p:nvSpPr>
+            <p:spPr>
+              <a:xfrm>
+                <a:off x="1987296" y="5693664"/>
+                <a:ext cx="80191" cy="353568"/>
+              </a:xfrm>
+              <a:custGeom>
+                <a:avLst/>
+                <a:gdLst>
+                  <a:gd name="connsiteX0" fmla="*/ 73152 w 80191"/>
+                  <a:gd name="connsiteY0" fmla="*/ 353568 h 353568"/>
+                  <a:gd name="connsiteX1" fmla="*/ 73152 w 80191"/>
+                  <a:gd name="connsiteY1" fmla="*/ 188976 h 353568"/>
+                  <a:gd name="connsiteX2" fmla="*/ 0 w 80191"/>
+                  <a:gd name="connsiteY2" fmla="*/ 0 h 353568"/>
+                </a:gdLst>
+                <a:ahLst/>
+                <a:cxnLst>
+                  <a:cxn ang="0">
+                    <a:pos x="connsiteX0" y="connsiteY0"/>
+                  </a:cxn>
+                  <a:cxn ang="0">
+                    <a:pos x="connsiteX1" y="connsiteY1"/>
+                  </a:cxn>
+                  <a:cxn ang="0">
+                    <a:pos x="connsiteX2" y="connsiteY2"/>
+                  </a:cxn>
+                </a:cxnLst>
+                <a:rect l="l" t="t" r="r" b="b"/>
+                <a:pathLst>
+                  <a:path w="80191" h="353568">
+                    <a:moveTo>
+                      <a:pt x="73152" y="353568"/>
+                    </a:moveTo>
+                    <a:cubicBezTo>
+                      <a:pt x="79248" y="300736"/>
+                      <a:pt x="85344" y="247904"/>
+                      <a:pt x="73152" y="188976"/>
+                    </a:cubicBezTo>
+                    <a:cubicBezTo>
+                      <a:pt x="60960" y="130048"/>
+                      <a:pt x="30480" y="65024"/>
+                      <a:pt x="0" y="0"/>
+                    </a:cubicBezTo>
+                  </a:path>
+                </a:pathLst>
+              </a:custGeom>
+              <a:noFill/>
+              <a:ln w="28575">
+                <a:solidFill>
+                  <a:srgbClr val="00B050"/>
+                </a:solidFill>
+              </a:ln>
+            </p:spPr>
+            <p:style>
+              <a:lnRef idx="2">
+                <a:schemeClr val="accent1">
+                  <a:shade val="50000"/>
+                </a:schemeClr>
+              </a:lnRef>
+              <a:fillRef idx="1">
+                <a:schemeClr val="accent1"/>
+              </a:fillRef>
+              <a:effectRef idx="0">
+                <a:schemeClr val="accent1"/>
+              </a:effectRef>
+              <a:fontRef idx="minor">
+                <a:schemeClr val="lt1"/>
+              </a:fontRef>
+            </p:style>
+            <p:txBody>
+              <a:bodyPr rtlCol="0" anchor="ctr"/>
+              <a:lstStyle/>
+              <a:p>
+                <a:pPr algn="ctr"/>
+                <a:endParaRPr lang="fr-FR"/>
+              </a:p>
+            </p:txBody>
+          </p:sp>
+        </p:grpSp>
+        <p:sp>
+          <p:nvSpPr>
+            <p:cNvPr id="37" name="ZoneTexte 36">
+              <a:extLst>
+                <a:ext uri="{FF2B5EF4-FFF2-40B4-BE49-F238E27FC236}">
+                  <a16:creationId xmlns:a16="http://schemas.microsoft.com/office/drawing/2014/main" id="{431E61D8-D960-4809-B876-93303DAFF380}"/>
+                </a:ext>
+              </a:extLst>
+            </p:cNvPr>
+            <p:cNvSpPr txBox="1"/>
+            <p:nvPr/>
+          </p:nvSpPr>
+          <p:spPr>
+            <a:xfrm>
+              <a:off x="4746586" y="1394590"/>
+              <a:ext cx="1313180" cy="600164"/>
+            </a:xfrm>
+            <a:prstGeom prst="rect">
+              <a:avLst/>
+            </a:prstGeom>
+            <a:noFill/>
+          </p:spPr>
+          <p:txBody>
+            <a:bodyPr wrap="none" rtlCol="0">
+              <a:spAutoFit/>
+            </a:bodyPr>
+            <a:lstStyle/>
+            <a:p>
+              <a:r>
+                <a:rPr lang="fr-FR" sz="1100" dirty="0"/>
+                <a:t>Mousqueton </a:t>
+              </a:r>
+            </a:p>
+            <a:p>
+              <a:r>
+                <a:rPr lang="fr-FR" sz="1100" dirty="0"/>
+                <a:t>Sécurisé </a:t>
+              </a:r>
+              <a:r>
+                <a:rPr lang="fr-FR" sz="1100" b="1" dirty="0"/>
+                <a:t>sans</a:t>
+              </a:r>
+              <a:r>
+                <a:rPr lang="fr-FR" sz="1100" dirty="0"/>
+                <a:t> œillet</a:t>
+              </a:r>
+            </a:p>
+            <a:p>
+              <a:r>
+                <a:rPr lang="fr-FR" sz="1100" dirty="0"/>
+                <a:t>« Type escalade »</a:t>
+              </a:r>
+            </a:p>
+          </p:txBody>
+        </p:sp>
+        <p:sp>
+          <p:nvSpPr>
+            <p:cNvPr id="38" name="ZoneTexte 37">
+              <a:extLst>
+                <a:ext uri="{FF2B5EF4-FFF2-40B4-BE49-F238E27FC236}">
+                  <a16:creationId xmlns:a16="http://schemas.microsoft.com/office/drawing/2014/main" id="{02EA1729-5ED1-49C3-87A9-F9F191EDE283}"/>
+                </a:ext>
+              </a:extLst>
+            </p:cNvPr>
+            <p:cNvSpPr txBox="1"/>
+            <p:nvPr/>
+          </p:nvSpPr>
+          <p:spPr>
+            <a:xfrm>
+              <a:off x="4746586" y="2133325"/>
+              <a:ext cx="1080745" cy="261610"/>
+            </a:xfrm>
+            <a:prstGeom prst="rect">
+              <a:avLst/>
+            </a:prstGeom>
+            <a:noFill/>
+          </p:spPr>
+          <p:txBody>
+            <a:bodyPr wrap="none" rtlCol="0">
+              <a:spAutoFit/>
+            </a:bodyPr>
+            <a:lstStyle/>
+            <a:p>
+              <a:r>
+                <a:rPr lang="fr-FR" sz="1100" dirty="0"/>
+                <a:t>Boucle Epissure</a:t>
+              </a:r>
+            </a:p>
+          </p:txBody>
+        </p:sp>
+        <p:sp>
+          <p:nvSpPr>
+            <p:cNvPr id="39" name="ZoneTexte 38">
+              <a:extLst>
+                <a:ext uri="{FF2B5EF4-FFF2-40B4-BE49-F238E27FC236}">
+                  <a16:creationId xmlns:a16="http://schemas.microsoft.com/office/drawing/2014/main" id="{FD2676D4-19A5-440A-BD20-38F11EF3C645}"/>
+                </a:ext>
+              </a:extLst>
+            </p:cNvPr>
+            <p:cNvSpPr txBox="1"/>
+            <p:nvPr/>
+          </p:nvSpPr>
+          <p:spPr>
+            <a:xfrm>
+              <a:off x="4708997" y="5961153"/>
+              <a:ext cx="1322798" cy="600164"/>
+            </a:xfrm>
+            <a:prstGeom prst="rect">
+              <a:avLst/>
+            </a:prstGeom>
+            <a:noFill/>
+          </p:spPr>
+          <p:txBody>
+            <a:bodyPr wrap="none" rtlCol="0">
+              <a:spAutoFit/>
+            </a:bodyPr>
+            <a:lstStyle/>
+            <a:p>
+              <a:r>
+                <a:rPr lang="fr-FR" sz="1100" dirty="0"/>
+                <a:t>Mousqueton </a:t>
+              </a:r>
+            </a:p>
+            <a:p>
+              <a:r>
+                <a:rPr lang="fr-FR" sz="1100" dirty="0"/>
+                <a:t>Sécurisé </a:t>
+              </a:r>
+              <a:r>
+                <a:rPr lang="fr-FR" sz="1100" b="1" dirty="0"/>
+                <a:t>avec</a:t>
+              </a:r>
+              <a:r>
+                <a:rPr lang="fr-FR" sz="1100" dirty="0"/>
+                <a:t> œillet</a:t>
+              </a:r>
+            </a:p>
+            <a:p>
+              <a:r>
+                <a:rPr lang="fr-FR" sz="1100" dirty="0">
+                  <a:latin typeface="IBM Plex Sans ExtraLight" panose="020B0604020202020204" pitchFamily="34" charset="0"/>
+                </a:rPr>
+                <a:t>ᴓ  </a:t>
+              </a:r>
+              <a:r>
+                <a:rPr lang="fr-FR" sz="1100" dirty="0"/>
+                <a:t>6 ou 8 mm</a:t>
+              </a:r>
+            </a:p>
+          </p:txBody>
+        </p:sp>
+        <p:sp>
+          <p:nvSpPr>
+            <p:cNvPr id="40" name="ZoneTexte 39">
+              <a:extLst>
+                <a:ext uri="{FF2B5EF4-FFF2-40B4-BE49-F238E27FC236}">
+                  <a16:creationId xmlns:a16="http://schemas.microsoft.com/office/drawing/2014/main" id="{4265AAF1-BF6F-4AD3-9BB6-98EE692C2CB4}"/>
+                </a:ext>
+              </a:extLst>
+            </p:cNvPr>
+            <p:cNvSpPr txBox="1"/>
+            <p:nvPr/>
+          </p:nvSpPr>
+          <p:spPr>
+            <a:xfrm>
+              <a:off x="4715078" y="5664606"/>
+              <a:ext cx="662361" cy="261610"/>
+            </a:xfrm>
+            <a:prstGeom prst="rect">
+              <a:avLst/>
+            </a:prstGeom>
+            <a:noFill/>
+          </p:spPr>
+          <p:txBody>
+            <a:bodyPr wrap="none" rtlCol="0">
+              <a:spAutoFit/>
+            </a:bodyPr>
+            <a:lstStyle/>
+            <a:p>
+              <a:r>
+                <a:rPr lang="fr-FR" sz="1100" dirty="0"/>
+                <a:t>Epissure</a:t>
+              </a:r>
+            </a:p>
+          </p:txBody>
+        </p:sp>
+        <p:sp>
+          <p:nvSpPr>
+            <p:cNvPr id="41" name="ZoneTexte 40">
+              <a:extLst>
+                <a:ext uri="{FF2B5EF4-FFF2-40B4-BE49-F238E27FC236}">
+                  <a16:creationId xmlns:a16="http://schemas.microsoft.com/office/drawing/2014/main" id="{B8E63DE3-76E5-470F-ADC8-93C614EF0240}"/>
+                </a:ext>
+              </a:extLst>
+            </p:cNvPr>
+            <p:cNvSpPr txBox="1"/>
+            <p:nvPr/>
+          </p:nvSpPr>
+          <p:spPr>
+            <a:xfrm>
+              <a:off x="4720622" y="5190873"/>
+              <a:ext cx="950901" cy="261610"/>
+            </a:xfrm>
+            <a:prstGeom prst="rect">
+              <a:avLst/>
+            </a:prstGeom>
+            <a:noFill/>
+          </p:spPr>
+          <p:txBody>
+            <a:bodyPr wrap="none" rtlCol="0">
+              <a:spAutoFit/>
+            </a:bodyPr>
+            <a:lstStyle/>
+            <a:p>
+              <a:r>
+                <a:rPr lang="fr-FR" sz="1100" dirty="0"/>
+                <a:t>Nœud simple</a:t>
+              </a:r>
+            </a:p>
+          </p:txBody>
+        </p:sp>
+        <p:sp>
+          <p:nvSpPr>
+            <p:cNvPr id="42" name="ZoneTexte 41">
+              <a:extLst>
+                <a:ext uri="{FF2B5EF4-FFF2-40B4-BE49-F238E27FC236}">
+                  <a16:creationId xmlns:a16="http://schemas.microsoft.com/office/drawing/2014/main" id="{6B058B6E-6F56-477E-BDE5-8BE567B9B8E9}"/>
+                </a:ext>
+              </a:extLst>
+            </p:cNvPr>
+            <p:cNvSpPr txBox="1"/>
+            <p:nvPr/>
+          </p:nvSpPr>
+          <p:spPr>
+            <a:xfrm>
+              <a:off x="4720622" y="4514058"/>
+              <a:ext cx="950901" cy="261610"/>
+            </a:xfrm>
+            <a:prstGeom prst="rect">
+              <a:avLst/>
+            </a:prstGeom>
+            <a:noFill/>
+          </p:spPr>
+          <p:txBody>
+            <a:bodyPr wrap="none" rtlCol="0">
+              <a:spAutoFit/>
+            </a:bodyPr>
+            <a:lstStyle/>
+            <a:p>
+              <a:r>
+                <a:rPr lang="fr-FR" sz="1100" dirty="0"/>
+                <a:t>Nœud simple</a:t>
+              </a:r>
+            </a:p>
+          </p:txBody>
+        </p:sp>
+        <p:sp>
+          <p:nvSpPr>
+            <p:cNvPr id="43" name="ZoneTexte 42">
+              <a:extLst>
+                <a:ext uri="{FF2B5EF4-FFF2-40B4-BE49-F238E27FC236}">
+                  <a16:creationId xmlns:a16="http://schemas.microsoft.com/office/drawing/2014/main" id="{E08C3269-C847-410B-8365-B2EBD9E9A8E0}"/>
+                </a:ext>
+              </a:extLst>
+            </p:cNvPr>
+            <p:cNvSpPr txBox="1"/>
+            <p:nvPr/>
+          </p:nvSpPr>
+          <p:spPr>
+            <a:xfrm>
+              <a:off x="4728536" y="4848101"/>
+              <a:ext cx="1720343" cy="261610"/>
+            </a:xfrm>
+            <a:prstGeom prst="rect">
+              <a:avLst/>
+            </a:prstGeom>
+            <a:noFill/>
+          </p:spPr>
+          <p:txBody>
+            <a:bodyPr wrap="none" rtlCol="0">
+              <a:spAutoFit/>
+            </a:bodyPr>
+            <a:lstStyle/>
+            <a:p>
+              <a:r>
+                <a:rPr lang="fr-FR" sz="1100" dirty="0"/>
+                <a:t>Bouée traversante « œuf »</a:t>
+              </a:r>
+            </a:p>
+          </p:txBody>
+        </p:sp>
+        <p:sp>
+          <p:nvSpPr>
+            <p:cNvPr id="44" name="ZoneTexte 43">
+              <a:extLst>
+                <a:ext uri="{FF2B5EF4-FFF2-40B4-BE49-F238E27FC236}">
+                  <a16:creationId xmlns:a16="http://schemas.microsoft.com/office/drawing/2014/main" id="{32A7E046-30AB-4F3F-AB10-69B7886E58FA}"/>
+                </a:ext>
+              </a:extLst>
+            </p:cNvPr>
+            <p:cNvSpPr txBox="1"/>
+            <p:nvPr/>
+          </p:nvSpPr>
+          <p:spPr>
+            <a:xfrm>
+              <a:off x="5046258" y="645132"/>
+              <a:ext cx="1140056" cy="261610"/>
+            </a:xfrm>
+            <a:prstGeom prst="rect">
+              <a:avLst/>
+            </a:prstGeom>
+            <a:noFill/>
+          </p:spPr>
+          <p:txBody>
+            <a:bodyPr wrap="none" rtlCol="0">
+              <a:spAutoFit/>
+            </a:bodyPr>
+            <a:lstStyle/>
+            <a:p>
+              <a:r>
+                <a:rPr lang="fr-FR" sz="1100" dirty="0"/>
+                <a:t>Bouée « Casier »</a:t>
+              </a:r>
+            </a:p>
+          </p:txBody>
+        </p:sp>
+        <p:cxnSp>
+          <p:nvCxnSpPr>
+            <p:cNvPr id="46" name="Connecteur droit avec flèche 45">
+              <a:extLst>
+                <a:ext uri="{FF2B5EF4-FFF2-40B4-BE49-F238E27FC236}">
+                  <a16:creationId xmlns:a16="http://schemas.microsoft.com/office/drawing/2014/main" id="{5BD07CB0-E823-460A-AE27-EBF6649961FB}"/>
+                </a:ext>
+              </a:extLst>
+            </p:cNvPr>
+            <p:cNvCxnSpPr>
+              <a:cxnSpLocks/>
+            </p:cNvCxnSpPr>
+            <p:nvPr/>
+          </p:nvCxnSpPr>
+          <p:spPr>
+            <a:xfrm>
+              <a:off x="6545397" y="4944375"/>
+              <a:ext cx="3412" cy="1532638"/>
+            </a:xfrm>
+            <a:prstGeom prst="straightConnector1">
+              <a:avLst/>
+            </a:prstGeom>
+            <a:ln>
+              <a:headEnd type="arrow" w="med" len="med"/>
+              <a:tailEnd type="arrow" w="med" len="med"/>
+            </a:ln>
+          </p:spPr>
+          <p:style>
+            <a:lnRef idx="1">
+              <a:schemeClr val="accent1"/>
+            </a:lnRef>
+            <a:fillRef idx="0">
+              <a:schemeClr val="accent1"/>
+            </a:fillRef>
+            <a:effectRef idx="0">
+              <a:schemeClr val="accent1"/>
+            </a:effectRef>
+            <a:fontRef idx="minor">
+              <a:schemeClr val="tx1"/>
+            </a:fontRef>
+          </p:style>
+        </p:cxnSp>
+        <p:sp>
+          <p:nvSpPr>
+            <p:cNvPr id="50" name="ZoneTexte 49">
+              <a:extLst>
+                <a:ext uri="{FF2B5EF4-FFF2-40B4-BE49-F238E27FC236}">
+                  <a16:creationId xmlns:a16="http://schemas.microsoft.com/office/drawing/2014/main" id="{793F2E0B-E210-49DC-B855-D4D1C11EE337}"/>
+                </a:ext>
+              </a:extLst>
+            </p:cNvPr>
+            <p:cNvSpPr txBox="1"/>
+            <p:nvPr/>
+          </p:nvSpPr>
+          <p:spPr>
+            <a:xfrm>
+              <a:off x="6216794" y="5508835"/>
+              <a:ext cx="401072" cy="261610"/>
+            </a:xfrm>
+            <a:prstGeom prst="rect">
+              <a:avLst/>
+            </a:prstGeom>
+            <a:noFill/>
+          </p:spPr>
+          <p:txBody>
+            <a:bodyPr wrap="none" rtlCol="0">
+              <a:spAutoFit/>
+            </a:bodyPr>
+            <a:lstStyle/>
+            <a:p>
+              <a:r>
+                <a:rPr lang="fr-FR" sz="1100" dirty="0"/>
+                <a:t>1 m</a:t>
+              </a:r>
+            </a:p>
+          </p:txBody>
+        </p:sp>
+        <p:pic>
+          <p:nvPicPr>
+            <p:cNvPr id="55" name="Image 54">
+              <a:extLst>
+                <a:ext uri="{FF2B5EF4-FFF2-40B4-BE49-F238E27FC236}">
+                  <a16:creationId xmlns:a16="http://schemas.microsoft.com/office/drawing/2014/main" id="{5097E8FA-022B-4549-AAA6-014DA7940A63}"/>
+                </a:ext>
+              </a:extLst>
+            </p:cNvPr>
+            <p:cNvPicPr>
+              <a:picLocks noChangeAspect="1"/>
+            </p:cNvPicPr>
+            <p:nvPr/>
+          </p:nvPicPr>
+          <p:blipFill>
+            <a:blip r:embed="rId7"/>
+            <a:stretch>
+              <a:fillRect/>
+            </a:stretch>
+          </p:blipFill>
+          <p:spPr>
+            <a:xfrm>
+              <a:off x="4465453" y="4143306"/>
+              <a:ext cx="216423" cy="117704"/>
+            </a:xfrm>
+            <a:prstGeom prst="rect">
+              <a:avLst/>
+            </a:prstGeom>
+          </p:spPr>
+        </p:pic>
+        <p:pic>
+          <p:nvPicPr>
+            <p:cNvPr id="56" name="Image 55">
+              <a:extLst>
+                <a:ext uri="{FF2B5EF4-FFF2-40B4-BE49-F238E27FC236}">
+                  <a16:creationId xmlns:a16="http://schemas.microsoft.com/office/drawing/2014/main" id="{D0C851CC-6122-4519-B672-B22704E6897A}"/>
+                </a:ext>
+              </a:extLst>
+            </p:cNvPr>
+            <p:cNvPicPr>
+              <a:picLocks noChangeAspect="1"/>
+            </p:cNvPicPr>
+            <p:nvPr/>
+          </p:nvPicPr>
+          <p:blipFill>
+            <a:blip r:embed="rId8"/>
+            <a:stretch>
+              <a:fillRect/>
+            </a:stretch>
+          </p:blipFill>
+          <p:spPr>
+            <a:xfrm rot="16200000">
+              <a:off x="4538182" y="3727445"/>
+              <a:ext cx="117345" cy="215133"/>
+            </a:xfrm>
+            <a:prstGeom prst="rect">
+              <a:avLst/>
+            </a:prstGeom>
+          </p:spPr>
+        </p:pic>
+        <p:pic>
+          <p:nvPicPr>
+            <p:cNvPr id="58" name="Image 57">
+              <a:extLst>
+                <a:ext uri="{FF2B5EF4-FFF2-40B4-BE49-F238E27FC236}">
+                  <a16:creationId xmlns:a16="http://schemas.microsoft.com/office/drawing/2014/main" id="{632EFD01-82EA-4A2A-A96D-D98203717A93}"/>
+                </a:ext>
+              </a:extLst>
+            </p:cNvPr>
+            <p:cNvPicPr>
+              <a:picLocks noChangeAspect="1"/>
+            </p:cNvPicPr>
+            <p:nvPr/>
+          </p:nvPicPr>
+          <p:blipFill>
+            <a:blip r:embed="rId9"/>
+            <a:stretch>
+              <a:fillRect/>
+            </a:stretch>
+          </p:blipFill>
+          <p:spPr>
+            <a:xfrm rot="4637937">
+              <a:off x="4509912" y="3337779"/>
+              <a:ext cx="132285" cy="242523"/>
+            </a:xfrm>
+            <a:prstGeom prst="rect">
+              <a:avLst/>
+            </a:prstGeom>
+          </p:spPr>
+        </p:pic>
+        <p:pic>
+          <p:nvPicPr>
+            <p:cNvPr id="59" name="Image 58">
+              <a:extLst>
+                <a:ext uri="{FF2B5EF4-FFF2-40B4-BE49-F238E27FC236}">
+                  <a16:creationId xmlns:a16="http://schemas.microsoft.com/office/drawing/2014/main" id="{7F47DCD0-85E7-4062-8B85-560F3EEC1160}"/>
+                </a:ext>
+              </a:extLst>
+            </p:cNvPr>
+            <p:cNvPicPr>
+              <a:picLocks noChangeAspect="1"/>
+            </p:cNvPicPr>
+            <p:nvPr/>
+          </p:nvPicPr>
+          <p:blipFill>
+            <a:blip r:embed="rId7"/>
+            <a:stretch>
+              <a:fillRect/>
+            </a:stretch>
+          </p:blipFill>
+          <p:spPr>
+            <a:xfrm>
+              <a:off x="4463933" y="3021183"/>
+              <a:ext cx="216423" cy="117704"/>
+            </a:xfrm>
+            <a:prstGeom prst="rect">
+              <a:avLst/>
+            </a:prstGeom>
+          </p:spPr>
+        </p:pic>
+        <p:pic>
+          <p:nvPicPr>
+            <p:cNvPr id="60" name="Image 59">
+              <a:extLst>
+                <a:ext uri="{FF2B5EF4-FFF2-40B4-BE49-F238E27FC236}">
+                  <a16:creationId xmlns:a16="http://schemas.microsoft.com/office/drawing/2014/main" id="{CAD61A89-F907-4BE0-BF5F-71C28696DDE3}"/>
+                </a:ext>
+              </a:extLst>
+            </p:cNvPr>
+            <p:cNvPicPr>
+              <a:picLocks noChangeAspect="1"/>
+            </p:cNvPicPr>
+            <p:nvPr/>
+          </p:nvPicPr>
+          <p:blipFill>
+            <a:blip r:embed="rId8"/>
+            <a:stretch>
+              <a:fillRect/>
+            </a:stretch>
+          </p:blipFill>
+          <p:spPr>
+            <a:xfrm rot="16200000">
+              <a:off x="4530566" y="2635802"/>
+              <a:ext cx="117345" cy="215133"/>
+            </a:xfrm>
+            <a:prstGeom prst="rect">
+              <a:avLst/>
+            </a:prstGeom>
+          </p:spPr>
+        </p:pic>
+        <p:cxnSp>
+          <p:nvCxnSpPr>
+            <p:cNvPr id="63" name="Connecteur droit avec flèche 62">
+              <a:extLst>
+                <a:ext uri="{FF2B5EF4-FFF2-40B4-BE49-F238E27FC236}">
+                  <a16:creationId xmlns:a16="http://schemas.microsoft.com/office/drawing/2014/main" id="{B357DB5F-70A6-4066-A81A-E5FE4CB7D67E}"/>
+                </a:ext>
+              </a:extLst>
+            </p:cNvPr>
+            <p:cNvCxnSpPr>
+              <a:cxnSpLocks/>
+            </p:cNvCxnSpPr>
+            <p:nvPr/>
+          </p:nvCxnSpPr>
+          <p:spPr>
+            <a:xfrm flipH="1" flipV="1">
+              <a:off x="4782420" y="2738629"/>
+              <a:ext cx="700932" cy="511050"/>
+            </a:xfrm>
+            <a:prstGeom prst="straightConnector1">
+              <a:avLst/>
+            </a:prstGeom>
+            <a:ln>
+              <a:tailEnd type="triangle"/>
+            </a:ln>
+          </p:spPr>
+          <p:style>
+            <a:lnRef idx="1">
+              <a:schemeClr val="accent1"/>
+            </a:lnRef>
+            <a:fillRef idx="0">
+              <a:schemeClr val="accent1"/>
+            </a:fillRef>
+            <a:effectRef idx="0">
+              <a:schemeClr val="accent1"/>
+            </a:effectRef>
+            <a:fontRef idx="minor">
+              <a:schemeClr val="tx1"/>
+            </a:fontRef>
+          </p:style>
+        </p:cxnSp>
+        <p:cxnSp>
+          <p:nvCxnSpPr>
+            <p:cNvPr id="66" name="Connecteur droit avec flèche 65">
+              <a:extLst>
+                <a:ext uri="{FF2B5EF4-FFF2-40B4-BE49-F238E27FC236}">
+                  <a16:creationId xmlns:a16="http://schemas.microsoft.com/office/drawing/2014/main" id="{0355BF6C-D919-4CB4-9D18-554D2F2C75FA}"/>
+                </a:ext>
+              </a:extLst>
+            </p:cNvPr>
+            <p:cNvCxnSpPr>
+              <a:cxnSpLocks/>
+            </p:cNvCxnSpPr>
+            <p:nvPr/>
+          </p:nvCxnSpPr>
+          <p:spPr>
+            <a:xfrm flipH="1" flipV="1">
+              <a:off x="4765972" y="3123937"/>
+              <a:ext cx="717380" cy="125742"/>
+            </a:xfrm>
+            <a:prstGeom prst="straightConnector1">
+              <a:avLst/>
+            </a:prstGeom>
+            <a:ln>
+              <a:tailEnd type="triangle"/>
+            </a:ln>
+          </p:spPr>
+          <p:style>
+            <a:lnRef idx="1">
+              <a:schemeClr val="accent1"/>
+            </a:lnRef>
+            <a:fillRef idx="0">
+              <a:schemeClr val="accent1"/>
+            </a:fillRef>
+            <a:effectRef idx="0">
+              <a:schemeClr val="accent1"/>
+            </a:effectRef>
+            <a:fontRef idx="minor">
+              <a:schemeClr val="tx1"/>
+            </a:fontRef>
+          </p:style>
+        </p:cxnSp>
+        <p:cxnSp>
+          <p:nvCxnSpPr>
+            <p:cNvPr id="69" name="Connecteur droit avec flèche 68">
+              <a:extLst>
+                <a:ext uri="{FF2B5EF4-FFF2-40B4-BE49-F238E27FC236}">
+                  <a16:creationId xmlns:a16="http://schemas.microsoft.com/office/drawing/2014/main" id="{41D159F6-97F1-46B6-A957-4F330FDDCF86}"/>
+                </a:ext>
+              </a:extLst>
+            </p:cNvPr>
+            <p:cNvCxnSpPr>
+              <a:cxnSpLocks/>
+            </p:cNvCxnSpPr>
+            <p:nvPr/>
+          </p:nvCxnSpPr>
+          <p:spPr>
+            <a:xfrm flipH="1">
+              <a:off x="4765972" y="3249679"/>
+              <a:ext cx="717380" cy="197256"/>
+            </a:xfrm>
+            <a:prstGeom prst="straightConnector1">
+              <a:avLst/>
+            </a:prstGeom>
+            <a:ln>
+              <a:tailEnd type="triangle"/>
+            </a:ln>
+          </p:spPr>
+          <p:style>
+            <a:lnRef idx="1">
+              <a:schemeClr val="accent1"/>
+            </a:lnRef>
+            <a:fillRef idx="0">
+              <a:schemeClr val="accent1"/>
+            </a:fillRef>
+            <a:effectRef idx="0">
+              <a:schemeClr val="accent1"/>
+            </a:effectRef>
+            <a:fontRef idx="minor">
+              <a:schemeClr val="tx1"/>
+            </a:fontRef>
+          </p:style>
+        </p:cxnSp>
+        <p:cxnSp>
+          <p:nvCxnSpPr>
+            <p:cNvPr id="72" name="Connecteur droit avec flèche 71">
+              <a:extLst>
+                <a:ext uri="{FF2B5EF4-FFF2-40B4-BE49-F238E27FC236}">
+                  <a16:creationId xmlns:a16="http://schemas.microsoft.com/office/drawing/2014/main" id="{79135808-A50A-477F-8AE0-0B7E0C0820AD}"/>
+                </a:ext>
+              </a:extLst>
+            </p:cNvPr>
+            <p:cNvCxnSpPr>
+              <a:cxnSpLocks/>
+            </p:cNvCxnSpPr>
+            <p:nvPr/>
+          </p:nvCxnSpPr>
+          <p:spPr>
+            <a:xfrm flipH="1">
+              <a:off x="4803944" y="3249679"/>
+              <a:ext cx="679408" cy="554956"/>
+            </a:xfrm>
+            <a:prstGeom prst="straightConnector1">
+              <a:avLst/>
+            </a:prstGeom>
+            <a:ln>
+              <a:tailEnd type="triangle"/>
+            </a:ln>
+          </p:spPr>
+          <p:style>
+            <a:lnRef idx="1">
+              <a:schemeClr val="accent1"/>
+            </a:lnRef>
+            <a:fillRef idx="0">
+              <a:schemeClr val="accent1"/>
+            </a:fillRef>
+            <a:effectRef idx="0">
+              <a:schemeClr val="accent1"/>
+            </a:effectRef>
+            <a:fontRef idx="minor">
+              <a:schemeClr val="tx1"/>
+            </a:fontRef>
+          </p:style>
+        </p:cxnSp>
+        <p:cxnSp>
+          <p:nvCxnSpPr>
+            <p:cNvPr id="75" name="Connecteur droit avec flèche 74">
+              <a:extLst>
+                <a:ext uri="{FF2B5EF4-FFF2-40B4-BE49-F238E27FC236}">
+                  <a16:creationId xmlns:a16="http://schemas.microsoft.com/office/drawing/2014/main" id="{09F7757D-446E-4950-85B2-3B1096043E12}"/>
+                </a:ext>
+              </a:extLst>
+            </p:cNvPr>
+            <p:cNvCxnSpPr>
+              <a:cxnSpLocks/>
+            </p:cNvCxnSpPr>
+            <p:nvPr/>
+          </p:nvCxnSpPr>
+          <p:spPr>
+            <a:xfrm flipH="1">
+              <a:off x="4765972" y="3249679"/>
+              <a:ext cx="717380" cy="924030"/>
+            </a:xfrm>
+            <a:prstGeom prst="straightConnector1">
+              <a:avLst/>
+            </a:prstGeom>
+            <a:ln>
+              <a:tailEnd type="triangle"/>
+            </a:ln>
+          </p:spPr>
+          <p:style>
+            <a:lnRef idx="1">
+              <a:schemeClr val="accent1"/>
+            </a:lnRef>
+            <a:fillRef idx="0">
+              <a:schemeClr val="accent1"/>
+            </a:fillRef>
+            <a:effectRef idx="0">
+              <a:schemeClr val="accent1"/>
+            </a:effectRef>
+            <a:fontRef idx="minor">
+              <a:schemeClr val="tx1"/>
+            </a:fontRef>
+          </p:style>
+        </p:cxnSp>
+        <p:sp>
+          <p:nvSpPr>
+            <p:cNvPr id="78" name="ZoneTexte 77">
+              <a:extLst>
+                <a:ext uri="{FF2B5EF4-FFF2-40B4-BE49-F238E27FC236}">
+                  <a16:creationId xmlns:a16="http://schemas.microsoft.com/office/drawing/2014/main" id="{55791A22-CBC2-4FEE-82D6-BA1006E91361}"/>
+                </a:ext>
+              </a:extLst>
+            </p:cNvPr>
+            <p:cNvSpPr txBox="1"/>
+            <p:nvPr/>
+          </p:nvSpPr>
+          <p:spPr>
+            <a:xfrm>
+              <a:off x="5458969" y="3127502"/>
+              <a:ext cx="965526" cy="769441"/>
+            </a:xfrm>
+            <a:prstGeom prst="rect">
+              <a:avLst/>
+            </a:prstGeom>
+            <a:noFill/>
+          </p:spPr>
+          <p:txBody>
+            <a:bodyPr wrap="square" rtlCol="0">
+              <a:spAutoFit/>
+            </a:bodyPr>
+            <a:lstStyle/>
+            <a:p>
+              <a:r>
+                <a:rPr lang="fr-FR" sz="1100" dirty="0"/>
+                <a:t>Repères en tissu coloré tous les mètres</a:t>
+              </a:r>
+            </a:p>
+          </p:txBody>
+        </p:sp>
+        <p:cxnSp>
+          <p:nvCxnSpPr>
+            <p:cNvPr id="85" name="Connecteur droit avec flèche 84">
+              <a:extLst>
+                <a:ext uri="{FF2B5EF4-FFF2-40B4-BE49-F238E27FC236}">
+                  <a16:creationId xmlns:a16="http://schemas.microsoft.com/office/drawing/2014/main" id="{5853CAF5-1FCF-4F16-8473-2E557A1F3C81}"/>
+                </a:ext>
+              </a:extLst>
+            </p:cNvPr>
+            <p:cNvCxnSpPr>
+              <a:cxnSpLocks/>
+            </p:cNvCxnSpPr>
+            <p:nvPr/>
+          </p:nvCxnSpPr>
+          <p:spPr>
+            <a:xfrm>
+              <a:off x="6743614" y="2133325"/>
+              <a:ext cx="49198" cy="4348265"/>
+            </a:xfrm>
+            <a:prstGeom prst="straightConnector1">
+              <a:avLst/>
+            </a:prstGeom>
+            <a:ln>
+              <a:headEnd type="arrow" w="med" len="med"/>
+              <a:tailEnd type="arrow" w="med" len="med"/>
+            </a:ln>
+          </p:spPr>
+          <p:style>
+            <a:lnRef idx="1">
+              <a:schemeClr val="accent1"/>
+            </a:lnRef>
+            <a:fillRef idx="0">
+              <a:schemeClr val="accent1"/>
+            </a:fillRef>
+            <a:effectRef idx="0">
+              <a:schemeClr val="accent1"/>
+            </a:effectRef>
+            <a:fontRef idx="minor">
+              <a:schemeClr val="tx1"/>
+            </a:fontRef>
+          </p:style>
+        </p:cxnSp>
+        <p:sp>
+          <p:nvSpPr>
+            <p:cNvPr id="87" name="ZoneTexte 86">
+              <a:extLst>
+                <a:ext uri="{FF2B5EF4-FFF2-40B4-BE49-F238E27FC236}">
+                  <a16:creationId xmlns:a16="http://schemas.microsoft.com/office/drawing/2014/main" id="{39380926-F0E2-498E-887E-89BBD33A058A}"/>
+                </a:ext>
+              </a:extLst>
+            </p:cNvPr>
+            <p:cNvSpPr txBox="1"/>
+            <p:nvPr/>
+          </p:nvSpPr>
+          <p:spPr>
+            <a:xfrm>
+              <a:off x="6775106" y="3629223"/>
+              <a:ext cx="1252138" cy="1200329"/>
+            </a:xfrm>
+            <a:prstGeom prst="rect">
+              <a:avLst/>
+            </a:prstGeom>
+            <a:noFill/>
+          </p:spPr>
+          <p:txBody>
+            <a:bodyPr wrap="none" rtlCol="0">
+              <a:spAutoFit/>
+            </a:bodyPr>
+            <a:lstStyle/>
+            <a:p>
+              <a:r>
+                <a:rPr lang="fr-FR" sz="1200" dirty="0"/>
+                <a:t>Longueur totale :</a:t>
+              </a:r>
+            </a:p>
+            <a:p>
+              <a:r>
+                <a:rPr lang="fr-FR" sz="1200" dirty="0"/>
+                <a:t>5, 10, ou 15 m</a:t>
+              </a:r>
+            </a:p>
+            <a:p>
+              <a:r>
+                <a:rPr lang="fr-FR" sz="1200" dirty="0">
+                  <a:latin typeface="IBM Plex Sans ExtraLight" panose="020B0604020202020204" pitchFamily="34" charset="0"/>
+                </a:rPr>
+                <a:t>ᴓ  </a:t>
+              </a:r>
+              <a:r>
+                <a:rPr lang="fr-FR" sz="1200" dirty="0"/>
+                <a:t>6 ou 8 mm</a:t>
+              </a:r>
+            </a:p>
+            <a:p>
+              <a:endParaRPr lang="fr-FR" sz="1200" dirty="0"/>
+            </a:p>
+            <a:p>
+              <a:r>
+                <a:rPr lang="fr-FR" sz="1200" dirty="0"/>
+                <a:t>Possibilité de les </a:t>
+              </a:r>
+            </a:p>
+            <a:p>
+              <a:r>
+                <a:rPr lang="fr-FR" sz="1200" dirty="0"/>
+                <a:t>mettre en série</a:t>
+              </a:r>
+            </a:p>
+          </p:txBody>
+        </p:sp>
+        <p:cxnSp>
+          <p:nvCxnSpPr>
+            <p:cNvPr id="90" name="Connecteur droit avec flèche 89">
+              <a:extLst>
+                <a:ext uri="{FF2B5EF4-FFF2-40B4-BE49-F238E27FC236}">
+                  <a16:creationId xmlns:a16="http://schemas.microsoft.com/office/drawing/2014/main" id="{4C4E2551-17F9-42AF-8BB1-B555509C4B8B}"/>
+                </a:ext>
+              </a:extLst>
+            </p:cNvPr>
+            <p:cNvCxnSpPr>
+              <a:endCxn id="8" idx="1"/>
+            </p:cNvCxnSpPr>
+            <p:nvPr/>
+          </p:nvCxnSpPr>
+          <p:spPr>
+            <a:xfrm flipV="1">
+              <a:off x="3596640" y="4977229"/>
+              <a:ext cx="791854" cy="531606"/>
+            </a:xfrm>
+            <a:prstGeom prst="straightConnector1">
+              <a:avLst/>
+            </a:prstGeom>
+            <a:ln>
+              <a:tailEnd type="triangle"/>
+            </a:ln>
+          </p:spPr>
+          <p:style>
+            <a:lnRef idx="1">
+              <a:schemeClr val="accent1"/>
+            </a:lnRef>
+            <a:fillRef idx="0">
+              <a:schemeClr val="accent1"/>
+            </a:fillRef>
+            <a:effectRef idx="0">
+              <a:schemeClr val="accent1"/>
+            </a:effectRef>
+            <a:fontRef idx="minor">
+              <a:schemeClr val="tx1"/>
+            </a:fontRef>
+          </p:style>
+        </p:cxnSp>
+        <p:sp>
+          <p:nvSpPr>
+            <p:cNvPr id="91" name="ZoneTexte 90">
+              <a:extLst>
+                <a:ext uri="{FF2B5EF4-FFF2-40B4-BE49-F238E27FC236}">
+                  <a16:creationId xmlns:a16="http://schemas.microsoft.com/office/drawing/2014/main" id="{584DE7B0-D027-4C0B-A8F0-2C1B9A81A3FC}"/>
+                </a:ext>
+              </a:extLst>
+            </p:cNvPr>
+            <p:cNvSpPr txBox="1"/>
+            <p:nvPr/>
+          </p:nvSpPr>
+          <p:spPr>
+            <a:xfrm>
+              <a:off x="2767752" y="5321678"/>
+              <a:ext cx="1174835" cy="646331"/>
+            </a:xfrm>
+            <a:prstGeom prst="rect">
+              <a:avLst/>
+            </a:prstGeom>
+            <a:noFill/>
+          </p:spPr>
+          <p:txBody>
+            <a:bodyPr wrap="square" rtlCol="0">
+              <a:spAutoFit/>
+            </a:bodyPr>
+            <a:lstStyle/>
+            <a:p>
+              <a:r>
+                <a:rPr lang="fr-FR" sz="1200" b="1" dirty="0"/>
+                <a:t>Indiquer :</a:t>
+              </a:r>
+              <a:r>
+                <a:rPr lang="fr-FR" sz="1200" dirty="0"/>
+                <a:t> Longueur du bout en m</a:t>
+              </a:r>
+            </a:p>
+          </p:txBody>
+        </p:sp>
+        <p:pic>
+          <p:nvPicPr>
+            <p:cNvPr id="95" name="Image 94">
+              <a:extLst>
+                <a:ext uri="{FF2B5EF4-FFF2-40B4-BE49-F238E27FC236}">
+                  <a16:creationId xmlns:a16="http://schemas.microsoft.com/office/drawing/2014/main" id="{871B9591-9735-4743-A7EF-444DDCA0C74B}"/>
+                </a:ext>
+              </a:extLst>
+            </p:cNvPr>
+            <p:cNvPicPr>
+              <a:picLocks noChangeAspect="1"/>
+            </p:cNvPicPr>
+            <p:nvPr/>
+          </p:nvPicPr>
+          <p:blipFill>
+            <a:blip r:embed="rId10"/>
+            <a:stretch>
+              <a:fillRect/>
+            </a:stretch>
+          </p:blipFill>
+          <p:spPr>
+            <a:xfrm rot="16789610">
+              <a:off x="4724113" y="112614"/>
+              <a:ext cx="210479" cy="153075"/>
+            </a:xfrm>
+            <a:prstGeom prst="rect">
+              <a:avLst/>
+            </a:prstGeom>
+          </p:spPr>
+        </p:pic>
+        <p:sp>
+          <p:nvSpPr>
+            <p:cNvPr id="96" name="ZoneTexte 95">
+              <a:extLst>
+                <a:ext uri="{FF2B5EF4-FFF2-40B4-BE49-F238E27FC236}">
+                  <a16:creationId xmlns:a16="http://schemas.microsoft.com/office/drawing/2014/main" id="{1431D1FD-E66C-48FA-B21B-E791E22BBF87}"/>
+                </a:ext>
+              </a:extLst>
+            </p:cNvPr>
+            <p:cNvSpPr txBox="1"/>
+            <p:nvPr/>
+          </p:nvSpPr>
+          <p:spPr>
+            <a:xfrm>
+              <a:off x="4955944" y="64545"/>
+              <a:ext cx="1130438" cy="261610"/>
+            </a:xfrm>
+            <a:prstGeom prst="rect">
+              <a:avLst/>
+            </a:prstGeom>
+            <a:noFill/>
+          </p:spPr>
+          <p:txBody>
+            <a:bodyPr wrap="none" rtlCol="0">
+              <a:spAutoFit/>
+            </a:bodyPr>
+            <a:lstStyle/>
+            <a:p>
+              <a:r>
+                <a:rPr lang="fr-FR" sz="1100" dirty="0"/>
+                <a:t>Plaque plastique</a:t>
+              </a:r>
+            </a:p>
+          </p:txBody>
+        </p:sp>
+        <p:sp>
+          <p:nvSpPr>
+            <p:cNvPr id="97" name="Forme libre : forme 96">
+              <a:extLst>
+                <a:ext uri="{FF2B5EF4-FFF2-40B4-BE49-F238E27FC236}">
+                  <a16:creationId xmlns:a16="http://schemas.microsoft.com/office/drawing/2014/main" id="{AF47A385-0255-4367-81A0-DADE471E2AD1}"/>
+                </a:ext>
+              </a:extLst>
+            </p:cNvPr>
+            <p:cNvSpPr/>
+            <p:nvPr/>
+          </p:nvSpPr>
+          <p:spPr>
+            <a:xfrm>
+              <a:off x="4719312" y="254000"/>
+              <a:ext cx="45719" cy="113679"/>
+            </a:xfrm>
+            <a:custGeom>
+              <a:avLst/>
+              <a:gdLst>
+                <a:gd name="connsiteX0" fmla="*/ 66048 w 66048"/>
+                <a:gd name="connsiteY0" fmla="*/ 0 h 113679"/>
+                <a:gd name="connsiteX1" fmla="*/ 8 w 66048"/>
+                <a:gd name="connsiteY1" fmla="*/ 101600 h 113679"/>
+                <a:gd name="connsiteX2" fmla="*/ 60968 w 66048"/>
+                <a:gd name="connsiteY2" fmla="*/ 111760 h 113679"/>
+                <a:gd name="connsiteX3" fmla="*/ 55888 w 66048"/>
+                <a:gd name="connsiteY3" fmla="*/ 111760 h 113679"/>
+                <a:gd name="connsiteX4" fmla="*/ 55888 w 66048"/>
+                <a:gd name="connsiteY4" fmla="*/ 111760 h 113679"/>
+              </a:gdLst>
+              <a:ahLst/>
+              <a:cxnLst>
+                <a:cxn ang="0">
+                  <a:pos x="connsiteX0" y="connsiteY0"/>
+                </a:cxn>
+                <a:cxn ang="0">
+                  <a:pos x="connsiteX1" y="connsiteY1"/>
+                </a:cxn>
+                <a:cxn ang="0">
+                  <a:pos x="connsiteX2" y="connsiteY2"/>
+                </a:cxn>
+                <a:cxn ang="0">
+                  <a:pos x="connsiteX3" y="connsiteY3"/>
+                </a:cxn>
+                <a:cxn ang="0">
+                  <a:pos x="connsiteX4" y="connsiteY4"/>
+                </a:cxn>
+              </a:cxnLst>
+              <a:rect l="l" t="t" r="r" b="b"/>
+              <a:pathLst>
+                <a:path w="66048" h="113679">
+                  <a:moveTo>
+                    <a:pt x="66048" y="0"/>
+                  </a:moveTo>
+                  <a:cubicBezTo>
+                    <a:pt x="33451" y="41486"/>
+                    <a:pt x="855" y="82973"/>
+                    <a:pt x="8" y="101600"/>
+                  </a:cubicBezTo>
+                  <a:cubicBezTo>
+                    <a:pt x="-839" y="120227"/>
+                    <a:pt x="60968" y="111760"/>
+                    <a:pt x="60968" y="111760"/>
+                  </a:cubicBezTo>
+                  <a:cubicBezTo>
+                    <a:pt x="70281" y="113453"/>
+                    <a:pt x="55888" y="111760"/>
+                    <a:pt x="55888" y="111760"/>
+                  </a:cubicBezTo>
+                  <a:lnTo>
+                    <a:pt x="55888" y="111760"/>
+                  </a:lnTo>
+                </a:path>
+              </a:pathLst>
+            </a:custGeom>
+            <a:ln>
+              <a:solidFill>
+                <a:srgbClr val="00B050"/>
+              </a:solidFill>
+            </a:ln>
+          </p:spPr>
+          <p:style>
+            <a:lnRef idx="1">
+              <a:schemeClr val="accent6"/>
+            </a:lnRef>
+            <a:fillRef idx="0">
+              <a:schemeClr val="accent6"/>
+            </a:fillRef>
+            <a:effectRef idx="0">
+              <a:schemeClr val="accent6"/>
+            </a:effectRef>
+            <a:fontRef idx="minor">
+              <a:schemeClr val="tx1"/>
+            </a:fontRef>
+          </p:style>
+          <p:txBody>
+            <a:bodyPr rtlCol="0" anchor="ctr"/>
+            <a:lstStyle/>
+            <a:p>
+              <a:pPr algn="ctr"/>
+              <a:endParaRPr lang="fr-FR"/>
+            </a:p>
+          </p:txBody>
+        </p:sp>
+        <p:cxnSp>
+          <p:nvCxnSpPr>
+            <p:cNvPr id="99" name="Connecteur droit avec flèche 98">
+              <a:extLst>
+                <a:ext uri="{FF2B5EF4-FFF2-40B4-BE49-F238E27FC236}">
+                  <a16:creationId xmlns:a16="http://schemas.microsoft.com/office/drawing/2014/main" id="{7FA97492-9508-4A1C-AD09-984A66E7BCEF}"/>
+                </a:ext>
+              </a:extLst>
+            </p:cNvPr>
+            <p:cNvCxnSpPr>
+              <a:cxnSpLocks/>
+            </p:cNvCxnSpPr>
+            <p:nvPr/>
+          </p:nvCxnSpPr>
+          <p:spPr>
+            <a:xfrm flipV="1">
+              <a:off x="3074741" y="1022084"/>
+              <a:ext cx="1148694" cy="475489"/>
+            </a:xfrm>
+            <a:prstGeom prst="straightConnector1">
+              <a:avLst/>
+            </a:prstGeom>
+            <a:ln>
+              <a:tailEnd type="triangle"/>
+            </a:ln>
+          </p:spPr>
+          <p:style>
+            <a:lnRef idx="1">
+              <a:schemeClr val="accent1"/>
+            </a:lnRef>
+            <a:fillRef idx="0">
+              <a:schemeClr val="accent1"/>
+            </a:fillRef>
+            <a:effectRef idx="0">
+              <a:schemeClr val="accent1"/>
+            </a:effectRef>
+            <a:fontRef idx="minor">
+              <a:schemeClr val="tx1"/>
+            </a:fontRef>
+          </p:style>
+        </p:cxnSp>
+        <p:sp>
+          <p:nvSpPr>
+            <p:cNvPr id="100" name="ZoneTexte 99">
+              <a:extLst>
+                <a:ext uri="{FF2B5EF4-FFF2-40B4-BE49-F238E27FC236}">
+                  <a16:creationId xmlns:a16="http://schemas.microsoft.com/office/drawing/2014/main" id="{B463B39B-DF66-4D0D-9C46-7D477D56FBF8}"/>
+                </a:ext>
+              </a:extLst>
+            </p:cNvPr>
+            <p:cNvSpPr txBox="1"/>
+            <p:nvPr/>
+          </p:nvSpPr>
+          <p:spPr>
+            <a:xfrm>
+              <a:off x="2506671" y="1453482"/>
+              <a:ext cx="2211311" cy="830997"/>
+            </a:xfrm>
+            <a:prstGeom prst="rect">
+              <a:avLst/>
+            </a:prstGeom>
+            <a:noFill/>
+          </p:spPr>
+          <p:txBody>
+            <a:bodyPr wrap="square" rtlCol="0">
+              <a:spAutoFit/>
+            </a:bodyPr>
+            <a:lstStyle/>
+            <a:p>
+              <a:r>
+                <a:rPr lang="fr-FR" sz="1200" b="1" dirty="0"/>
+                <a:t>Indiquer :</a:t>
+              </a:r>
+              <a:r>
+                <a:rPr lang="fr-FR" sz="1200" dirty="0"/>
+                <a:t> </a:t>
+              </a:r>
+            </a:p>
+            <a:p>
+              <a:r>
+                <a:rPr lang="fr-FR" sz="1200" dirty="0"/>
+                <a:t>EXPERIENCE EN COURS</a:t>
+              </a:r>
+            </a:p>
+            <a:p>
+              <a:r>
+                <a:rPr lang="fr-FR" sz="1200" dirty="0"/>
+                <a:t>ELOIGNEZ-VOUS</a:t>
+              </a:r>
+            </a:p>
+            <a:p>
+              <a:r>
+                <a:rPr lang="fr-FR" sz="1200" dirty="0"/>
+                <a:t>PROJET KOSMOS</a:t>
+              </a:r>
+            </a:p>
+          </p:txBody>
+        </p:sp>
+        <p:sp>
+          <p:nvSpPr>
+            <p:cNvPr id="101" name="ZoneTexte 100">
+              <a:extLst>
+                <a:ext uri="{FF2B5EF4-FFF2-40B4-BE49-F238E27FC236}">
+                  <a16:creationId xmlns:a16="http://schemas.microsoft.com/office/drawing/2014/main" id="{5A1E663D-4124-43CC-9ABA-44CEC93FD4F7}"/>
+                </a:ext>
+              </a:extLst>
+            </p:cNvPr>
+            <p:cNvSpPr txBox="1"/>
+            <p:nvPr/>
+          </p:nvSpPr>
+          <p:spPr>
+            <a:xfrm>
+              <a:off x="2455278" y="247327"/>
+              <a:ext cx="1707104" cy="1015663"/>
+            </a:xfrm>
+            <a:prstGeom prst="rect">
+              <a:avLst/>
+            </a:prstGeom>
+            <a:noFill/>
+          </p:spPr>
+          <p:txBody>
+            <a:bodyPr wrap="square" rtlCol="0">
+              <a:spAutoFit/>
+            </a:bodyPr>
+            <a:lstStyle/>
+            <a:p>
+              <a:r>
+                <a:rPr lang="fr-FR" sz="1200" b="1" dirty="0"/>
+                <a:t>Indiquer :</a:t>
+              </a:r>
+              <a:r>
+                <a:rPr lang="fr-FR" sz="1200" dirty="0"/>
+                <a:t> </a:t>
+              </a:r>
+            </a:p>
+            <a:p>
+              <a:r>
+                <a:rPr lang="fr-FR" sz="1200" dirty="0"/>
+                <a:t>Projet KOSMOS</a:t>
+              </a:r>
+            </a:p>
+            <a:p>
+              <a:r>
+                <a:rPr lang="fr-FR" sz="1200" dirty="0"/>
+                <a:t>Numéro de contact</a:t>
+              </a:r>
+            </a:p>
+            <a:p>
+              <a:r>
+                <a:rPr lang="fr-FR" sz="1200" dirty="0"/>
+                <a:t>Nom et immatriculation du bateau</a:t>
+              </a:r>
+            </a:p>
+          </p:txBody>
+        </p:sp>
+        <p:cxnSp>
+          <p:nvCxnSpPr>
+            <p:cNvPr id="102" name="Connecteur droit avec flèche 101">
+              <a:extLst>
+                <a:ext uri="{FF2B5EF4-FFF2-40B4-BE49-F238E27FC236}">
+                  <a16:creationId xmlns:a16="http://schemas.microsoft.com/office/drawing/2014/main" id="{F319FC01-9284-4DBC-B725-35F03AA22ADA}"/>
+                </a:ext>
+              </a:extLst>
+            </p:cNvPr>
+            <p:cNvCxnSpPr>
+              <a:cxnSpLocks/>
+              <a:endCxn id="4" idx="0"/>
+            </p:cNvCxnSpPr>
+            <p:nvPr/>
+          </p:nvCxnSpPr>
+          <p:spPr>
+            <a:xfrm flipV="1">
+              <a:off x="3188439" y="172990"/>
+              <a:ext cx="1442089" cy="215506"/>
+            </a:xfrm>
+            <a:prstGeom prst="straightConnector1">
+              <a:avLst/>
+            </a:prstGeom>
+            <a:ln>
+              <a:tailEnd type="triangle"/>
+            </a:ln>
+          </p:spPr>
+          <p:style>
+            <a:lnRef idx="1">
+              <a:schemeClr val="accent1"/>
+            </a:lnRef>
+            <a:fillRef idx="0">
+              <a:schemeClr val="accent1"/>
+            </a:fillRef>
+            <a:effectRef idx="0">
+              <a:schemeClr val="accent1"/>
+            </a:effectRef>
+            <a:fontRef idx="minor">
+              <a:schemeClr val="tx1"/>
+            </a:fontRef>
+          </p:style>
+        </p:cxnSp>
+      </p:grpSp>
+    </p:spTree>
+    <p:extLst>
+      <p:ext uri="{BB962C8B-B14F-4D97-AF65-F5344CB8AC3E}">
+        <p14:creationId xmlns:p14="http://schemas.microsoft.com/office/powerpoint/2010/main" val="2138417231"/>
+      </p:ext>
+    </p:extLst>
+  </p:cSld>
+  <p:clrMapOvr>
+    <a:masterClrMapping/>
+  </p:clrMapOvr>
+</p:sld>
+</file>
+
 <file path=ppt/theme/theme1.xml><?xml version="1.0" encoding="utf-8"?>
 <a:theme xmlns:a="http://schemas.openxmlformats.org/drawingml/2006/main" name="Thème Office">
   <a:themeElements>

--- a/docs/doc/kosmosV5/SchemasDivers.pptx
+++ b/docs/doc/kosmosV5/SchemasDivers.pptx
@@ -263,7 +263,7 @@
           <a:p>
             <a:fld id="{85167808-081D-4196-B994-014D4460AAAC}" type="datetimeFigureOut">
               <a:rPr lang="fr-FR" smtClean="0"/>
-              <a:t>27/07/2026</a:t>
+              <a:t>23/08/2026</a:t>
             </a:fld>
             <a:endParaRPr lang="fr-FR"/>
           </a:p>
@@ -461,7 +461,7 @@
           <a:p>
             <a:fld id="{85167808-081D-4196-B994-014D4460AAAC}" type="datetimeFigureOut">
               <a:rPr lang="fr-FR" smtClean="0"/>
-              <a:t>27/07/2026</a:t>
+              <a:t>23/08/2026</a:t>
             </a:fld>
             <a:endParaRPr lang="fr-FR"/>
           </a:p>
@@ -669,7 +669,7 @@
           <a:p>
             <a:fld id="{85167808-081D-4196-B994-014D4460AAAC}" type="datetimeFigureOut">
               <a:rPr lang="fr-FR" smtClean="0"/>
-              <a:t>27/07/2026</a:t>
+              <a:t>23/08/2026</a:t>
             </a:fld>
             <a:endParaRPr lang="fr-FR"/>
           </a:p>
@@ -867,7 +867,7 @@
           <a:p>
             <a:fld id="{85167808-081D-4196-B994-014D4460AAAC}" type="datetimeFigureOut">
               <a:rPr lang="fr-FR" smtClean="0"/>
-              <a:t>27/07/2026</a:t>
+              <a:t>23/08/2026</a:t>
             </a:fld>
             <a:endParaRPr lang="fr-FR"/>
           </a:p>
@@ -1142,7 +1142,7 @@
           <a:p>
             <a:fld id="{85167808-081D-4196-B994-014D4460AAAC}" type="datetimeFigureOut">
               <a:rPr lang="fr-FR" smtClean="0"/>
-              <a:t>27/07/2026</a:t>
+              <a:t>23/08/2026</a:t>
             </a:fld>
             <a:endParaRPr lang="fr-FR"/>
           </a:p>
@@ -1407,7 +1407,7 @@
           <a:p>
             <a:fld id="{85167808-081D-4196-B994-014D4460AAAC}" type="datetimeFigureOut">
               <a:rPr lang="fr-FR" smtClean="0"/>
-              <a:t>27/07/2026</a:t>
+              <a:t>23/08/2026</a:t>
             </a:fld>
             <a:endParaRPr lang="fr-FR"/>
           </a:p>
@@ -1819,7 +1819,7 @@
           <a:p>
             <a:fld id="{85167808-081D-4196-B994-014D4460AAAC}" type="datetimeFigureOut">
               <a:rPr lang="fr-FR" smtClean="0"/>
-              <a:t>27/07/2026</a:t>
+              <a:t>23/08/2026</a:t>
             </a:fld>
             <a:endParaRPr lang="fr-FR"/>
           </a:p>
@@ -1960,7 +1960,7 @@
           <a:p>
             <a:fld id="{85167808-081D-4196-B994-014D4460AAAC}" type="datetimeFigureOut">
               <a:rPr lang="fr-FR" smtClean="0"/>
-              <a:t>27/07/2026</a:t>
+              <a:t>23/08/2026</a:t>
             </a:fld>
             <a:endParaRPr lang="fr-FR"/>
           </a:p>
@@ -2073,7 +2073,7 @@
           <a:p>
             <a:fld id="{85167808-081D-4196-B994-014D4460AAAC}" type="datetimeFigureOut">
               <a:rPr lang="fr-FR" smtClean="0"/>
-              <a:t>27/07/2026</a:t>
+              <a:t>23/08/2026</a:t>
             </a:fld>
             <a:endParaRPr lang="fr-FR"/>
           </a:p>
@@ -2384,7 +2384,7 @@
           <a:p>
             <a:fld id="{85167808-081D-4196-B994-014D4460AAAC}" type="datetimeFigureOut">
               <a:rPr lang="fr-FR" smtClean="0"/>
-              <a:t>27/07/2026</a:t>
+              <a:t>23/08/2026</a:t>
             </a:fld>
             <a:endParaRPr lang="fr-FR"/>
           </a:p>
@@ -2672,7 +2672,7 @@
           <a:p>
             <a:fld id="{85167808-081D-4196-B994-014D4460AAAC}" type="datetimeFigureOut">
               <a:rPr lang="fr-FR" smtClean="0"/>
-              <a:t>27/07/2026</a:t>
+              <a:t>23/08/2026</a:t>
             </a:fld>
             <a:endParaRPr lang="fr-FR"/>
           </a:p>
@@ -2913,7 +2913,7 @@
           <a:p>
             <a:fld id="{85167808-081D-4196-B994-014D4460AAAC}" type="datetimeFigureOut">
               <a:rPr lang="fr-FR" smtClean="0"/>
-              <a:t>27/07/2026</a:t>
+              <a:t>23/08/2026</a:t>
             </a:fld>
             <a:endParaRPr lang="fr-FR"/>
           </a:p>
@@ -6293,7 +6293,7 @@
 </file>
 
 <file path=ppt/slides/slide3.xml><?xml version="1.0" encoding="utf-8"?>
-<p:sld xmlns:a="http://schemas.openxmlformats.org/drawingml/2006/main" xmlns:r="http://schemas.openxmlformats.org/officeDocument/2006/relationships" xmlns:p="http://schemas.openxmlformats.org/presentationml/2006/main">
+<p:sld xmlns:a="http://schemas.openxmlformats.org/drawingml/2006/main" xmlns:r="http://schemas.openxmlformats.org/officeDocument/2006/relationships" xmlns:p="http://schemas.openxmlformats.org/presentationml/2006/main" show="0">
   <p:cSld>
     <p:spTree>
       <p:nvGrpSpPr>
@@ -7531,7 +7531,7 @@
 </file>
 
 <file path=ppt/slides/slide4.xml><?xml version="1.0" encoding="utf-8"?>
-<p:sld xmlns:a="http://schemas.openxmlformats.org/drawingml/2006/main" xmlns:r="http://schemas.openxmlformats.org/officeDocument/2006/relationships" xmlns:p="http://schemas.openxmlformats.org/presentationml/2006/main">
+<p:sld xmlns:a="http://schemas.openxmlformats.org/drawingml/2006/main" xmlns:r="http://schemas.openxmlformats.org/officeDocument/2006/relationships" xmlns:p="http://schemas.openxmlformats.org/presentationml/2006/main" show="0">
   <p:cSld>
     <p:spTree>
       <p:nvGrpSpPr>
@@ -8933,7 +8933,7 @@
         </p:nvGrpSpPr>
         <p:grpSpPr>
           <a:xfrm>
-            <a:off x="2455278" y="64545"/>
+            <a:off x="67180" y="179956"/>
             <a:ext cx="5571966" cy="6496772"/>
             <a:chOff x="2455278" y="64545"/>
             <a:chExt cx="5571966" cy="6496772"/>
@@ -9964,7 +9964,7 @@
               </a:r>
               <a:r>
                 <a:rPr lang="fr-FR" sz="1100" dirty="0"/>
-                <a:t>6 ou 8 mm</a:t>
+                <a:t>8 mm</a:t>
               </a:r>
             </a:p>
           </p:txBody>
@@ -10701,7 +10701,7 @@
               </a:r>
               <a:r>
                 <a:rPr lang="fr-FR" sz="1200" dirty="0"/>
-                <a:t>6 ou 8 mm</a:t>
+                <a:t>8 mm</a:t>
               </a:r>
             </a:p>
             <a:p>

--- a/docs/doc/kosmosV5/SchemasDivers.pptx
+++ b/docs/doc/kosmosV5/SchemasDivers.pptx
@@ -263,7 +263,7 @@
           <a:p>
             <a:fld id="{85167808-081D-4196-B994-014D4460AAAC}" type="datetimeFigureOut">
               <a:rPr lang="fr-FR" smtClean="0"/>
-              <a:t>23/08/2026</a:t>
+              <a:t>28/08/2026</a:t>
             </a:fld>
             <a:endParaRPr lang="fr-FR"/>
           </a:p>
@@ -461,7 +461,7 @@
           <a:p>
             <a:fld id="{85167808-081D-4196-B994-014D4460AAAC}" type="datetimeFigureOut">
               <a:rPr lang="fr-FR" smtClean="0"/>
-              <a:t>23/08/2026</a:t>
+              <a:t>28/08/2026</a:t>
             </a:fld>
             <a:endParaRPr lang="fr-FR"/>
           </a:p>
@@ -669,7 +669,7 @@
           <a:p>
             <a:fld id="{85167808-081D-4196-B994-014D4460AAAC}" type="datetimeFigureOut">
               <a:rPr lang="fr-FR" smtClean="0"/>
-              <a:t>23/08/2026</a:t>
+              <a:t>28/08/2026</a:t>
             </a:fld>
             <a:endParaRPr lang="fr-FR"/>
           </a:p>
@@ -867,7 +867,7 @@
           <a:p>
             <a:fld id="{85167808-081D-4196-B994-014D4460AAAC}" type="datetimeFigureOut">
               <a:rPr lang="fr-FR" smtClean="0"/>
-              <a:t>23/08/2026</a:t>
+              <a:t>28/08/2026</a:t>
             </a:fld>
             <a:endParaRPr lang="fr-FR"/>
           </a:p>
@@ -1142,7 +1142,7 @@
           <a:p>
             <a:fld id="{85167808-081D-4196-B994-014D4460AAAC}" type="datetimeFigureOut">
               <a:rPr lang="fr-FR" smtClean="0"/>
-              <a:t>23/08/2026</a:t>
+              <a:t>28/08/2026</a:t>
             </a:fld>
             <a:endParaRPr lang="fr-FR"/>
           </a:p>
@@ -1407,7 +1407,7 @@
           <a:p>
             <a:fld id="{85167808-081D-4196-B994-014D4460AAAC}" type="datetimeFigureOut">
               <a:rPr lang="fr-FR" smtClean="0"/>
-              <a:t>23/08/2026</a:t>
+              <a:t>28/08/2026</a:t>
             </a:fld>
             <a:endParaRPr lang="fr-FR"/>
           </a:p>
@@ -1819,7 +1819,7 @@
           <a:p>
             <a:fld id="{85167808-081D-4196-B994-014D4460AAAC}" type="datetimeFigureOut">
               <a:rPr lang="fr-FR" smtClean="0"/>
-              <a:t>23/08/2026</a:t>
+              <a:t>28/08/2026</a:t>
             </a:fld>
             <a:endParaRPr lang="fr-FR"/>
           </a:p>
@@ -1960,7 +1960,7 @@
           <a:p>
             <a:fld id="{85167808-081D-4196-B994-014D4460AAAC}" type="datetimeFigureOut">
               <a:rPr lang="fr-FR" smtClean="0"/>
-              <a:t>23/08/2026</a:t>
+              <a:t>28/08/2026</a:t>
             </a:fld>
             <a:endParaRPr lang="fr-FR"/>
           </a:p>
@@ -2073,7 +2073,7 @@
           <a:p>
             <a:fld id="{85167808-081D-4196-B994-014D4460AAAC}" type="datetimeFigureOut">
               <a:rPr lang="fr-FR" smtClean="0"/>
-              <a:t>23/08/2026</a:t>
+              <a:t>28/08/2026</a:t>
             </a:fld>
             <a:endParaRPr lang="fr-FR"/>
           </a:p>
@@ -2384,7 +2384,7 @@
           <a:p>
             <a:fld id="{85167808-081D-4196-B994-014D4460AAAC}" type="datetimeFigureOut">
               <a:rPr lang="fr-FR" smtClean="0"/>
-              <a:t>23/08/2026</a:t>
+              <a:t>28/08/2026</a:t>
             </a:fld>
             <a:endParaRPr lang="fr-FR"/>
           </a:p>
@@ -2672,7 +2672,7 @@
           <a:p>
             <a:fld id="{85167808-081D-4196-B994-014D4460AAAC}" type="datetimeFigureOut">
               <a:rPr lang="fr-FR" smtClean="0"/>
-              <a:t>23/08/2026</a:t>
+              <a:t>28/08/2026</a:t>
             </a:fld>
             <a:endParaRPr lang="fr-FR"/>
           </a:p>
@@ -2913,7 +2913,7 @@
           <a:p>
             <a:fld id="{85167808-081D-4196-B994-014D4460AAAC}" type="datetimeFigureOut">
               <a:rPr lang="fr-FR" smtClean="0"/>
-              <a:t>23/08/2026</a:t>
+              <a:t>28/08/2026</a:t>
             </a:fld>
             <a:endParaRPr lang="fr-FR"/>
           </a:p>
@@ -3330,12 +3330,124 @@
           <a:chExt cx="0" cy="0"/>
         </a:xfrm>
       </p:grpSpPr>
+      <p:pic>
+        <p:nvPicPr>
+          <p:cNvPr id="7" name="Image 6">
+            <a:extLst>
+              <a:ext uri="{FF2B5EF4-FFF2-40B4-BE49-F238E27FC236}">
+                <a16:creationId xmlns:a16="http://schemas.microsoft.com/office/drawing/2014/main" id="{EC92CACB-0CC8-4D06-A2B6-62ED111C231B}"/>
+              </a:ext>
+            </a:extLst>
+          </p:cNvPr>
+          <p:cNvPicPr>
+            <a:picLocks noChangeAspect="1"/>
+          </p:cNvPicPr>
+          <p:nvPr/>
+        </p:nvPicPr>
+        <p:blipFill>
+          <a:blip r:embed="rId2"/>
+          <a:stretch>
+            <a:fillRect/>
+          </a:stretch>
+        </p:blipFill>
+        <p:spPr>
+          <a:xfrm rot="5400000">
+            <a:off x="8163145" y="3240041"/>
+            <a:ext cx="292634" cy="963252"/>
+          </a:xfrm>
+          <a:prstGeom prst="rect">
+            <a:avLst/>
+          </a:prstGeom>
+        </p:spPr>
+      </p:pic>
+      <p:sp>
+        <p:nvSpPr>
+          <p:cNvPr id="8" name="Rectangle 7">
+            <a:extLst>
+              <a:ext uri="{FF2B5EF4-FFF2-40B4-BE49-F238E27FC236}">
+                <a16:creationId xmlns:a16="http://schemas.microsoft.com/office/drawing/2014/main" id="{74BFE1DD-366C-4CE5-B782-C10F09CE6B7B}"/>
+              </a:ext>
+            </a:extLst>
+          </p:cNvPr>
+          <p:cNvSpPr/>
+          <p:nvPr/>
+        </p:nvSpPr>
+        <p:spPr>
+          <a:xfrm>
+            <a:off x="3001116" y="3309542"/>
+            <a:ext cx="5308346" cy="211671"/>
+          </a:xfrm>
+          <a:prstGeom prst="rect">
+            <a:avLst/>
+          </a:prstGeom>
+          <a:solidFill>
+            <a:schemeClr val="tx1"/>
+          </a:solidFill>
+          <a:ln>
+            <a:noFill/>
+          </a:ln>
+        </p:spPr>
+        <p:style>
+          <a:lnRef idx="2">
+            <a:schemeClr val="accent1">
+              <a:shade val="50000"/>
+            </a:schemeClr>
+          </a:lnRef>
+          <a:fillRef idx="1">
+            <a:schemeClr val="accent1"/>
+          </a:fillRef>
+          <a:effectRef idx="0">
+            <a:schemeClr val="accent1"/>
+          </a:effectRef>
+          <a:fontRef idx="minor">
+            <a:schemeClr val="lt1"/>
+          </a:fontRef>
+        </p:style>
+        <p:txBody>
+          <a:bodyPr rtlCol="0" anchor="ctr"/>
+          <a:lstStyle/>
+          <a:p>
+            <a:pPr algn="ctr"/>
+            <a:endParaRPr lang="fr-FR" dirty="0"/>
+          </a:p>
+        </p:txBody>
+      </p:sp>
+      <p:pic>
+        <p:nvPicPr>
+          <p:cNvPr id="10" name="Image 9">
+            <a:extLst>
+              <a:ext uri="{FF2B5EF4-FFF2-40B4-BE49-F238E27FC236}">
+                <a16:creationId xmlns:a16="http://schemas.microsoft.com/office/drawing/2014/main" id="{20E5C6D8-B2D4-4662-8A81-6BBA3E2EDCF1}"/>
+              </a:ext>
+            </a:extLst>
+          </p:cNvPr>
+          <p:cNvPicPr>
+            <a:picLocks noChangeAspect="1"/>
+          </p:cNvPicPr>
+          <p:nvPr/>
+        </p:nvPicPr>
+        <p:blipFill>
+          <a:blip r:embed="rId2"/>
+          <a:stretch>
+            <a:fillRect/>
+          </a:stretch>
+        </p:blipFill>
+        <p:spPr>
+          <a:xfrm rot="16200000">
+            <a:off x="2771995" y="3217121"/>
+            <a:ext cx="292634" cy="963252"/>
+          </a:xfrm>
+          <a:prstGeom prst="rect">
+            <a:avLst/>
+          </a:prstGeom>
+        </p:spPr>
+      </p:pic>
       <p:grpSp>
         <p:nvGrpSpPr>
-          <p:cNvPr id="30" name="Groupe 29">
-            <a:extLst>
-              <a:ext uri="{FF2B5EF4-FFF2-40B4-BE49-F238E27FC236}">
-                <a16:creationId xmlns:a16="http://schemas.microsoft.com/office/drawing/2014/main" id="{C5BDB0E8-89B3-4697-8964-0FB5D62F1270}"/>
+          <p:cNvPr id="15" name="Groupe 14">
+            <a:extLst>
+              <a:ext uri="{FF2B5EF4-FFF2-40B4-BE49-F238E27FC236}">
+                <a16:creationId xmlns:a16="http://schemas.microsoft.com/office/drawing/2014/main" id="{74200A21-853F-45A0-ABEA-1B2BAD2EE19E}"/>
               </a:ext>
             </a:extLst>
           </p:cNvPr>
@@ -3344,7 +3456,1385 @@
         </p:nvGrpSpPr>
         <p:grpSpPr>
           <a:xfrm>
-            <a:off x="1027113" y="407227"/>
+            <a:off x="428138" y="2881977"/>
+            <a:ext cx="10134600" cy="533400"/>
+            <a:chOff x="904875" y="2333625"/>
+            <a:chExt cx="10134600" cy="533400"/>
+          </a:xfrm>
+        </p:grpSpPr>
+        <p:sp>
+          <p:nvSpPr>
+            <p:cNvPr id="11" name="Rectangle 10">
+              <a:extLst>
+                <a:ext uri="{FF2B5EF4-FFF2-40B4-BE49-F238E27FC236}">
+                  <a16:creationId xmlns:a16="http://schemas.microsoft.com/office/drawing/2014/main" id="{112A0944-CF29-43F3-8BA4-35B4A1D3B57E}"/>
+                </a:ext>
+              </a:extLst>
+            </p:cNvPr>
+            <p:cNvSpPr/>
+            <p:nvPr/>
+          </p:nvSpPr>
+          <p:spPr>
+            <a:xfrm>
+              <a:off x="904875" y="2494490"/>
+              <a:ext cx="9829800" cy="211671"/>
+            </a:xfrm>
+            <a:prstGeom prst="rect">
+              <a:avLst/>
+            </a:prstGeom>
+            <a:ln>
+              <a:noFill/>
+            </a:ln>
+          </p:spPr>
+          <p:style>
+            <a:lnRef idx="2">
+              <a:schemeClr val="accent4">
+                <a:shade val="50000"/>
+              </a:schemeClr>
+            </a:lnRef>
+            <a:fillRef idx="1">
+              <a:schemeClr val="accent4"/>
+            </a:fillRef>
+            <a:effectRef idx="0">
+              <a:schemeClr val="accent4"/>
+            </a:effectRef>
+            <a:fontRef idx="minor">
+              <a:schemeClr val="lt1"/>
+            </a:fontRef>
+          </p:style>
+          <p:txBody>
+            <a:bodyPr rtlCol="0" anchor="ctr"/>
+            <a:lstStyle/>
+            <a:p>
+              <a:pPr algn="ctr"/>
+              <a:endParaRPr lang="fr-FR"/>
+            </a:p>
+          </p:txBody>
+        </p:sp>
+        <p:sp>
+          <p:nvSpPr>
+            <p:cNvPr id="12" name="Rectangle 11">
+              <a:extLst>
+                <a:ext uri="{FF2B5EF4-FFF2-40B4-BE49-F238E27FC236}">
+                  <a16:creationId xmlns:a16="http://schemas.microsoft.com/office/drawing/2014/main" id="{6FFEE4DB-147B-482E-9764-0FD3C457AC9F}"/>
+                </a:ext>
+              </a:extLst>
+            </p:cNvPr>
+            <p:cNvSpPr/>
+            <p:nvPr/>
+          </p:nvSpPr>
+          <p:spPr>
+            <a:xfrm>
+              <a:off x="10734675" y="2333625"/>
+              <a:ext cx="304800" cy="533400"/>
+            </a:xfrm>
+            <a:prstGeom prst="rect">
+              <a:avLst/>
+            </a:prstGeom>
+            <a:ln>
+              <a:noFill/>
+            </a:ln>
+          </p:spPr>
+          <p:style>
+            <a:lnRef idx="2">
+              <a:schemeClr val="accent4">
+                <a:shade val="50000"/>
+              </a:schemeClr>
+            </a:lnRef>
+            <a:fillRef idx="1">
+              <a:schemeClr val="accent4"/>
+            </a:fillRef>
+            <a:effectRef idx="0">
+              <a:schemeClr val="accent4"/>
+            </a:effectRef>
+            <a:fontRef idx="minor">
+              <a:schemeClr val="lt1"/>
+            </a:fontRef>
+          </p:style>
+          <p:txBody>
+            <a:bodyPr rtlCol="0" anchor="ctr"/>
+            <a:lstStyle/>
+            <a:p>
+              <a:pPr algn="ctr"/>
+              <a:endParaRPr lang="fr-FR"/>
+            </a:p>
+          </p:txBody>
+        </p:sp>
+        <p:sp>
+          <p:nvSpPr>
+            <p:cNvPr id="13" name="Rectangle 12">
+              <a:extLst>
+                <a:ext uri="{FF2B5EF4-FFF2-40B4-BE49-F238E27FC236}">
+                  <a16:creationId xmlns:a16="http://schemas.microsoft.com/office/drawing/2014/main" id="{7B9E869B-3CBE-4472-AE73-2ADF54B64AA6}"/>
+                </a:ext>
+              </a:extLst>
+            </p:cNvPr>
+            <p:cNvSpPr/>
+            <p:nvPr/>
+          </p:nvSpPr>
+          <p:spPr>
+            <a:xfrm>
+              <a:off x="10877550" y="2371726"/>
+              <a:ext cx="152400" cy="466724"/>
+            </a:xfrm>
+            <a:prstGeom prst="rect">
+              <a:avLst/>
+            </a:prstGeom>
+            <a:solidFill>
+              <a:schemeClr val="tx1"/>
+            </a:solidFill>
+            <a:ln>
+              <a:noFill/>
+            </a:ln>
+          </p:spPr>
+          <p:style>
+            <a:lnRef idx="2">
+              <a:schemeClr val="accent4">
+                <a:shade val="50000"/>
+              </a:schemeClr>
+            </a:lnRef>
+            <a:fillRef idx="1">
+              <a:schemeClr val="accent4"/>
+            </a:fillRef>
+            <a:effectRef idx="0">
+              <a:schemeClr val="accent4"/>
+            </a:effectRef>
+            <a:fontRef idx="minor">
+              <a:schemeClr val="lt1"/>
+            </a:fontRef>
+          </p:style>
+          <p:txBody>
+            <a:bodyPr rtlCol="0" anchor="ctr"/>
+            <a:lstStyle/>
+            <a:p>
+              <a:pPr algn="ctr"/>
+              <a:endParaRPr lang="fr-FR"/>
+            </a:p>
+          </p:txBody>
+        </p:sp>
+        <p:sp>
+          <p:nvSpPr>
+            <p:cNvPr id="14" name="Rectangle 13">
+              <a:extLst>
+                <a:ext uri="{FF2B5EF4-FFF2-40B4-BE49-F238E27FC236}">
+                  <a16:creationId xmlns:a16="http://schemas.microsoft.com/office/drawing/2014/main" id="{4B5562E9-D347-4A41-97F1-EBC27B43E2B4}"/>
+                </a:ext>
+              </a:extLst>
+            </p:cNvPr>
+            <p:cNvSpPr/>
+            <p:nvPr/>
+          </p:nvSpPr>
+          <p:spPr>
+            <a:xfrm>
+              <a:off x="911226" y="2500841"/>
+              <a:ext cx="107950" cy="202146"/>
+            </a:xfrm>
+            <a:prstGeom prst="rect">
+              <a:avLst/>
+            </a:prstGeom>
+            <a:solidFill>
+              <a:schemeClr val="tx1"/>
+            </a:solidFill>
+            <a:ln>
+              <a:noFill/>
+            </a:ln>
+          </p:spPr>
+          <p:style>
+            <a:lnRef idx="2">
+              <a:schemeClr val="accent4">
+                <a:shade val="50000"/>
+              </a:schemeClr>
+            </a:lnRef>
+            <a:fillRef idx="1">
+              <a:schemeClr val="accent4"/>
+            </a:fillRef>
+            <a:effectRef idx="0">
+              <a:schemeClr val="accent4"/>
+            </a:effectRef>
+            <a:fontRef idx="minor">
+              <a:schemeClr val="lt1"/>
+            </a:fontRef>
+          </p:style>
+          <p:txBody>
+            <a:bodyPr rtlCol="0" anchor="ctr"/>
+            <a:lstStyle/>
+            <a:p>
+              <a:pPr algn="ctr"/>
+              <a:endParaRPr lang="fr-FR"/>
+            </a:p>
+          </p:txBody>
+        </p:sp>
+      </p:grpSp>
+      <p:cxnSp>
+        <p:nvCxnSpPr>
+          <p:cNvPr id="17" name="Connecteur droit avec flèche 16">
+            <a:extLst>
+              <a:ext uri="{FF2B5EF4-FFF2-40B4-BE49-F238E27FC236}">
+                <a16:creationId xmlns:a16="http://schemas.microsoft.com/office/drawing/2014/main" id="{3058892A-8762-4AFC-8697-69D54CE12C72}"/>
+              </a:ext>
+            </a:extLst>
+          </p:cNvPr>
+          <p:cNvCxnSpPr>
+            <a:cxnSpLocks/>
+          </p:cNvCxnSpPr>
+          <p:nvPr/>
+        </p:nvCxnSpPr>
+        <p:spPr>
+          <a:xfrm>
+            <a:off x="8780834" y="3845064"/>
+            <a:ext cx="1781904" cy="9525"/>
+          </a:xfrm>
+          <a:prstGeom prst="straightConnector1">
+            <a:avLst/>
+          </a:prstGeom>
+          <a:ln>
+            <a:headEnd type="triangle" w="med" len="med"/>
+            <a:tailEnd type="triangle" w="med" len="med"/>
+          </a:ln>
+        </p:spPr>
+        <p:style>
+          <a:lnRef idx="1">
+            <a:schemeClr val="accent1"/>
+          </a:lnRef>
+          <a:fillRef idx="0">
+            <a:schemeClr val="accent1"/>
+          </a:fillRef>
+          <a:effectRef idx="0">
+            <a:schemeClr val="accent1"/>
+          </a:effectRef>
+          <a:fontRef idx="minor">
+            <a:schemeClr val="tx1"/>
+          </a:fontRef>
+        </p:style>
+      </p:cxnSp>
+      <p:sp>
+        <p:nvSpPr>
+          <p:cNvPr id="18" name="ZoneTexte 17">
+            <a:extLst>
+              <a:ext uri="{FF2B5EF4-FFF2-40B4-BE49-F238E27FC236}">
+                <a16:creationId xmlns:a16="http://schemas.microsoft.com/office/drawing/2014/main" id="{80E66910-960B-4846-BECE-4879915B8697}"/>
+              </a:ext>
+            </a:extLst>
+          </p:cNvPr>
+          <p:cNvSpPr txBox="1"/>
+          <p:nvPr/>
+        </p:nvSpPr>
+        <p:spPr>
+          <a:xfrm>
+            <a:off x="9372909" y="3807384"/>
+            <a:ext cx="636713" cy="369332"/>
+          </a:xfrm>
+          <a:prstGeom prst="rect">
+            <a:avLst/>
+          </a:prstGeom>
+          <a:noFill/>
+        </p:spPr>
+        <p:txBody>
+          <a:bodyPr wrap="none" rtlCol="0">
+            <a:spAutoFit/>
+          </a:bodyPr>
+          <a:lstStyle/>
+          <a:p>
+            <a:r>
+              <a:rPr lang="fr-FR" dirty="0"/>
+              <a:t>5 cm</a:t>
+            </a:r>
+          </a:p>
+        </p:txBody>
+      </p:sp>
+      <p:sp>
+        <p:nvSpPr>
+          <p:cNvPr id="19" name="ZoneTexte 18">
+            <a:extLst>
+              <a:ext uri="{FF2B5EF4-FFF2-40B4-BE49-F238E27FC236}">
+                <a16:creationId xmlns:a16="http://schemas.microsoft.com/office/drawing/2014/main" id="{FC5C034A-E969-454B-8F55-3976323D552A}"/>
+              </a:ext>
+            </a:extLst>
+          </p:cNvPr>
+          <p:cNvSpPr txBox="1"/>
+          <p:nvPr/>
+        </p:nvSpPr>
+        <p:spPr>
+          <a:xfrm>
+            <a:off x="1018688" y="3858530"/>
+            <a:ext cx="928459" cy="369332"/>
+          </a:xfrm>
+          <a:prstGeom prst="rect">
+            <a:avLst/>
+          </a:prstGeom>
+          <a:noFill/>
+        </p:spPr>
+        <p:txBody>
+          <a:bodyPr wrap="none" rtlCol="0">
+            <a:spAutoFit/>
+          </a:bodyPr>
+          <a:lstStyle/>
+          <a:p>
+            <a:r>
+              <a:rPr lang="fr-FR" dirty="0"/>
+              <a:t>13.5 cm</a:t>
+            </a:r>
+          </a:p>
+        </p:txBody>
+      </p:sp>
+      <p:cxnSp>
+        <p:nvCxnSpPr>
+          <p:cNvPr id="20" name="Connecteur droit avec flèche 19">
+            <a:extLst>
+              <a:ext uri="{FF2B5EF4-FFF2-40B4-BE49-F238E27FC236}">
+                <a16:creationId xmlns:a16="http://schemas.microsoft.com/office/drawing/2014/main" id="{14B80C03-9C6B-40BC-B040-A30CDA0258CF}"/>
+              </a:ext>
+            </a:extLst>
+          </p:cNvPr>
+          <p:cNvCxnSpPr>
+            <a:cxnSpLocks/>
+          </p:cNvCxnSpPr>
+          <p:nvPr/>
+        </p:nvCxnSpPr>
+        <p:spPr>
+          <a:xfrm>
+            <a:off x="428138" y="3892938"/>
+            <a:ext cx="2008548" cy="0"/>
+          </a:xfrm>
+          <a:prstGeom prst="straightConnector1">
+            <a:avLst/>
+          </a:prstGeom>
+          <a:ln>
+            <a:headEnd type="triangle" w="med" len="med"/>
+            <a:tailEnd type="triangle" w="med" len="med"/>
+          </a:ln>
+        </p:spPr>
+        <p:style>
+          <a:lnRef idx="1">
+            <a:schemeClr val="accent1"/>
+          </a:lnRef>
+          <a:fillRef idx="0">
+            <a:schemeClr val="accent1"/>
+          </a:fillRef>
+          <a:effectRef idx="0">
+            <a:schemeClr val="accent1"/>
+          </a:effectRef>
+          <a:fontRef idx="minor">
+            <a:schemeClr val="tx1"/>
+          </a:fontRef>
+        </p:style>
+      </p:cxnSp>
+      <p:cxnSp>
+        <p:nvCxnSpPr>
+          <p:cNvPr id="27" name="Connecteur droit avec flèche 26">
+            <a:extLst>
+              <a:ext uri="{FF2B5EF4-FFF2-40B4-BE49-F238E27FC236}">
+                <a16:creationId xmlns:a16="http://schemas.microsoft.com/office/drawing/2014/main" id="{87152263-F194-4218-B91E-FCB25379F672}"/>
+              </a:ext>
+            </a:extLst>
+          </p:cNvPr>
+          <p:cNvCxnSpPr>
+            <a:cxnSpLocks/>
+          </p:cNvCxnSpPr>
+          <p:nvPr/>
+        </p:nvCxnSpPr>
+        <p:spPr>
+          <a:xfrm flipV="1">
+            <a:off x="3001116" y="3973644"/>
+            <a:ext cx="5308346" cy="27512"/>
+          </a:xfrm>
+          <a:prstGeom prst="straightConnector1">
+            <a:avLst/>
+          </a:prstGeom>
+          <a:ln>
+            <a:headEnd type="triangle" w="med" len="med"/>
+            <a:tailEnd type="triangle" w="med" len="med"/>
+          </a:ln>
+        </p:spPr>
+        <p:style>
+          <a:lnRef idx="1">
+            <a:schemeClr val="accent1"/>
+          </a:lnRef>
+          <a:fillRef idx="0">
+            <a:schemeClr val="accent1"/>
+          </a:fillRef>
+          <a:effectRef idx="0">
+            <a:schemeClr val="accent1"/>
+          </a:effectRef>
+          <a:fontRef idx="minor">
+            <a:schemeClr val="tx1"/>
+          </a:fontRef>
+        </p:style>
+      </p:cxnSp>
+      <p:sp>
+        <p:nvSpPr>
+          <p:cNvPr id="29" name="ZoneTexte 28">
+            <a:extLst>
+              <a:ext uri="{FF2B5EF4-FFF2-40B4-BE49-F238E27FC236}">
+                <a16:creationId xmlns:a16="http://schemas.microsoft.com/office/drawing/2014/main" id="{14FA811A-15BF-45D4-94E7-DAFB0D7678FD}"/>
+              </a:ext>
+            </a:extLst>
+          </p:cNvPr>
+          <p:cNvSpPr txBox="1"/>
+          <p:nvPr/>
+        </p:nvSpPr>
+        <p:spPr>
+          <a:xfrm>
+            <a:off x="4966172" y="3973644"/>
+            <a:ext cx="928459" cy="369332"/>
+          </a:xfrm>
+          <a:prstGeom prst="rect">
+            <a:avLst/>
+          </a:prstGeom>
+          <a:noFill/>
+        </p:spPr>
+        <p:txBody>
+          <a:bodyPr wrap="none" rtlCol="0">
+            <a:spAutoFit/>
+          </a:bodyPr>
+          <a:lstStyle/>
+          <a:p>
+            <a:r>
+              <a:rPr lang="fr-FR" dirty="0"/>
+              <a:t>24.5 cm</a:t>
+            </a:r>
+          </a:p>
+        </p:txBody>
+      </p:sp>
+      <p:cxnSp>
+        <p:nvCxnSpPr>
+          <p:cNvPr id="32" name="Connecteur droit avec flèche 31">
+            <a:extLst>
+              <a:ext uri="{FF2B5EF4-FFF2-40B4-BE49-F238E27FC236}">
+                <a16:creationId xmlns:a16="http://schemas.microsoft.com/office/drawing/2014/main" id="{A2F654D7-B4FA-4FD2-9DFC-1FE9DBECEC15}"/>
+              </a:ext>
+            </a:extLst>
+          </p:cNvPr>
+          <p:cNvCxnSpPr>
+            <a:cxnSpLocks/>
+          </p:cNvCxnSpPr>
+          <p:nvPr/>
+        </p:nvCxnSpPr>
+        <p:spPr>
+          <a:xfrm flipV="1">
+            <a:off x="4324161" y="4829875"/>
+            <a:ext cx="0" cy="1423116"/>
+          </a:xfrm>
+          <a:prstGeom prst="straightConnector1">
+            <a:avLst/>
+          </a:prstGeom>
+          <a:ln w="28575">
+            <a:solidFill>
+              <a:schemeClr val="tx1"/>
+            </a:solidFill>
+            <a:tailEnd type="triangle"/>
+          </a:ln>
+        </p:spPr>
+        <p:style>
+          <a:lnRef idx="1">
+            <a:schemeClr val="accent1"/>
+          </a:lnRef>
+          <a:fillRef idx="0">
+            <a:schemeClr val="accent1"/>
+          </a:fillRef>
+          <a:effectRef idx="0">
+            <a:schemeClr val="accent1"/>
+          </a:effectRef>
+          <a:fontRef idx="minor">
+            <a:schemeClr val="tx1"/>
+          </a:fontRef>
+        </p:style>
+      </p:cxnSp>
+      <p:cxnSp>
+        <p:nvCxnSpPr>
+          <p:cNvPr id="33" name="Connecteur droit avec flèche 32">
+            <a:extLst>
+              <a:ext uri="{FF2B5EF4-FFF2-40B4-BE49-F238E27FC236}">
+                <a16:creationId xmlns:a16="http://schemas.microsoft.com/office/drawing/2014/main" id="{76E197AA-BECE-4671-9126-42856FC8713E}"/>
+              </a:ext>
+            </a:extLst>
+          </p:cNvPr>
+          <p:cNvCxnSpPr>
+            <a:cxnSpLocks/>
+          </p:cNvCxnSpPr>
+          <p:nvPr/>
+        </p:nvCxnSpPr>
+        <p:spPr>
+          <a:xfrm>
+            <a:off x="4304841" y="4705378"/>
+            <a:ext cx="727656" cy="0"/>
+          </a:xfrm>
+          <a:prstGeom prst="straightConnector1">
+            <a:avLst/>
+          </a:prstGeom>
+          <a:ln w="28575">
+            <a:solidFill>
+              <a:schemeClr val="tx1"/>
+            </a:solidFill>
+            <a:headEnd type="none" w="med" len="med"/>
+            <a:tailEnd type="none" w="med" len="med"/>
+          </a:ln>
+        </p:spPr>
+        <p:style>
+          <a:lnRef idx="1">
+            <a:schemeClr val="accent1"/>
+          </a:lnRef>
+          <a:fillRef idx="0">
+            <a:schemeClr val="accent1"/>
+          </a:fillRef>
+          <a:effectRef idx="0">
+            <a:schemeClr val="accent1"/>
+          </a:effectRef>
+          <a:fontRef idx="minor">
+            <a:schemeClr val="tx1"/>
+          </a:fontRef>
+        </p:style>
+      </p:cxnSp>
+      <p:cxnSp>
+        <p:nvCxnSpPr>
+          <p:cNvPr id="34" name="Connecteur droit avec flèche 33">
+            <a:extLst>
+              <a:ext uri="{FF2B5EF4-FFF2-40B4-BE49-F238E27FC236}">
+                <a16:creationId xmlns:a16="http://schemas.microsoft.com/office/drawing/2014/main" id="{2E2FA0E6-72E4-4150-B25A-1BA410F7E15C}"/>
+              </a:ext>
+            </a:extLst>
+          </p:cNvPr>
+          <p:cNvCxnSpPr>
+            <a:cxnSpLocks/>
+          </p:cNvCxnSpPr>
+          <p:nvPr/>
+        </p:nvCxnSpPr>
+        <p:spPr>
+          <a:xfrm>
+            <a:off x="5032497" y="4698939"/>
+            <a:ext cx="0" cy="388512"/>
+          </a:xfrm>
+          <a:prstGeom prst="straightConnector1">
+            <a:avLst/>
+          </a:prstGeom>
+          <a:ln w="28575">
+            <a:solidFill>
+              <a:schemeClr val="tx1"/>
+            </a:solidFill>
+            <a:headEnd type="none" w="med" len="med"/>
+            <a:tailEnd type="none" w="med" len="med"/>
+          </a:ln>
+        </p:spPr>
+        <p:style>
+          <a:lnRef idx="1">
+            <a:schemeClr val="accent1"/>
+          </a:lnRef>
+          <a:fillRef idx="0">
+            <a:schemeClr val="accent1"/>
+          </a:fillRef>
+          <a:effectRef idx="0">
+            <a:schemeClr val="accent1"/>
+          </a:effectRef>
+          <a:fontRef idx="minor">
+            <a:schemeClr val="tx1"/>
+          </a:fontRef>
+        </p:style>
+      </p:cxnSp>
+      <p:sp>
+        <p:nvSpPr>
+          <p:cNvPr id="35" name="Rectangle 34">
+            <a:extLst>
+              <a:ext uri="{FF2B5EF4-FFF2-40B4-BE49-F238E27FC236}">
+                <a16:creationId xmlns:a16="http://schemas.microsoft.com/office/drawing/2014/main" id="{2525BF7E-2ECE-4885-AA27-A02181D69BE7}"/>
+              </a:ext>
+            </a:extLst>
+          </p:cNvPr>
+          <p:cNvSpPr/>
+          <p:nvPr/>
+        </p:nvSpPr>
+        <p:spPr>
+          <a:xfrm>
+            <a:off x="4948785" y="5093893"/>
+            <a:ext cx="160956" cy="321971"/>
+          </a:xfrm>
+          <a:prstGeom prst="rect">
+            <a:avLst/>
+          </a:prstGeom>
+          <a:noFill/>
+          <a:ln w="28575">
+            <a:solidFill>
+              <a:schemeClr val="tx1"/>
+            </a:solidFill>
+          </a:ln>
+        </p:spPr>
+        <p:style>
+          <a:lnRef idx="2">
+            <a:schemeClr val="accent1">
+              <a:shade val="50000"/>
+            </a:schemeClr>
+          </a:lnRef>
+          <a:fillRef idx="1">
+            <a:schemeClr val="accent1"/>
+          </a:fillRef>
+          <a:effectRef idx="0">
+            <a:schemeClr val="accent1"/>
+          </a:effectRef>
+          <a:fontRef idx="minor">
+            <a:schemeClr val="lt1"/>
+          </a:fontRef>
+        </p:style>
+        <p:txBody>
+          <a:bodyPr rtlCol="0" anchor="ctr"/>
+          <a:lstStyle/>
+          <a:p>
+            <a:pPr algn="ctr"/>
+            <a:endParaRPr lang="fr-FR"/>
+          </a:p>
+        </p:txBody>
+      </p:sp>
+      <p:cxnSp>
+        <p:nvCxnSpPr>
+          <p:cNvPr id="36" name="Connecteur droit avec flèche 35">
+            <a:extLst>
+              <a:ext uri="{FF2B5EF4-FFF2-40B4-BE49-F238E27FC236}">
+                <a16:creationId xmlns:a16="http://schemas.microsoft.com/office/drawing/2014/main" id="{D0953EA8-05B3-4924-B900-644CDE5590D2}"/>
+              </a:ext>
+            </a:extLst>
+          </p:cNvPr>
+          <p:cNvCxnSpPr>
+            <a:cxnSpLocks/>
+          </p:cNvCxnSpPr>
+          <p:nvPr/>
+        </p:nvCxnSpPr>
+        <p:spPr>
+          <a:xfrm>
+            <a:off x="5032497" y="5415864"/>
+            <a:ext cx="0" cy="388512"/>
+          </a:xfrm>
+          <a:prstGeom prst="straightConnector1">
+            <a:avLst/>
+          </a:prstGeom>
+          <a:ln w="28575">
+            <a:solidFill>
+              <a:schemeClr val="tx1"/>
+            </a:solidFill>
+            <a:headEnd type="none" w="med" len="med"/>
+            <a:tailEnd type="none" w="med" len="med"/>
+          </a:ln>
+        </p:spPr>
+        <p:style>
+          <a:lnRef idx="1">
+            <a:schemeClr val="accent1"/>
+          </a:lnRef>
+          <a:fillRef idx="0">
+            <a:schemeClr val="accent1"/>
+          </a:fillRef>
+          <a:effectRef idx="0">
+            <a:schemeClr val="accent1"/>
+          </a:effectRef>
+          <a:fontRef idx="minor">
+            <a:schemeClr val="tx1"/>
+          </a:fontRef>
+        </p:style>
+      </p:cxnSp>
+      <p:sp>
+        <p:nvSpPr>
+          <p:cNvPr id="37" name="Triangle isocèle 36">
+            <a:extLst>
+              <a:ext uri="{FF2B5EF4-FFF2-40B4-BE49-F238E27FC236}">
+                <a16:creationId xmlns:a16="http://schemas.microsoft.com/office/drawing/2014/main" id="{6DC235BE-22C8-42AB-8C96-738C3C4F7E89}"/>
+              </a:ext>
+            </a:extLst>
+          </p:cNvPr>
+          <p:cNvSpPr/>
+          <p:nvPr/>
+        </p:nvSpPr>
+        <p:spPr>
+          <a:xfrm rot="10800000">
+            <a:off x="4884389" y="5804376"/>
+            <a:ext cx="289732" cy="191031"/>
+          </a:xfrm>
+          <a:prstGeom prst="triangle">
+            <a:avLst/>
+          </a:prstGeom>
+          <a:noFill/>
+          <a:ln w="28575">
+            <a:solidFill>
+              <a:schemeClr val="tx1"/>
+            </a:solidFill>
+          </a:ln>
+        </p:spPr>
+        <p:style>
+          <a:lnRef idx="2">
+            <a:schemeClr val="accent1">
+              <a:shade val="50000"/>
+            </a:schemeClr>
+          </a:lnRef>
+          <a:fillRef idx="1">
+            <a:schemeClr val="accent1"/>
+          </a:fillRef>
+          <a:effectRef idx="0">
+            <a:schemeClr val="accent1"/>
+          </a:effectRef>
+          <a:fontRef idx="minor">
+            <a:schemeClr val="lt1"/>
+          </a:fontRef>
+        </p:style>
+        <p:txBody>
+          <a:bodyPr rtlCol="0" anchor="ctr"/>
+          <a:lstStyle/>
+          <a:p>
+            <a:pPr algn="ctr"/>
+            <a:endParaRPr lang="fr-FR"/>
+          </a:p>
+        </p:txBody>
+      </p:sp>
+      <p:cxnSp>
+        <p:nvCxnSpPr>
+          <p:cNvPr id="38" name="Connecteur droit avec flèche 37">
+            <a:extLst>
+              <a:ext uri="{FF2B5EF4-FFF2-40B4-BE49-F238E27FC236}">
+                <a16:creationId xmlns:a16="http://schemas.microsoft.com/office/drawing/2014/main" id="{A79EC6FD-A5FD-4F10-9E9D-D8A7A59E6711}"/>
+              </a:ext>
+            </a:extLst>
+          </p:cNvPr>
+          <p:cNvCxnSpPr>
+            <a:cxnSpLocks/>
+          </p:cNvCxnSpPr>
+          <p:nvPr/>
+        </p:nvCxnSpPr>
+        <p:spPr>
+          <a:xfrm>
+            <a:off x="5032497" y="5995408"/>
+            <a:ext cx="0" cy="388512"/>
+          </a:xfrm>
+          <a:prstGeom prst="straightConnector1">
+            <a:avLst/>
+          </a:prstGeom>
+          <a:ln w="28575">
+            <a:solidFill>
+              <a:schemeClr val="tx1"/>
+            </a:solidFill>
+            <a:headEnd type="none" w="med" len="med"/>
+            <a:tailEnd type="none" w="med" len="med"/>
+          </a:ln>
+        </p:spPr>
+        <p:style>
+          <a:lnRef idx="1">
+            <a:schemeClr val="accent1"/>
+          </a:lnRef>
+          <a:fillRef idx="0">
+            <a:schemeClr val="accent1"/>
+          </a:fillRef>
+          <a:effectRef idx="0">
+            <a:schemeClr val="accent1"/>
+          </a:effectRef>
+          <a:fontRef idx="minor">
+            <a:schemeClr val="tx1"/>
+          </a:fontRef>
+        </p:style>
+      </p:cxnSp>
+      <p:cxnSp>
+        <p:nvCxnSpPr>
+          <p:cNvPr id="39" name="Connecteur droit avec flèche 38">
+            <a:extLst>
+              <a:ext uri="{FF2B5EF4-FFF2-40B4-BE49-F238E27FC236}">
+                <a16:creationId xmlns:a16="http://schemas.microsoft.com/office/drawing/2014/main" id="{D620A22E-764B-497D-99D7-60A4B5963510}"/>
+              </a:ext>
+            </a:extLst>
+          </p:cNvPr>
+          <p:cNvCxnSpPr>
+            <a:cxnSpLocks/>
+          </p:cNvCxnSpPr>
+          <p:nvPr/>
+        </p:nvCxnSpPr>
+        <p:spPr>
+          <a:xfrm flipH="1">
+            <a:off x="4886536" y="5995408"/>
+            <a:ext cx="287599" cy="0"/>
+          </a:xfrm>
+          <a:prstGeom prst="straightConnector1">
+            <a:avLst/>
+          </a:prstGeom>
+          <a:ln w="28575">
+            <a:solidFill>
+              <a:schemeClr val="tx1"/>
+            </a:solidFill>
+            <a:headEnd type="none" w="med" len="med"/>
+            <a:tailEnd type="none" w="med" len="med"/>
+          </a:ln>
+        </p:spPr>
+        <p:style>
+          <a:lnRef idx="1">
+            <a:schemeClr val="accent1"/>
+          </a:lnRef>
+          <a:fillRef idx="0">
+            <a:schemeClr val="accent1"/>
+          </a:fillRef>
+          <a:effectRef idx="0">
+            <a:schemeClr val="accent1"/>
+          </a:effectRef>
+          <a:fontRef idx="minor">
+            <a:schemeClr val="tx1"/>
+          </a:fontRef>
+        </p:style>
+      </p:cxnSp>
+      <p:cxnSp>
+        <p:nvCxnSpPr>
+          <p:cNvPr id="40" name="Connecteur droit avec flèche 39">
+            <a:extLst>
+              <a:ext uri="{FF2B5EF4-FFF2-40B4-BE49-F238E27FC236}">
+                <a16:creationId xmlns:a16="http://schemas.microsoft.com/office/drawing/2014/main" id="{40A9CD21-81E9-40FE-81A6-79BC3891E817}"/>
+              </a:ext>
+            </a:extLst>
+          </p:cNvPr>
+          <p:cNvCxnSpPr>
+            <a:cxnSpLocks/>
+          </p:cNvCxnSpPr>
+          <p:nvPr/>
+        </p:nvCxnSpPr>
+        <p:spPr>
+          <a:xfrm>
+            <a:off x="4304841" y="6388217"/>
+            <a:ext cx="734070" cy="0"/>
+          </a:xfrm>
+          <a:prstGeom prst="straightConnector1">
+            <a:avLst/>
+          </a:prstGeom>
+          <a:ln w="28575">
+            <a:solidFill>
+              <a:schemeClr val="tx1"/>
+            </a:solidFill>
+            <a:headEnd type="none" w="med" len="med"/>
+            <a:tailEnd type="none" w="med" len="med"/>
+          </a:ln>
+        </p:spPr>
+        <p:style>
+          <a:lnRef idx="1">
+            <a:schemeClr val="accent1"/>
+          </a:lnRef>
+          <a:fillRef idx="0">
+            <a:schemeClr val="accent1"/>
+          </a:fillRef>
+          <a:effectRef idx="0">
+            <a:schemeClr val="accent1"/>
+          </a:effectRef>
+          <a:fontRef idx="minor">
+            <a:schemeClr val="tx1"/>
+          </a:fontRef>
+        </p:style>
+      </p:cxnSp>
+      <p:cxnSp>
+        <p:nvCxnSpPr>
+          <p:cNvPr id="41" name="Connecteur droit avec flèche 40">
+            <a:extLst>
+              <a:ext uri="{FF2B5EF4-FFF2-40B4-BE49-F238E27FC236}">
+                <a16:creationId xmlns:a16="http://schemas.microsoft.com/office/drawing/2014/main" id="{6C575282-1860-441D-B172-E0BB07F011D0}"/>
+              </a:ext>
+            </a:extLst>
+          </p:cNvPr>
+          <p:cNvCxnSpPr>
+            <a:cxnSpLocks/>
+          </p:cNvCxnSpPr>
+          <p:nvPr/>
+        </p:nvCxnSpPr>
+        <p:spPr>
+          <a:xfrm flipV="1">
+            <a:off x="5313687" y="4737578"/>
+            <a:ext cx="0" cy="787755"/>
+          </a:xfrm>
+          <a:prstGeom prst="straightConnector1">
+            <a:avLst/>
+          </a:prstGeom>
+          <a:ln w="28575">
+            <a:solidFill>
+              <a:schemeClr val="tx1"/>
+            </a:solidFill>
+            <a:tailEnd type="triangle"/>
+          </a:ln>
+        </p:spPr>
+        <p:style>
+          <a:lnRef idx="1">
+            <a:schemeClr val="accent1"/>
+          </a:lnRef>
+          <a:fillRef idx="0">
+            <a:schemeClr val="accent1"/>
+          </a:fillRef>
+          <a:effectRef idx="0">
+            <a:schemeClr val="accent1"/>
+          </a:effectRef>
+          <a:fontRef idx="minor">
+            <a:schemeClr val="tx1"/>
+          </a:fontRef>
+        </p:style>
+      </p:cxnSp>
+      <p:cxnSp>
+        <p:nvCxnSpPr>
+          <p:cNvPr id="42" name="Connecteur droit avec flèche 41">
+            <a:extLst>
+              <a:ext uri="{FF2B5EF4-FFF2-40B4-BE49-F238E27FC236}">
+                <a16:creationId xmlns:a16="http://schemas.microsoft.com/office/drawing/2014/main" id="{6E44B196-BAE1-4594-8B19-4338A95279D6}"/>
+              </a:ext>
+            </a:extLst>
+          </p:cNvPr>
+          <p:cNvCxnSpPr>
+            <a:cxnSpLocks/>
+          </p:cNvCxnSpPr>
+          <p:nvPr/>
+        </p:nvCxnSpPr>
+        <p:spPr>
+          <a:xfrm flipV="1">
+            <a:off x="5313687" y="5617634"/>
+            <a:ext cx="2148" cy="712628"/>
+          </a:xfrm>
+          <a:prstGeom prst="straightConnector1">
+            <a:avLst/>
+          </a:prstGeom>
+          <a:ln w="28575">
+            <a:solidFill>
+              <a:schemeClr val="tx1"/>
+            </a:solidFill>
+            <a:tailEnd type="triangle"/>
+          </a:ln>
+        </p:spPr>
+        <p:style>
+          <a:lnRef idx="1">
+            <a:schemeClr val="accent1"/>
+          </a:lnRef>
+          <a:fillRef idx="0">
+            <a:schemeClr val="accent1"/>
+          </a:fillRef>
+          <a:effectRef idx="0">
+            <a:schemeClr val="accent1"/>
+          </a:effectRef>
+          <a:fontRef idx="minor">
+            <a:schemeClr val="tx1"/>
+          </a:fontRef>
+        </p:style>
+      </p:cxnSp>
+      <p:cxnSp>
+        <p:nvCxnSpPr>
+          <p:cNvPr id="43" name="Connecteur droit avec flèche 42">
+            <a:extLst>
+              <a:ext uri="{FF2B5EF4-FFF2-40B4-BE49-F238E27FC236}">
+                <a16:creationId xmlns:a16="http://schemas.microsoft.com/office/drawing/2014/main" id="{C37C2F8C-786A-4078-A7A8-2A6AD542D8E7}"/>
+              </a:ext>
+            </a:extLst>
+          </p:cNvPr>
+          <p:cNvCxnSpPr>
+            <a:cxnSpLocks/>
+          </p:cNvCxnSpPr>
+          <p:nvPr/>
+        </p:nvCxnSpPr>
+        <p:spPr>
+          <a:xfrm>
+            <a:off x="5032472" y="4737578"/>
+            <a:ext cx="0" cy="218941"/>
+          </a:xfrm>
+          <a:prstGeom prst="straightConnector1">
+            <a:avLst/>
+          </a:prstGeom>
+          <a:ln w="28575">
+            <a:solidFill>
+              <a:schemeClr val="tx1"/>
+            </a:solidFill>
+            <a:tailEnd type="triangle"/>
+          </a:ln>
+        </p:spPr>
+        <p:style>
+          <a:lnRef idx="1">
+            <a:schemeClr val="accent1"/>
+          </a:lnRef>
+          <a:fillRef idx="0">
+            <a:schemeClr val="accent1"/>
+          </a:fillRef>
+          <a:effectRef idx="0">
+            <a:schemeClr val="accent1"/>
+          </a:effectRef>
+          <a:fontRef idx="minor">
+            <a:schemeClr val="tx1"/>
+          </a:fontRef>
+        </p:style>
+      </p:cxnSp>
+      <p:sp>
+        <p:nvSpPr>
+          <p:cNvPr id="44" name="ZoneTexte 43">
+            <a:extLst>
+              <a:ext uri="{FF2B5EF4-FFF2-40B4-BE49-F238E27FC236}">
+                <a16:creationId xmlns:a16="http://schemas.microsoft.com/office/drawing/2014/main" id="{67B454BE-5DDF-4500-8F33-4796F377BB91}"/>
+              </a:ext>
+            </a:extLst>
+          </p:cNvPr>
+          <p:cNvSpPr txBox="1"/>
+          <p:nvPr/>
+        </p:nvSpPr>
+        <p:spPr>
+          <a:xfrm>
+            <a:off x="4790188" y="4713620"/>
+            <a:ext cx="237566" cy="369332"/>
+          </a:xfrm>
+          <a:prstGeom prst="rect">
+            <a:avLst/>
+          </a:prstGeom>
+          <a:noFill/>
+        </p:spPr>
+        <p:txBody>
+          <a:bodyPr wrap="none" rtlCol="0">
+            <a:spAutoFit/>
+          </a:bodyPr>
+          <a:lstStyle/>
+          <a:p>
+            <a:r>
+              <a:rPr lang="fr-FR" dirty="0"/>
+              <a:t>i</a:t>
+            </a:r>
+          </a:p>
+        </p:txBody>
+      </p:sp>
+      <p:sp>
+        <p:nvSpPr>
+          <p:cNvPr id="45" name="ZoneTexte 44">
+            <a:extLst>
+              <a:ext uri="{FF2B5EF4-FFF2-40B4-BE49-F238E27FC236}">
+                <a16:creationId xmlns:a16="http://schemas.microsoft.com/office/drawing/2014/main" id="{F036630A-CFB2-4959-A214-F4C6284F5BA4}"/>
+              </a:ext>
+            </a:extLst>
+          </p:cNvPr>
+          <p:cNvSpPr txBox="1"/>
+          <p:nvPr/>
+        </p:nvSpPr>
+        <p:spPr>
+          <a:xfrm>
+            <a:off x="3729896" y="5305107"/>
+            <a:ext cx="632289" cy="369332"/>
+          </a:xfrm>
+          <a:prstGeom prst="rect">
+            <a:avLst/>
+          </a:prstGeom>
+          <a:noFill/>
+        </p:spPr>
+        <p:txBody>
+          <a:bodyPr wrap="none" rtlCol="0">
+            <a:spAutoFit/>
+          </a:bodyPr>
+          <a:lstStyle/>
+          <a:p>
+            <a:r>
+              <a:rPr lang="fr-FR" dirty="0"/>
+              <a:t>V</a:t>
+            </a:r>
+            <a:r>
+              <a:rPr lang="fr-FR" baseline="-25000" dirty="0"/>
+              <a:t>GPIO</a:t>
+            </a:r>
+          </a:p>
+        </p:txBody>
+      </p:sp>
+      <p:sp>
+        <p:nvSpPr>
+          <p:cNvPr id="46" name="ZoneTexte 45">
+            <a:extLst>
+              <a:ext uri="{FF2B5EF4-FFF2-40B4-BE49-F238E27FC236}">
+                <a16:creationId xmlns:a16="http://schemas.microsoft.com/office/drawing/2014/main" id="{F0F11D3F-2EB8-434F-B3E3-61DC6F8DC578}"/>
+              </a:ext>
+            </a:extLst>
+          </p:cNvPr>
+          <p:cNvSpPr txBox="1"/>
+          <p:nvPr/>
+        </p:nvSpPr>
+        <p:spPr>
+          <a:xfrm>
+            <a:off x="5334729" y="5046532"/>
+            <a:ext cx="656718" cy="369332"/>
+          </a:xfrm>
+          <a:prstGeom prst="rect">
+            <a:avLst/>
+          </a:prstGeom>
+          <a:noFill/>
+        </p:spPr>
+        <p:txBody>
+          <a:bodyPr wrap="none" rtlCol="0">
+            <a:spAutoFit/>
+          </a:bodyPr>
+          <a:lstStyle/>
+          <a:p>
+            <a:r>
+              <a:rPr lang="fr-FR" dirty="0" err="1"/>
+              <a:t>V</a:t>
+            </a:r>
+            <a:r>
+              <a:rPr lang="fr-FR" baseline="-25000" dirty="0" err="1"/>
+              <a:t>r</a:t>
+            </a:r>
+            <a:r>
+              <a:rPr lang="fr-FR" dirty="0"/>
+              <a:t>=Ri</a:t>
+            </a:r>
+            <a:endParaRPr lang="fr-FR" baseline="-25000" dirty="0"/>
+          </a:p>
+        </p:txBody>
+      </p:sp>
+      <p:sp>
+        <p:nvSpPr>
+          <p:cNvPr id="47" name="ZoneTexte 46">
+            <a:extLst>
+              <a:ext uri="{FF2B5EF4-FFF2-40B4-BE49-F238E27FC236}">
+                <a16:creationId xmlns:a16="http://schemas.microsoft.com/office/drawing/2014/main" id="{5FF65256-FB8F-400B-ABF2-A1D6B703CFB1}"/>
+              </a:ext>
+            </a:extLst>
+          </p:cNvPr>
+          <p:cNvSpPr txBox="1"/>
+          <p:nvPr/>
+        </p:nvSpPr>
+        <p:spPr>
+          <a:xfrm>
+            <a:off x="5355049" y="5740626"/>
+            <a:ext cx="362600" cy="369332"/>
+          </a:xfrm>
+          <a:prstGeom prst="rect">
+            <a:avLst/>
+          </a:prstGeom>
+          <a:noFill/>
+        </p:spPr>
+        <p:txBody>
+          <a:bodyPr wrap="none" rtlCol="0">
+            <a:spAutoFit/>
+          </a:bodyPr>
+          <a:lstStyle/>
+          <a:p>
+            <a:r>
+              <a:rPr lang="fr-FR" dirty="0"/>
+              <a:t>V</a:t>
+            </a:r>
+            <a:r>
+              <a:rPr lang="fr-FR" baseline="-25000" dirty="0"/>
+              <a:t>f</a:t>
+            </a:r>
+          </a:p>
+        </p:txBody>
+      </p:sp>
+      <p:sp>
+        <p:nvSpPr>
+          <p:cNvPr id="48" name="Rectangle 47">
+            <a:extLst>
+              <a:ext uri="{FF2B5EF4-FFF2-40B4-BE49-F238E27FC236}">
+                <a16:creationId xmlns:a16="http://schemas.microsoft.com/office/drawing/2014/main" id="{8FD565E9-E75E-4338-B160-8449F36A52E4}"/>
+              </a:ext>
+            </a:extLst>
+          </p:cNvPr>
+          <p:cNvSpPr/>
+          <p:nvPr/>
+        </p:nvSpPr>
+        <p:spPr>
+          <a:xfrm>
+            <a:off x="4655712" y="5066630"/>
+            <a:ext cx="309700" cy="369332"/>
+          </a:xfrm>
+          <a:prstGeom prst="rect">
+            <a:avLst/>
+          </a:prstGeom>
+        </p:spPr>
+        <p:txBody>
+          <a:bodyPr wrap="none">
+            <a:spAutoFit/>
+          </a:bodyPr>
+          <a:lstStyle/>
+          <a:p>
+            <a:r>
+              <a:rPr lang="fr-FR" dirty="0"/>
+              <a:t>R</a:t>
+            </a:r>
+          </a:p>
+        </p:txBody>
+      </p:sp>
+      <p:grpSp>
+        <p:nvGrpSpPr>
+          <p:cNvPr id="49" name="Groupe 48">
+            <a:extLst>
+              <a:ext uri="{FF2B5EF4-FFF2-40B4-BE49-F238E27FC236}">
+                <a16:creationId xmlns:a16="http://schemas.microsoft.com/office/drawing/2014/main" id="{289BEC99-AF84-4BB3-A1AF-DC5AA21D27FB}"/>
+              </a:ext>
+            </a:extLst>
+          </p:cNvPr>
+          <p:cNvGrpSpPr/>
+          <p:nvPr/>
+        </p:nvGrpSpPr>
+        <p:grpSpPr>
+          <a:xfrm>
+            <a:off x="6427241" y="5379410"/>
+            <a:ext cx="1261476" cy="722431"/>
+            <a:chOff x="4866918" y="3003927"/>
+            <a:chExt cx="1261476" cy="722431"/>
+          </a:xfrm>
+        </p:grpSpPr>
+        <p:sp>
+          <p:nvSpPr>
+            <p:cNvPr id="50" name="ZoneTexte 49">
+              <a:extLst>
+                <a:ext uri="{FF2B5EF4-FFF2-40B4-BE49-F238E27FC236}">
+                  <a16:creationId xmlns:a16="http://schemas.microsoft.com/office/drawing/2014/main" id="{BBBA9C6D-9685-40C1-A419-8B05700147FC}"/>
+                </a:ext>
+              </a:extLst>
+            </p:cNvPr>
+            <p:cNvSpPr txBox="1"/>
+            <p:nvPr/>
+          </p:nvSpPr>
+          <p:spPr>
+            <a:xfrm>
+              <a:off x="4866918" y="3172360"/>
+              <a:ext cx="478016" cy="369332"/>
+            </a:xfrm>
+            <a:prstGeom prst="rect">
+              <a:avLst/>
+            </a:prstGeom>
+            <a:noFill/>
+          </p:spPr>
+          <p:txBody>
+            <a:bodyPr wrap="none" rtlCol="0">
+              <a:spAutoFit/>
+            </a:bodyPr>
+            <a:lstStyle/>
+            <a:p>
+              <a:r>
+                <a:rPr lang="fr-FR" dirty="0"/>
+                <a:t>R =</a:t>
+              </a:r>
+            </a:p>
+          </p:txBody>
+        </p:sp>
+        <p:sp>
+          <p:nvSpPr>
+            <p:cNvPr id="51" name="ZoneTexte 50">
+              <a:extLst>
+                <a:ext uri="{FF2B5EF4-FFF2-40B4-BE49-F238E27FC236}">
+                  <a16:creationId xmlns:a16="http://schemas.microsoft.com/office/drawing/2014/main" id="{F11BED76-4DF9-414D-A9A5-AADE8B2585FA}"/>
+                </a:ext>
+              </a:extLst>
+            </p:cNvPr>
+            <p:cNvSpPr txBox="1"/>
+            <p:nvPr/>
+          </p:nvSpPr>
+          <p:spPr>
+            <a:xfrm>
+              <a:off x="5247640" y="3003927"/>
+              <a:ext cx="880754" cy="369332"/>
+            </a:xfrm>
+            <a:prstGeom prst="rect">
+              <a:avLst/>
+            </a:prstGeom>
+            <a:noFill/>
+          </p:spPr>
+          <p:txBody>
+            <a:bodyPr wrap="none" rtlCol="0">
+              <a:spAutoFit/>
+            </a:bodyPr>
+            <a:lstStyle/>
+            <a:p>
+              <a:r>
+                <a:rPr lang="fr-FR" dirty="0"/>
+                <a:t>V</a:t>
+              </a:r>
+              <a:r>
+                <a:rPr lang="fr-FR" baseline="-25000" dirty="0"/>
+                <a:t>GPIO</a:t>
+              </a:r>
+              <a:r>
+                <a:rPr lang="fr-FR" dirty="0"/>
+                <a:t>-V</a:t>
+              </a:r>
+              <a:r>
+                <a:rPr lang="fr-FR" baseline="-25000" dirty="0"/>
+                <a:t>f</a:t>
+              </a:r>
+            </a:p>
+          </p:txBody>
+        </p:sp>
+        <p:cxnSp>
+          <p:nvCxnSpPr>
+            <p:cNvPr id="52" name="Connecteur droit avec flèche 51">
+              <a:extLst>
+                <a:ext uri="{FF2B5EF4-FFF2-40B4-BE49-F238E27FC236}">
+                  <a16:creationId xmlns:a16="http://schemas.microsoft.com/office/drawing/2014/main" id="{26BD5E33-1809-4A6C-A126-D1ACC5BD7C0C}"/>
+                </a:ext>
+              </a:extLst>
+            </p:cNvPr>
+            <p:cNvCxnSpPr>
+              <a:cxnSpLocks/>
+            </p:cNvCxnSpPr>
+            <p:nvPr/>
+          </p:nvCxnSpPr>
+          <p:spPr>
+            <a:xfrm>
+              <a:off x="5324189" y="3370898"/>
+              <a:ext cx="727656" cy="0"/>
+            </a:xfrm>
+            <a:prstGeom prst="straightConnector1">
+              <a:avLst/>
+            </a:prstGeom>
+            <a:ln w="12700">
+              <a:solidFill>
+                <a:schemeClr val="tx1"/>
+              </a:solidFill>
+              <a:headEnd type="none" w="med" len="med"/>
+              <a:tailEnd type="none" w="med" len="med"/>
+            </a:ln>
+          </p:spPr>
+          <p:style>
+            <a:lnRef idx="1">
+              <a:schemeClr val="accent1"/>
+            </a:lnRef>
+            <a:fillRef idx="0">
+              <a:schemeClr val="accent1"/>
+            </a:fillRef>
+            <a:effectRef idx="0">
+              <a:schemeClr val="accent1"/>
+            </a:effectRef>
+            <a:fontRef idx="minor">
+              <a:schemeClr val="tx1"/>
+            </a:fontRef>
+          </p:style>
+        </p:cxnSp>
+        <p:sp>
+          <p:nvSpPr>
+            <p:cNvPr id="53" name="ZoneTexte 52">
+              <a:extLst>
+                <a:ext uri="{FF2B5EF4-FFF2-40B4-BE49-F238E27FC236}">
+                  <a16:creationId xmlns:a16="http://schemas.microsoft.com/office/drawing/2014/main" id="{F5876999-FB26-4ADB-B8FE-A6BEAF922A7D}"/>
+                </a:ext>
+              </a:extLst>
+            </p:cNvPr>
+            <p:cNvSpPr txBox="1"/>
+            <p:nvPr/>
+          </p:nvSpPr>
+          <p:spPr>
+            <a:xfrm>
+              <a:off x="5530671" y="3357026"/>
+              <a:ext cx="237566" cy="369332"/>
+            </a:xfrm>
+            <a:prstGeom prst="rect">
+              <a:avLst/>
+            </a:prstGeom>
+            <a:noFill/>
+          </p:spPr>
+          <p:txBody>
+            <a:bodyPr wrap="none" rtlCol="0">
+              <a:spAutoFit/>
+            </a:bodyPr>
+            <a:lstStyle/>
+            <a:p>
+              <a:r>
+                <a:rPr lang="fr-FR" dirty="0"/>
+                <a:t>i</a:t>
+              </a:r>
+            </a:p>
+          </p:txBody>
+        </p:sp>
+      </p:grpSp>
+      <p:grpSp>
+        <p:nvGrpSpPr>
+          <p:cNvPr id="54" name="Groupe 53">
+            <a:extLst>
+              <a:ext uri="{FF2B5EF4-FFF2-40B4-BE49-F238E27FC236}">
+                <a16:creationId xmlns:a16="http://schemas.microsoft.com/office/drawing/2014/main" id="{C0454B63-49F8-4ED0-8460-CCD12D409C42}"/>
+              </a:ext>
+            </a:extLst>
+          </p:cNvPr>
+          <p:cNvGrpSpPr/>
+          <p:nvPr/>
+        </p:nvGrpSpPr>
+        <p:grpSpPr>
+          <a:xfrm>
+            <a:off x="550457" y="300272"/>
             <a:ext cx="10137774" cy="2071886"/>
             <a:chOff x="968376" y="292927"/>
             <a:chExt cx="10137774" cy="2071886"/>
@@ -3352,10 +4842,10 @@
         </p:grpSpPr>
         <p:pic>
           <p:nvPicPr>
-            <p:cNvPr id="7" name="Image 6">
+            <p:cNvPr id="55" name="Image 54">
               <a:extLst>
                 <a:ext uri="{FF2B5EF4-FFF2-40B4-BE49-F238E27FC236}">
-                  <a16:creationId xmlns:a16="http://schemas.microsoft.com/office/drawing/2014/main" id="{EC92CACB-0CC8-4D06-A2B6-62ED111C231B}"/>
+                  <a16:creationId xmlns:a16="http://schemas.microsoft.com/office/drawing/2014/main" id="{7CBF80B7-1A1B-4A04-8124-A951307F41D5}"/>
                 </a:ext>
               </a:extLst>
             </p:cNvPr>
@@ -3382,10 +4872,10 @@
         </p:pic>
         <p:sp>
           <p:nvSpPr>
-            <p:cNvPr id="8" name="Rectangle 7">
+            <p:cNvPr id="56" name="Rectangle 55">
               <a:extLst>
                 <a:ext uri="{FF2B5EF4-FFF2-40B4-BE49-F238E27FC236}">
-                  <a16:creationId xmlns:a16="http://schemas.microsoft.com/office/drawing/2014/main" id="{74BFE1DD-366C-4CE5-B782-C10F09CE6B7B}"/>
+                  <a16:creationId xmlns:a16="http://schemas.microsoft.com/office/drawing/2014/main" id="{31FA04E9-E32F-4AFC-B160-824AD6EBD07C}"/>
                 </a:ext>
               </a:extLst>
             </p:cNvPr>
@@ -3434,10 +4924,10 @@
         </p:sp>
         <p:pic>
           <p:nvPicPr>
-            <p:cNvPr id="10" name="Image 9">
+            <p:cNvPr id="57" name="Image 56">
               <a:extLst>
                 <a:ext uri="{FF2B5EF4-FFF2-40B4-BE49-F238E27FC236}">
-                  <a16:creationId xmlns:a16="http://schemas.microsoft.com/office/drawing/2014/main" id="{20E5C6D8-B2D4-4662-8A81-6BBA3E2EDCF1}"/>
+                  <a16:creationId xmlns:a16="http://schemas.microsoft.com/office/drawing/2014/main" id="{F2409755-DF9D-4639-B4DD-19ED34542215}"/>
                 </a:ext>
               </a:extLst>
             </p:cNvPr>
@@ -3464,10 +4954,10 @@
         </p:pic>
         <p:grpSp>
           <p:nvGrpSpPr>
-            <p:cNvPr id="15" name="Groupe 14">
+            <p:cNvPr id="58" name="Groupe 57">
               <a:extLst>
                 <a:ext uri="{FF2B5EF4-FFF2-40B4-BE49-F238E27FC236}">
-                  <a16:creationId xmlns:a16="http://schemas.microsoft.com/office/drawing/2014/main" id="{74200A21-853F-45A0-ABEA-1B2BAD2EE19E}"/>
+                  <a16:creationId xmlns:a16="http://schemas.microsoft.com/office/drawing/2014/main" id="{C51DD99C-B17A-4DE3-8A81-FF603D073547}"/>
                 </a:ext>
               </a:extLst>
             </p:cNvPr>
@@ -3484,10 +4974,10 @@
           </p:grpSpPr>
           <p:sp>
             <p:nvSpPr>
-              <p:cNvPr id="11" name="Rectangle 10">
+              <p:cNvPr id="67" name="Rectangle 66">
                 <a:extLst>
                   <a:ext uri="{FF2B5EF4-FFF2-40B4-BE49-F238E27FC236}">
-                    <a16:creationId xmlns:a16="http://schemas.microsoft.com/office/drawing/2014/main" id="{112A0944-CF29-43F3-8BA4-35B4A1D3B57E}"/>
+                    <a16:creationId xmlns:a16="http://schemas.microsoft.com/office/drawing/2014/main" id="{0ADC80FF-321D-40B5-9663-D30B27914DAD}"/>
                   </a:ext>
                 </a:extLst>
               </p:cNvPr>
@@ -3533,10 +5023,10 @@
           </p:sp>
           <p:sp>
             <p:nvSpPr>
-              <p:cNvPr id="12" name="Rectangle 11">
+              <p:cNvPr id="68" name="Rectangle 67">
                 <a:extLst>
                   <a:ext uri="{FF2B5EF4-FFF2-40B4-BE49-F238E27FC236}">
-                    <a16:creationId xmlns:a16="http://schemas.microsoft.com/office/drawing/2014/main" id="{6FFEE4DB-147B-482E-9764-0FD3C457AC9F}"/>
+                    <a16:creationId xmlns:a16="http://schemas.microsoft.com/office/drawing/2014/main" id="{DAD7D0DF-B4AD-4B10-B640-BFAF63DFC3C3}"/>
                   </a:ext>
                 </a:extLst>
               </p:cNvPr>
@@ -3582,10 +5072,10 @@
           </p:sp>
           <p:sp>
             <p:nvSpPr>
-              <p:cNvPr id="13" name="Rectangle 12">
+              <p:cNvPr id="69" name="Rectangle 68">
                 <a:extLst>
                   <a:ext uri="{FF2B5EF4-FFF2-40B4-BE49-F238E27FC236}">
-                    <a16:creationId xmlns:a16="http://schemas.microsoft.com/office/drawing/2014/main" id="{7B9E869B-3CBE-4472-AE73-2ADF54B64AA6}"/>
+                    <a16:creationId xmlns:a16="http://schemas.microsoft.com/office/drawing/2014/main" id="{73731F08-D59E-441B-9B96-3DF6CCE93459}"/>
                   </a:ext>
                 </a:extLst>
               </p:cNvPr>
@@ -3634,10 +5124,10 @@
           </p:sp>
           <p:sp>
             <p:nvSpPr>
-              <p:cNvPr id="14" name="Rectangle 13">
+              <p:cNvPr id="70" name="Rectangle 69">
                 <a:extLst>
                   <a:ext uri="{FF2B5EF4-FFF2-40B4-BE49-F238E27FC236}">
-                    <a16:creationId xmlns:a16="http://schemas.microsoft.com/office/drawing/2014/main" id="{4B5562E9-D347-4A41-97F1-EBC27B43E2B4}"/>
+                    <a16:creationId xmlns:a16="http://schemas.microsoft.com/office/drawing/2014/main" id="{4677CBC2-8A90-45DD-A26D-6666E3DC6040}"/>
                   </a:ext>
                 </a:extLst>
               </p:cNvPr>
@@ -3687,10 +5177,10 @@
         </p:grpSp>
         <p:cxnSp>
           <p:nvCxnSpPr>
-            <p:cNvPr id="17" name="Connecteur droit avec flèche 16">
+            <p:cNvPr id="59" name="Connecteur droit avec flèche 58">
               <a:extLst>
                 <a:ext uri="{FF2B5EF4-FFF2-40B4-BE49-F238E27FC236}">
-                  <a16:creationId xmlns:a16="http://schemas.microsoft.com/office/drawing/2014/main" id="{3058892A-8762-4AFC-8697-69D54CE12C72}"/>
+                  <a16:creationId xmlns:a16="http://schemas.microsoft.com/office/drawing/2014/main" id="{B17687A4-38F4-4A75-B6C1-A6434D70923E}"/>
                 </a:ext>
               </a:extLst>
             </p:cNvPr>
@@ -3727,10 +5217,10 @@
         </p:cxnSp>
         <p:sp>
           <p:nvSpPr>
-            <p:cNvPr id="18" name="ZoneTexte 17">
+            <p:cNvPr id="60" name="ZoneTexte 59">
               <a:extLst>
                 <a:ext uri="{FF2B5EF4-FFF2-40B4-BE49-F238E27FC236}">
-                  <a16:creationId xmlns:a16="http://schemas.microsoft.com/office/drawing/2014/main" id="{80E66910-960B-4846-BECE-4879915B8697}"/>
+                  <a16:creationId xmlns:a16="http://schemas.microsoft.com/office/drawing/2014/main" id="{C77672D6-7A8E-4B89-910B-C249EF93A4F1}"/>
                 </a:ext>
               </a:extLst>
             </p:cNvPr>
@@ -3762,10 +5252,10 @@
         </p:sp>
         <p:sp>
           <p:nvSpPr>
-            <p:cNvPr id="19" name="ZoneTexte 18">
+            <p:cNvPr id="61" name="ZoneTexte 60">
               <a:extLst>
                 <a:ext uri="{FF2B5EF4-FFF2-40B4-BE49-F238E27FC236}">
-                  <a16:creationId xmlns:a16="http://schemas.microsoft.com/office/drawing/2014/main" id="{FC5C034A-E969-454B-8F55-3976323D552A}"/>
+                  <a16:creationId xmlns:a16="http://schemas.microsoft.com/office/drawing/2014/main" id="{FC05CB48-351E-4D20-A552-03DB9F2C8CD9}"/>
                 </a:ext>
               </a:extLst>
             </p:cNvPr>
@@ -3797,10 +5287,10 @@
         </p:sp>
         <p:cxnSp>
           <p:nvCxnSpPr>
-            <p:cNvPr id="20" name="Connecteur droit avec flèche 19">
+            <p:cNvPr id="62" name="Connecteur droit avec flèche 61">
               <a:extLst>
                 <a:ext uri="{FF2B5EF4-FFF2-40B4-BE49-F238E27FC236}">
-                  <a16:creationId xmlns:a16="http://schemas.microsoft.com/office/drawing/2014/main" id="{14B80C03-9C6B-40BC-B040-A30CDA0258CF}"/>
+                  <a16:creationId xmlns:a16="http://schemas.microsoft.com/office/drawing/2014/main" id="{57A0568E-9DAD-48F4-ABEF-7F74C36C4F72}"/>
                 </a:ext>
               </a:extLst>
             </p:cNvPr>
@@ -3839,10 +5329,10 @@
         </p:cxnSp>
         <p:cxnSp>
           <p:nvCxnSpPr>
-            <p:cNvPr id="22" name="Connecteur droit avec flèche 21">
+            <p:cNvPr id="63" name="Connecteur droit avec flèche 62">
               <a:extLst>
                 <a:ext uri="{FF2B5EF4-FFF2-40B4-BE49-F238E27FC236}">
-                  <a16:creationId xmlns:a16="http://schemas.microsoft.com/office/drawing/2014/main" id="{EEF0A3C6-FAA7-4B3C-85DB-554FAA1D3434}"/>
+                  <a16:creationId xmlns:a16="http://schemas.microsoft.com/office/drawing/2014/main" id="{039DBCEE-B638-4D18-8915-9BD8C57FE2C6}"/>
                 </a:ext>
               </a:extLst>
             </p:cNvPr>
@@ -3881,10 +5371,10 @@
         </p:cxnSp>
         <p:sp>
           <p:nvSpPr>
-            <p:cNvPr id="26" name="ZoneTexte 25">
+            <p:cNvPr id="64" name="ZoneTexte 63">
               <a:extLst>
                 <a:ext uri="{FF2B5EF4-FFF2-40B4-BE49-F238E27FC236}">
-                  <a16:creationId xmlns:a16="http://schemas.microsoft.com/office/drawing/2014/main" id="{BB1F1F53-594F-4ABD-8208-5B3BD12585E9}"/>
+                  <a16:creationId xmlns:a16="http://schemas.microsoft.com/office/drawing/2014/main" id="{AA9FC35E-829D-416D-895C-F44F93539BEC}"/>
                 </a:ext>
               </a:extLst>
             </p:cNvPr>
@@ -3916,10 +5406,10 @@
         </p:sp>
         <p:cxnSp>
           <p:nvCxnSpPr>
-            <p:cNvPr id="27" name="Connecteur droit avec flèche 26">
+            <p:cNvPr id="65" name="Connecteur droit avec flèche 64">
               <a:extLst>
                 <a:ext uri="{FF2B5EF4-FFF2-40B4-BE49-F238E27FC236}">
-                  <a16:creationId xmlns:a16="http://schemas.microsoft.com/office/drawing/2014/main" id="{87152263-F194-4218-B91E-FCB25379F672}"/>
+                  <a16:creationId xmlns:a16="http://schemas.microsoft.com/office/drawing/2014/main" id="{A1D6CFFF-E1E1-43B2-90B2-14DA7730E7BC}"/>
                 </a:ext>
               </a:extLst>
             </p:cNvPr>
@@ -3958,10 +5448,10 @@
         </p:cxnSp>
         <p:sp>
           <p:nvSpPr>
-            <p:cNvPr id="29" name="ZoneTexte 28">
+            <p:cNvPr id="66" name="ZoneTexte 65">
               <a:extLst>
                 <a:ext uri="{FF2B5EF4-FFF2-40B4-BE49-F238E27FC236}">
-                  <a16:creationId xmlns:a16="http://schemas.microsoft.com/office/drawing/2014/main" id="{14FA811A-15BF-45D4-94E7-DAFB0D7678FD}"/>
+                  <a16:creationId xmlns:a16="http://schemas.microsoft.com/office/drawing/2014/main" id="{4A37ECAF-BC8D-42D4-8493-883128627F54}"/>
                 </a:ext>
               </a:extLst>
             </p:cNvPr>
@@ -3991,951 +5481,6 @@
             </a:p>
           </p:txBody>
         </p:sp>
-      </p:grpSp>
-      <p:grpSp>
-        <p:nvGrpSpPr>
-          <p:cNvPr id="31" name="Groupe 30">
-            <a:extLst>
-              <a:ext uri="{FF2B5EF4-FFF2-40B4-BE49-F238E27FC236}">
-                <a16:creationId xmlns:a16="http://schemas.microsoft.com/office/drawing/2014/main" id="{BB05DA28-7524-45C2-B8E3-9BBA00B507FF}"/>
-              </a:ext>
-            </a:extLst>
-          </p:cNvPr>
-          <p:cNvGrpSpPr/>
-          <p:nvPr/>
-        </p:nvGrpSpPr>
-        <p:grpSpPr>
-          <a:xfrm>
-            <a:off x="4960461" y="3516926"/>
-            <a:ext cx="2261551" cy="2933454"/>
-            <a:chOff x="240761" y="196162"/>
-            <a:chExt cx="2261551" cy="2933454"/>
-          </a:xfrm>
-        </p:grpSpPr>
-        <p:cxnSp>
-          <p:nvCxnSpPr>
-            <p:cNvPr id="32" name="Connecteur droit avec flèche 31">
-              <a:extLst>
-                <a:ext uri="{FF2B5EF4-FFF2-40B4-BE49-F238E27FC236}">
-                  <a16:creationId xmlns:a16="http://schemas.microsoft.com/office/drawing/2014/main" id="{A2F654D7-B4FA-4FD2-9DFC-1FE9DBECEC15}"/>
-                </a:ext>
-              </a:extLst>
-            </p:cNvPr>
-            <p:cNvCxnSpPr>
-              <a:cxnSpLocks/>
-            </p:cNvCxnSpPr>
-            <p:nvPr/>
-          </p:nvCxnSpPr>
-          <p:spPr>
-            <a:xfrm flipV="1">
-              <a:off x="835026" y="327098"/>
-              <a:ext cx="0" cy="1423116"/>
-            </a:xfrm>
-            <a:prstGeom prst="straightConnector1">
-              <a:avLst/>
-            </a:prstGeom>
-            <a:ln w="28575">
-              <a:solidFill>
-                <a:schemeClr val="tx1"/>
-              </a:solidFill>
-              <a:tailEnd type="triangle"/>
-            </a:ln>
-          </p:spPr>
-          <p:style>
-            <a:lnRef idx="1">
-              <a:schemeClr val="accent1"/>
-            </a:lnRef>
-            <a:fillRef idx="0">
-              <a:schemeClr val="accent1"/>
-            </a:fillRef>
-            <a:effectRef idx="0">
-              <a:schemeClr val="accent1"/>
-            </a:effectRef>
-            <a:fontRef idx="minor">
-              <a:schemeClr val="tx1"/>
-            </a:fontRef>
-          </p:style>
-        </p:cxnSp>
-        <p:cxnSp>
-          <p:nvCxnSpPr>
-            <p:cNvPr id="33" name="Connecteur droit avec flèche 32">
-              <a:extLst>
-                <a:ext uri="{FF2B5EF4-FFF2-40B4-BE49-F238E27FC236}">
-                  <a16:creationId xmlns:a16="http://schemas.microsoft.com/office/drawing/2014/main" id="{76E197AA-BECE-4671-9126-42856FC8713E}"/>
-                </a:ext>
-              </a:extLst>
-            </p:cNvPr>
-            <p:cNvCxnSpPr>
-              <a:cxnSpLocks/>
-            </p:cNvCxnSpPr>
-            <p:nvPr/>
-          </p:nvCxnSpPr>
-          <p:spPr>
-            <a:xfrm>
-              <a:off x="815706" y="202601"/>
-              <a:ext cx="727656" cy="0"/>
-            </a:xfrm>
-            <a:prstGeom prst="straightConnector1">
-              <a:avLst/>
-            </a:prstGeom>
-            <a:ln w="28575">
-              <a:solidFill>
-                <a:schemeClr val="tx1"/>
-              </a:solidFill>
-              <a:headEnd type="none" w="med" len="med"/>
-              <a:tailEnd type="none" w="med" len="med"/>
-            </a:ln>
-          </p:spPr>
-          <p:style>
-            <a:lnRef idx="1">
-              <a:schemeClr val="accent1"/>
-            </a:lnRef>
-            <a:fillRef idx="0">
-              <a:schemeClr val="accent1"/>
-            </a:fillRef>
-            <a:effectRef idx="0">
-              <a:schemeClr val="accent1"/>
-            </a:effectRef>
-            <a:fontRef idx="minor">
-              <a:schemeClr val="tx1"/>
-            </a:fontRef>
-          </p:style>
-        </p:cxnSp>
-        <p:cxnSp>
-          <p:nvCxnSpPr>
-            <p:cNvPr id="34" name="Connecteur droit avec flèche 33">
-              <a:extLst>
-                <a:ext uri="{FF2B5EF4-FFF2-40B4-BE49-F238E27FC236}">
-                  <a16:creationId xmlns:a16="http://schemas.microsoft.com/office/drawing/2014/main" id="{2E2FA0E6-72E4-4150-B25A-1BA410F7E15C}"/>
-                </a:ext>
-              </a:extLst>
-            </p:cNvPr>
-            <p:cNvCxnSpPr>
-              <a:cxnSpLocks/>
-            </p:cNvCxnSpPr>
-            <p:nvPr/>
-          </p:nvCxnSpPr>
-          <p:spPr>
-            <a:xfrm>
-              <a:off x="1543362" y="196162"/>
-              <a:ext cx="0" cy="388512"/>
-            </a:xfrm>
-            <a:prstGeom prst="straightConnector1">
-              <a:avLst/>
-            </a:prstGeom>
-            <a:ln w="28575">
-              <a:solidFill>
-                <a:schemeClr val="tx1"/>
-              </a:solidFill>
-              <a:headEnd type="none" w="med" len="med"/>
-              <a:tailEnd type="none" w="med" len="med"/>
-            </a:ln>
-          </p:spPr>
-          <p:style>
-            <a:lnRef idx="1">
-              <a:schemeClr val="accent1"/>
-            </a:lnRef>
-            <a:fillRef idx="0">
-              <a:schemeClr val="accent1"/>
-            </a:fillRef>
-            <a:effectRef idx="0">
-              <a:schemeClr val="accent1"/>
-            </a:effectRef>
-            <a:fontRef idx="minor">
-              <a:schemeClr val="tx1"/>
-            </a:fontRef>
-          </p:style>
-        </p:cxnSp>
-        <p:sp>
-          <p:nvSpPr>
-            <p:cNvPr id="35" name="Rectangle 34">
-              <a:extLst>
-                <a:ext uri="{FF2B5EF4-FFF2-40B4-BE49-F238E27FC236}">
-                  <a16:creationId xmlns:a16="http://schemas.microsoft.com/office/drawing/2014/main" id="{2525BF7E-2ECE-4885-AA27-A02181D69BE7}"/>
-                </a:ext>
-              </a:extLst>
-            </p:cNvPr>
-            <p:cNvSpPr/>
-            <p:nvPr/>
-          </p:nvSpPr>
-          <p:spPr>
-            <a:xfrm>
-              <a:off x="1459650" y="591116"/>
-              <a:ext cx="160956" cy="321971"/>
-            </a:xfrm>
-            <a:prstGeom prst="rect">
-              <a:avLst/>
-            </a:prstGeom>
-            <a:noFill/>
-            <a:ln w="28575">
-              <a:solidFill>
-                <a:schemeClr val="tx1"/>
-              </a:solidFill>
-            </a:ln>
-          </p:spPr>
-          <p:style>
-            <a:lnRef idx="2">
-              <a:schemeClr val="accent1">
-                <a:shade val="50000"/>
-              </a:schemeClr>
-            </a:lnRef>
-            <a:fillRef idx="1">
-              <a:schemeClr val="accent1"/>
-            </a:fillRef>
-            <a:effectRef idx="0">
-              <a:schemeClr val="accent1"/>
-            </a:effectRef>
-            <a:fontRef idx="minor">
-              <a:schemeClr val="lt1"/>
-            </a:fontRef>
-          </p:style>
-          <p:txBody>
-            <a:bodyPr rtlCol="0" anchor="ctr"/>
-            <a:lstStyle/>
-            <a:p>
-              <a:pPr algn="ctr"/>
-              <a:endParaRPr lang="fr-FR"/>
-            </a:p>
-          </p:txBody>
-        </p:sp>
-        <p:cxnSp>
-          <p:nvCxnSpPr>
-            <p:cNvPr id="36" name="Connecteur droit avec flèche 35">
-              <a:extLst>
-                <a:ext uri="{FF2B5EF4-FFF2-40B4-BE49-F238E27FC236}">
-                  <a16:creationId xmlns:a16="http://schemas.microsoft.com/office/drawing/2014/main" id="{D0953EA8-05B3-4924-B900-644CDE5590D2}"/>
-                </a:ext>
-              </a:extLst>
-            </p:cNvPr>
-            <p:cNvCxnSpPr>
-              <a:cxnSpLocks/>
-            </p:cNvCxnSpPr>
-            <p:nvPr/>
-          </p:nvCxnSpPr>
-          <p:spPr>
-            <a:xfrm>
-              <a:off x="1543362" y="913087"/>
-              <a:ext cx="0" cy="388512"/>
-            </a:xfrm>
-            <a:prstGeom prst="straightConnector1">
-              <a:avLst/>
-            </a:prstGeom>
-            <a:ln w="28575">
-              <a:solidFill>
-                <a:schemeClr val="tx1"/>
-              </a:solidFill>
-              <a:headEnd type="none" w="med" len="med"/>
-              <a:tailEnd type="none" w="med" len="med"/>
-            </a:ln>
-          </p:spPr>
-          <p:style>
-            <a:lnRef idx="1">
-              <a:schemeClr val="accent1"/>
-            </a:lnRef>
-            <a:fillRef idx="0">
-              <a:schemeClr val="accent1"/>
-            </a:fillRef>
-            <a:effectRef idx="0">
-              <a:schemeClr val="accent1"/>
-            </a:effectRef>
-            <a:fontRef idx="minor">
-              <a:schemeClr val="tx1"/>
-            </a:fontRef>
-          </p:style>
-        </p:cxnSp>
-        <p:sp>
-          <p:nvSpPr>
-            <p:cNvPr id="37" name="Triangle isocèle 36">
-              <a:extLst>
-                <a:ext uri="{FF2B5EF4-FFF2-40B4-BE49-F238E27FC236}">
-                  <a16:creationId xmlns:a16="http://schemas.microsoft.com/office/drawing/2014/main" id="{6DC235BE-22C8-42AB-8C96-738C3C4F7E89}"/>
-                </a:ext>
-              </a:extLst>
-            </p:cNvPr>
-            <p:cNvSpPr/>
-            <p:nvPr/>
-          </p:nvSpPr>
-          <p:spPr>
-            <a:xfrm rot="10800000">
-              <a:off x="1395254" y="1301599"/>
-              <a:ext cx="289732" cy="191031"/>
-            </a:xfrm>
-            <a:prstGeom prst="triangle">
-              <a:avLst/>
-            </a:prstGeom>
-            <a:noFill/>
-            <a:ln w="28575">
-              <a:solidFill>
-                <a:schemeClr val="tx1"/>
-              </a:solidFill>
-            </a:ln>
-          </p:spPr>
-          <p:style>
-            <a:lnRef idx="2">
-              <a:schemeClr val="accent1">
-                <a:shade val="50000"/>
-              </a:schemeClr>
-            </a:lnRef>
-            <a:fillRef idx="1">
-              <a:schemeClr val="accent1"/>
-            </a:fillRef>
-            <a:effectRef idx="0">
-              <a:schemeClr val="accent1"/>
-            </a:effectRef>
-            <a:fontRef idx="minor">
-              <a:schemeClr val="lt1"/>
-            </a:fontRef>
-          </p:style>
-          <p:txBody>
-            <a:bodyPr rtlCol="0" anchor="ctr"/>
-            <a:lstStyle/>
-            <a:p>
-              <a:pPr algn="ctr"/>
-              <a:endParaRPr lang="fr-FR"/>
-            </a:p>
-          </p:txBody>
-        </p:sp>
-        <p:cxnSp>
-          <p:nvCxnSpPr>
-            <p:cNvPr id="38" name="Connecteur droit avec flèche 37">
-              <a:extLst>
-                <a:ext uri="{FF2B5EF4-FFF2-40B4-BE49-F238E27FC236}">
-                  <a16:creationId xmlns:a16="http://schemas.microsoft.com/office/drawing/2014/main" id="{A79EC6FD-A5FD-4F10-9E9D-D8A7A59E6711}"/>
-                </a:ext>
-              </a:extLst>
-            </p:cNvPr>
-            <p:cNvCxnSpPr>
-              <a:cxnSpLocks/>
-            </p:cNvCxnSpPr>
-            <p:nvPr/>
-          </p:nvCxnSpPr>
-          <p:spPr>
-            <a:xfrm>
-              <a:off x="1543362" y="1492631"/>
-              <a:ext cx="0" cy="388512"/>
-            </a:xfrm>
-            <a:prstGeom prst="straightConnector1">
-              <a:avLst/>
-            </a:prstGeom>
-            <a:ln w="28575">
-              <a:solidFill>
-                <a:schemeClr val="tx1"/>
-              </a:solidFill>
-              <a:headEnd type="none" w="med" len="med"/>
-              <a:tailEnd type="none" w="med" len="med"/>
-            </a:ln>
-          </p:spPr>
-          <p:style>
-            <a:lnRef idx="1">
-              <a:schemeClr val="accent1"/>
-            </a:lnRef>
-            <a:fillRef idx="0">
-              <a:schemeClr val="accent1"/>
-            </a:fillRef>
-            <a:effectRef idx="0">
-              <a:schemeClr val="accent1"/>
-            </a:effectRef>
-            <a:fontRef idx="minor">
-              <a:schemeClr val="tx1"/>
-            </a:fontRef>
-          </p:style>
-        </p:cxnSp>
-        <p:cxnSp>
-          <p:nvCxnSpPr>
-            <p:cNvPr id="39" name="Connecteur droit avec flèche 38">
-              <a:extLst>
-                <a:ext uri="{FF2B5EF4-FFF2-40B4-BE49-F238E27FC236}">
-                  <a16:creationId xmlns:a16="http://schemas.microsoft.com/office/drawing/2014/main" id="{D620A22E-764B-497D-99D7-60A4B5963510}"/>
-                </a:ext>
-              </a:extLst>
-            </p:cNvPr>
-            <p:cNvCxnSpPr>
-              <a:cxnSpLocks/>
-            </p:cNvCxnSpPr>
-            <p:nvPr/>
-          </p:nvCxnSpPr>
-          <p:spPr>
-            <a:xfrm flipH="1">
-              <a:off x="1397401" y="1492631"/>
-              <a:ext cx="287599" cy="0"/>
-            </a:xfrm>
-            <a:prstGeom prst="straightConnector1">
-              <a:avLst/>
-            </a:prstGeom>
-            <a:ln w="28575">
-              <a:solidFill>
-                <a:schemeClr val="tx1"/>
-              </a:solidFill>
-              <a:headEnd type="none" w="med" len="med"/>
-              <a:tailEnd type="none" w="med" len="med"/>
-            </a:ln>
-          </p:spPr>
-          <p:style>
-            <a:lnRef idx="1">
-              <a:schemeClr val="accent1"/>
-            </a:lnRef>
-            <a:fillRef idx="0">
-              <a:schemeClr val="accent1"/>
-            </a:fillRef>
-            <a:effectRef idx="0">
-              <a:schemeClr val="accent1"/>
-            </a:effectRef>
-            <a:fontRef idx="minor">
-              <a:schemeClr val="tx1"/>
-            </a:fontRef>
-          </p:style>
-        </p:cxnSp>
-        <p:cxnSp>
-          <p:nvCxnSpPr>
-            <p:cNvPr id="40" name="Connecteur droit avec flèche 39">
-              <a:extLst>
-                <a:ext uri="{FF2B5EF4-FFF2-40B4-BE49-F238E27FC236}">
-                  <a16:creationId xmlns:a16="http://schemas.microsoft.com/office/drawing/2014/main" id="{40A9CD21-81E9-40FE-81A6-79BC3891E817}"/>
-                </a:ext>
-              </a:extLst>
-            </p:cNvPr>
-            <p:cNvCxnSpPr>
-              <a:cxnSpLocks/>
-            </p:cNvCxnSpPr>
-            <p:nvPr/>
-          </p:nvCxnSpPr>
-          <p:spPr>
-            <a:xfrm>
-              <a:off x="815706" y="1885440"/>
-              <a:ext cx="734070" cy="0"/>
-            </a:xfrm>
-            <a:prstGeom prst="straightConnector1">
-              <a:avLst/>
-            </a:prstGeom>
-            <a:ln w="28575">
-              <a:solidFill>
-                <a:schemeClr val="tx1"/>
-              </a:solidFill>
-              <a:headEnd type="none" w="med" len="med"/>
-              <a:tailEnd type="none" w="med" len="med"/>
-            </a:ln>
-          </p:spPr>
-          <p:style>
-            <a:lnRef idx="1">
-              <a:schemeClr val="accent1"/>
-            </a:lnRef>
-            <a:fillRef idx="0">
-              <a:schemeClr val="accent1"/>
-            </a:fillRef>
-            <a:effectRef idx="0">
-              <a:schemeClr val="accent1"/>
-            </a:effectRef>
-            <a:fontRef idx="minor">
-              <a:schemeClr val="tx1"/>
-            </a:fontRef>
-          </p:style>
-        </p:cxnSp>
-        <p:cxnSp>
-          <p:nvCxnSpPr>
-            <p:cNvPr id="41" name="Connecteur droit avec flèche 40">
-              <a:extLst>
-                <a:ext uri="{FF2B5EF4-FFF2-40B4-BE49-F238E27FC236}">
-                  <a16:creationId xmlns:a16="http://schemas.microsoft.com/office/drawing/2014/main" id="{6C575282-1860-441D-B172-E0BB07F011D0}"/>
-                </a:ext>
-              </a:extLst>
-            </p:cNvPr>
-            <p:cNvCxnSpPr>
-              <a:cxnSpLocks/>
-            </p:cNvCxnSpPr>
-            <p:nvPr/>
-          </p:nvCxnSpPr>
-          <p:spPr>
-            <a:xfrm flipV="1">
-              <a:off x="1824552" y="234801"/>
-              <a:ext cx="0" cy="787755"/>
-            </a:xfrm>
-            <a:prstGeom prst="straightConnector1">
-              <a:avLst/>
-            </a:prstGeom>
-            <a:ln w="28575">
-              <a:solidFill>
-                <a:schemeClr val="tx1"/>
-              </a:solidFill>
-              <a:tailEnd type="triangle"/>
-            </a:ln>
-          </p:spPr>
-          <p:style>
-            <a:lnRef idx="1">
-              <a:schemeClr val="accent1"/>
-            </a:lnRef>
-            <a:fillRef idx="0">
-              <a:schemeClr val="accent1"/>
-            </a:fillRef>
-            <a:effectRef idx="0">
-              <a:schemeClr val="accent1"/>
-            </a:effectRef>
-            <a:fontRef idx="minor">
-              <a:schemeClr val="tx1"/>
-            </a:fontRef>
-          </p:style>
-        </p:cxnSp>
-        <p:cxnSp>
-          <p:nvCxnSpPr>
-            <p:cNvPr id="42" name="Connecteur droit avec flèche 41">
-              <a:extLst>
-                <a:ext uri="{FF2B5EF4-FFF2-40B4-BE49-F238E27FC236}">
-                  <a16:creationId xmlns:a16="http://schemas.microsoft.com/office/drawing/2014/main" id="{6E44B196-BAE1-4594-8B19-4338A95279D6}"/>
-                </a:ext>
-              </a:extLst>
-            </p:cNvPr>
-            <p:cNvCxnSpPr>
-              <a:cxnSpLocks/>
-            </p:cNvCxnSpPr>
-            <p:nvPr/>
-          </p:nvCxnSpPr>
-          <p:spPr>
-            <a:xfrm flipV="1">
-              <a:off x="1824552" y="1114857"/>
-              <a:ext cx="2148" cy="712628"/>
-            </a:xfrm>
-            <a:prstGeom prst="straightConnector1">
-              <a:avLst/>
-            </a:prstGeom>
-            <a:ln w="28575">
-              <a:solidFill>
-                <a:schemeClr val="tx1"/>
-              </a:solidFill>
-              <a:tailEnd type="triangle"/>
-            </a:ln>
-          </p:spPr>
-          <p:style>
-            <a:lnRef idx="1">
-              <a:schemeClr val="accent1"/>
-            </a:lnRef>
-            <a:fillRef idx="0">
-              <a:schemeClr val="accent1"/>
-            </a:fillRef>
-            <a:effectRef idx="0">
-              <a:schemeClr val="accent1"/>
-            </a:effectRef>
-            <a:fontRef idx="minor">
-              <a:schemeClr val="tx1"/>
-            </a:fontRef>
-          </p:style>
-        </p:cxnSp>
-        <p:cxnSp>
-          <p:nvCxnSpPr>
-            <p:cNvPr id="43" name="Connecteur droit avec flèche 42">
-              <a:extLst>
-                <a:ext uri="{FF2B5EF4-FFF2-40B4-BE49-F238E27FC236}">
-                  <a16:creationId xmlns:a16="http://schemas.microsoft.com/office/drawing/2014/main" id="{C37C2F8C-786A-4078-A7A8-2A6AD542D8E7}"/>
-                </a:ext>
-              </a:extLst>
-            </p:cNvPr>
-            <p:cNvCxnSpPr>
-              <a:cxnSpLocks/>
-            </p:cNvCxnSpPr>
-            <p:nvPr/>
-          </p:nvCxnSpPr>
-          <p:spPr>
-            <a:xfrm>
-              <a:off x="1543337" y="234801"/>
-              <a:ext cx="0" cy="218941"/>
-            </a:xfrm>
-            <a:prstGeom prst="straightConnector1">
-              <a:avLst/>
-            </a:prstGeom>
-            <a:ln w="28575">
-              <a:solidFill>
-                <a:schemeClr val="tx1"/>
-              </a:solidFill>
-              <a:tailEnd type="triangle"/>
-            </a:ln>
-          </p:spPr>
-          <p:style>
-            <a:lnRef idx="1">
-              <a:schemeClr val="accent1"/>
-            </a:lnRef>
-            <a:fillRef idx="0">
-              <a:schemeClr val="accent1"/>
-            </a:fillRef>
-            <a:effectRef idx="0">
-              <a:schemeClr val="accent1"/>
-            </a:effectRef>
-            <a:fontRef idx="minor">
-              <a:schemeClr val="tx1"/>
-            </a:fontRef>
-          </p:style>
-        </p:cxnSp>
-        <p:sp>
-          <p:nvSpPr>
-            <p:cNvPr id="44" name="ZoneTexte 43">
-              <a:extLst>
-                <a:ext uri="{FF2B5EF4-FFF2-40B4-BE49-F238E27FC236}">
-                  <a16:creationId xmlns:a16="http://schemas.microsoft.com/office/drawing/2014/main" id="{67B454BE-5DDF-4500-8F33-4796F377BB91}"/>
-                </a:ext>
-              </a:extLst>
-            </p:cNvPr>
-            <p:cNvSpPr txBox="1"/>
-            <p:nvPr/>
-          </p:nvSpPr>
-          <p:spPr>
-            <a:xfrm>
-              <a:off x="1301053" y="210843"/>
-              <a:ext cx="237566" cy="369332"/>
-            </a:xfrm>
-            <a:prstGeom prst="rect">
-              <a:avLst/>
-            </a:prstGeom>
-            <a:noFill/>
-          </p:spPr>
-          <p:txBody>
-            <a:bodyPr wrap="none" rtlCol="0">
-              <a:spAutoFit/>
-            </a:bodyPr>
-            <a:lstStyle/>
-            <a:p>
-              <a:r>
-                <a:rPr lang="fr-FR" dirty="0"/>
-                <a:t>i</a:t>
-              </a:r>
-            </a:p>
-          </p:txBody>
-        </p:sp>
-        <p:sp>
-          <p:nvSpPr>
-            <p:cNvPr id="45" name="ZoneTexte 44">
-              <a:extLst>
-                <a:ext uri="{FF2B5EF4-FFF2-40B4-BE49-F238E27FC236}">
-                  <a16:creationId xmlns:a16="http://schemas.microsoft.com/office/drawing/2014/main" id="{F036630A-CFB2-4959-A214-F4C6284F5BA4}"/>
-                </a:ext>
-              </a:extLst>
-            </p:cNvPr>
-            <p:cNvSpPr txBox="1"/>
-            <p:nvPr/>
-          </p:nvSpPr>
-          <p:spPr>
-            <a:xfrm>
-              <a:off x="240761" y="802330"/>
-              <a:ext cx="632289" cy="369332"/>
-            </a:xfrm>
-            <a:prstGeom prst="rect">
-              <a:avLst/>
-            </a:prstGeom>
-            <a:noFill/>
-          </p:spPr>
-          <p:txBody>
-            <a:bodyPr wrap="none" rtlCol="0">
-              <a:spAutoFit/>
-            </a:bodyPr>
-            <a:lstStyle/>
-            <a:p>
-              <a:r>
-                <a:rPr lang="fr-FR" dirty="0"/>
-                <a:t>V</a:t>
-              </a:r>
-              <a:r>
-                <a:rPr lang="fr-FR" baseline="-25000" dirty="0"/>
-                <a:t>GPIO</a:t>
-              </a:r>
-            </a:p>
-          </p:txBody>
-        </p:sp>
-        <p:sp>
-          <p:nvSpPr>
-            <p:cNvPr id="46" name="ZoneTexte 45">
-              <a:extLst>
-                <a:ext uri="{FF2B5EF4-FFF2-40B4-BE49-F238E27FC236}">
-                  <a16:creationId xmlns:a16="http://schemas.microsoft.com/office/drawing/2014/main" id="{F0F11D3F-2EB8-434F-B3E3-61DC6F8DC578}"/>
-                </a:ext>
-              </a:extLst>
-            </p:cNvPr>
-            <p:cNvSpPr txBox="1"/>
-            <p:nvPr/>
-          </p:nvSpPr>
-          <p:spPr>
-            <a:xfrm>
-              <a:off x="1845594" y="543755"/>
-              <a:ext cx="656718" cy="369332"/>
-            </a:xfrm>
-            <a:prstGeom prst="rect">
-              <a:avLst/>
-            </a:prstGeom>
-            <a:noFill/>
-          </p:spPr>
-          <p:txBody>
-            <a:bodyPr wrap="none" rtlCol="0">
-              <a:spAutoFit/>
-            </a:bodyPr>
-            <a:lstStyle/>
-            <a:p>
-              <a:r>
-                <a:rPr lang="fr-FR" dirty="0" err="1"/>
-                <a:t>V</a:t>
-              </a:r>
-              <a:r>
-                <a:rPr lang="fr-FR" baseline="-25000" dirty="0" err="1"/>
-                <a:t>r</a:t>
-              </a:r>
-              <a:r>
-                <a:rPr lang="fr-FR" dirty="0"/>
-                <a:t>=Ri</a:t>
-              </a:r>
-              <a:endParaRPr lang="fr-FR" baseline="-25000" dirty="0"/>
-            </a:p>
-          </p:txBody>
-        </p:sp>
-        <p:sp>
-          <p:nvSpPr>
-            <p:cNvPr id="47" name="ZoneTexte 46">
-              <a:extLst>
-                <a:ext uri="{FF2B5EF4-FFF2-40B4-BE49-F238E27FC236}">
-                  <a16:creationId xmlns:a16="http://schemas.microsoft.com/office/drawing/2014/main" id="{5FF65256-FB8F-400B-ABF2-A1D6B703CFB1}"/>
-                </a:ext>
-              </a:extLst>
-            </p:cNvPr>
-            <p:cNvSpPr txBox="1"/>
-            <p:nvPr/>
-          </p:nvSpPr>
-          <p:spPr>
-            <a:xfrm>
-              <a:off x="1865914" y="1237849"/>
-              <a:ext cx="362600" cy="369332"/>
-            </a:xfrm>
-            <a:prstGeom prst="rect">
-              <a:avLst/>
-            </a:prstGeom>
-            <a:noFill/>
-          </p:spPr>
-          <p:txBody>
-            <a:bodyPr wrap="none" rtlCol="0">
-              <a:spAutoFit/>
-            </a:bodyPr>
-            <a:lstStyle/>
-            <a:p>
-              <a:r>
-                <a:rPr lang="fr-FR" dirty="0"/>
-                <a:t>V</a:t>
-              </a:r>
-              <a:r>
-                <a:rPr lang="fr-FR" baseline="-25000" dirty="0"/>
-                <a:t>f</a:t>
-              </a:r>
-            </a:p>
-          </p:txBody>
-        </p:sp>
-        <p:sp>
-          <p:nvSpPr>
-            <p:cNvPr id="48" name="Rectangle 47">
-              <a:extLst>
-                <a:ext uri="{FF2B5EF4-FFF2-40B4-BE49-F238E27FC236}">
-                  <a16:creationId xmlns:a16="http://schemas.microsoft.com/office/drawing/2014/main" id="{8FD565E9-E75E-4338-B160-8449F36A52E4}"/>
-                </a:ext>
-              </a:extLst>
-            </p:cNvPr>
-            <p:cNvSpPr/>
-            <p:nvPr/>
-          </p:nvSpPr>
-          <p:spPr>
-            <a:xfrm>
-              <a:off x="1166577" y="563853"/>
-              <a:ext cx="309700" cy="369332"/>
-            </a:xfrm>
-            <a:prstGeom prst="rect">
-              <a:avLst/>
-            </a:prstGeom>
-          </p:spPr>
-          <p:txBody>
-            <a:bodyPr wrap="none">
-              <a:spAutoFit/>
-            </a:bodyPr>
-            <a:lstStyle/>
-            <a:p>
-              <a:r>
-                <a:rPr lang="fr-FR" dirty="0"/>
-                <a:t>R</a:t>
-              </a:r>
-            </a:p>
-          </p:txBody>
-        </p:sp>
-        <p:grpSp>
-          <p:nvGrpSpPr>
-            <p:cNvPr id="49" name="Groupe 48">
-              <a:extLst>
-                <a:ext uri="{FF2B5EF4-FFF2-40B4-BE49-F238E27FC236}">
-                  <a16:creationId xmlns:a16="http://schemas.microsoft.com/office/drawing/2014/main" id="{289BEC99-AF84-4BB3-A1AF-DC5AA21D27FB}"/>
-                </a:ext>
-              </a:extLst>
-            </p:cNvPr>
-            <p:cNvGrpSpPr/>
-            <p:nvPr/>
-          </p:nvGrpSpPr>
-          <p:grpSpPr>
-            <a:xfrm>
-              <a:off x="607067" y="2407185"/>
-              <a:ext cx="1261476" cy="722431"/>
-              <a:chOff x="4866918" y="3003927"/>
-              <a:chExt cx="1261476" cy="722431"/>
-            </a:xfrm>
-          </p:grpSpPr>
-          <p:sp>
-            <p:nvSpPr>
-              <p:cNvPr id="50" name="ZoneTexte 49">
-                <a:extLst>
-                  <a:ext uri="{FF2B5EF4-FFF2-40B4-BE49-F238E27FC236}">
-                    <a16:creationId xmlns:a16="http://schemas.microsoft.com/office/drawing/2014/main" id="{BBBA9C6D-9685-40C1-A419-8B05700147FC}"/>
-                  </a:ext>
-                </a:extLst>
-              </p:cNvPr>
-              <p:cNvSpPr txBox="1"/>
-              <p:nvPr/>
-            </p:nvSpPr>
-            <p:spPr>
-              <a:xfrm>
-                <a:off x="4866918" y="3172360"/>
-                <a:ext cx="478016" cy="369332"/>
-              </a:xfrm>
-              <a:prstGeom prst="rect">
-                <a:avLst/>
-              </a:prstGeom>
-              <a:noFill/>
-            </p:spPr>
-            <p:txBody>
-              <a:bodyPr wrap="none" rtlCol="0">
-                <a:spAutoFit/>
-              </a:bodyPr>
-              <a:lstStyle/>
-              <a:p>
-                <a:r>
-                  <a:rPr lang="fr-FR" dirty="0"/>
-                  <a:t>R =</a:t>
-                </a:r>
-              </a:p>
-            </p:txBody>
-          </p:sp>
-          <p:sp>
-            <p:nvSpPr>
-              <p:cNvPr id="51" name="ZoneTexte 50">
-                <a:extLst>
-                  <a:ext uri="{FF2B5EF4-FFF2-40B4-BE49-F238E27FC236}">
-                    <a16:creationId xmlns:a16="http://schemas.microsoft.com/office/drawing/2014/main" id="{F11BED76-4DF9-414D-A9A5-AADE8B2585FA}"/>
-                  </a:ext>
-                </a:extLst>
-              </p:cNvPr>
-              <p:cNvSpPr txBox="1"/>
-              <p:nvPr/>
-            </p:nvSpPr>
-            <p:spPr>
-              <a:xfrm>
-                <a:off x="5247640" y="3003927"/>
-                <a:ext cx="880754" cy="369332"/>
-              </a:xfrm>
-              <a:prstGeom prst="rect">
-                <a:avLst/>
-              </a:prstGeom>
-              <a:noFill/>
-            </p:spPr>
-            <p:txBody>
-              <a:bodyPr wrap="none" rtlCol="0">
-                <a:spAutoFit/>
-              </a:bodyPr>
-              <a:lstStyle/>
-              <a:p>
-                <a:r>
-                  <a:rPr lang="fr-FR" dirty="0"/>
-                  <a:t>V</a:t>
-                </a:r>
-                <a:r>
-                  <a:rPr lang="fr-FR" baseline="-25000" dirty="0"/>
-                  <a:t>GPIO</a:t>
-                </a:r>
-                <a:r>
-                  <a:rPr lang="fr-FR" dirty="0"/>
-                  <a:t>-V</a:t>
-                </a:r>
-                <a:r>
-                  <a:rPr lang="fr-FR" baseline="-25000" dirty="0"/>
-                  <a:t>f</a:t>
-                </a:r>
-              </a:p>
-            </p:txBody>
-          </p:sp>
-          <p:cxnSp>
-            <p:nvCxnSpPr>
-              <p:cNvPr id="52" name="Connecteur droit avec flèche 51">
-                <a:extLst>
-                  <a:ext uri="{FF2B5EF4-FFF2-40B4-BE49-F238E27FC236}">
-                    <a16:creationId xmlns:a16="http://schemas.microsoft.com/office/drawing/2014/main" id="{26BD5E33-1809-4A6C-A126-D1ACC5BD7C0C}"/>
-                  </a:ext>
-                </a:extLst>
-              </p:cNvPr>
-              <p:cNvCxnSpPr>
-                <a:cxnSpLocks/>
-              </p:cNvCxnSpPr>
-              <p:nvPr/>
-            </p:nvCxnSpPr>
-            <p:spPr>
-              <a:xfrm>
-                <a:off x="5324189" y="3370898"/>
-                <a:ext cx="727656" cy="0"/>
-              </a:xfrm>
-              <a:prstGeom prst="straightConnector1">
-                <a:avLst/>
-              </a:prstGeom>
-              <a:ln w="12700">
-                <a:solidFill>
-                  <a:schemeClr val="tx1"/>
-                </a:solidFill>
-                <a:headEnd type="none" w="med" len="med"/>
-                <a:tailEnd type="none" w="med" len="med"/>
-              </a:ln>
-            </p:spPr>
-            <p:style>
-              <a:lnRef idx="1">
-                <a:schemeClr val="accent1"/>
-              </a:lnRef>
-              <a:fillRef idx="0">
-                <a:schemeClr val="accent1"/>
-              </a:fillRef>
-              <a:effectRef idx="0">
-                <a:schemeClr val="accent1"/>
-              </a:effectRef>
-              <a:fontRef idx="minor">
-                <a:schemeClr val="tx1"/>
-              </a:fontRef>
-            </p:style>
-          </p:cxnSp>
-          <p:sp>
-            <p:nvSpPr>
-              <p:cNvPr id="53" name="ZoneTexte 52">
-                <a:extLst>
-                  <a:ext uri="{FF2B5EF4-FFF2-40B4-BE49-F238E27FC236}">
-                    <a16:creationId xmlns:a16="http://schemas.microsoft.com/office/drawing/2014/main" id="{F5876999-FB26-4ADB-B8FE-A6BEAF922A7D}"/>
-                  </a:ext>
-                </a:extLst>
-              </p:cNvPr>
-              <p:cNvSpPr txBox="1"/>
-              <p:nvPr/>
-            </p:nvSpPr>
-            <p:spPr>
-              <a:xfrm>
-                <a:off x="5530671" y="3357026"/>
-                <a:ext cx="237566" cy="369332"/>
-              </a:xfrm>
-              <a:prstGeom prst="rect">
-                <a:avLst/>
-              </a:prstGeom>
-              <a:noFill/>
-            </p:spPr>
-            <p:txBody>
-              <a:bodyPr wrap="none" rtlCol="0">
-                <a:spAutoFit/>
-              </a:bodyPr>
-              <a:lstStyle/>
-              <a:p>
-                <a:r>
-                  <a:rPr lang="fr-FR" dirty="0"/>
-                  <a:t>i</a:t>
-                </a:r>
-              </a:p>
-            </p:txBody>
-          </p:sp>
-        </p:grpSp>
       </p:grpSp>
     </p:spTree>
     <p:extLst>
